--- a/Python/Lesson 02 - Conditionals and Control Structures/Lesson 02 - Conditional and Control Structures.pptx
+++ b/Python/Lesson 02 - Conditionals and Control Structures/Lesson 02 - Conditional and Control Structures.pptx
@@ -5,7 +5,7 @@
     <p:sldMasterId id="2147483684" r:id="rId1"/>
   </p:sldMasterIdLst>
   <p:notesMasterIdLst>
-    <p:notesMasterId r:id="rId31"/>
+    <p:notesMasterId r:id="rId23"/>
   </p:notesMasterIdLst>
   <p:sldIdLst>
     <p:sldId id="256" r:id="rId2"/>
@@ -28,32 +28,24 @@
     <p:sldId id="269" r:id="rId19"/>
     <p:sldId id="270" r:id="rId20"/>
     <p:sldId id="287" r:id="rId21"/>
-    <p:sldId id="272" r:id="rId22"/>
-    <p:sldId id="273" r:id="rId23"/>
-    <p:sldId id="274" r:id="rId24"/>
-    <p:sldId id="275" r:id="rId25"/>
-    <p:sldId id="276" r:id="rId26"/>
-    <p:sldId id="277" r:id="rId27"/>
-    <p:sldId id="278" r:id="rId28"/>
-    <p:sldId id="279" r:id="rId29"/>
-    <p:sldId id="280" r:id="rId30"/>
+    <p:sldId id="288" r:id="rId22"/>
   </p:sldIdLst>
   <p:sldSz cx="9144000" cy="5143500" type="screen16x9"/>
   <p:notesSz cx="6858000" cy="9144000"/>
   <p:embeddedFontLst>
     <p:embeddedFont>
       <p:font typeface="Consolas" panose="020B0609020204030204" pitchFamily="49" charset="0"/>
-      <p:regular r:id="rId32"/>
-      <p:bold r:id="rId33"/>
-      <p:italic r:id="rId34"/>
-      <p:boldItalic r:id="rId35"/>
+      <p:regular r:id="rId24"/>
+      <p:bold r:id="rId25"/>
+      <p:italic r:id="rId26"/>
+      <p:boldItalic r:id="rId27"/>
     </p:embeddedFont>
     <p:embeddedFont>
       <p:font typeface="Roboto" panose="02000000000000000000" pitchFamily="2" charset="0"/>
-      <p:regular r:id="rId36"/>
-      <p:bold r:id="rId37"/>
-      <p:italic r:id="rId38"/>
-      <p:boldItalic r:id="rId39"/>
+      <p:regular r:id="rId28"/>
+      <p:bold r:id="rId29"/>
+      <p:italic r:id="rId30"/>
+      <p:boldItalic r:id="rId31"/>
     </p:embeddedFont>
   </p:embeddedFontLst>
   <p:defaultTextStyle>
@@ -1493,738 +1485,6 @@
 </p:notes>
 </file>
 
-<file path=ppt/notesSlides/notesSlide14.xml><?xml version="1.0" encoding="utf-8"?>
-<p:notes xmlns:a="http://schemas.openxmlformats.org/drawingml/2006/main" xmlns:r="http://schemas.openxmlformats.org/officeDocument/2006/relationships" xmlns:p="http://schemas.openxmlformats.org/presentationml/2006/main" showMasterSp="0" showMasterPhAnim="0">
-  <p:cSld>
-    <p:spTree>
-      <p:nvGrpSpPr>
-        <p:cNvPr id="1" name="Shape 467"/>
-        <p:cNvGrpSpPr/>
-        <p:nvPr/>
-      </p:nvGrpSpPr>
-      <p:grpSpPr>
-        <a:xfrm>
-          <a:off x="0" y="0"/>
-          <a:ext cx="0" cy="0"/>
-          <a:chOff x="0" y="0"/>
-          <a:chExt cx="0" cy="0"/>
-        </a:xfrm>
-      </p:grpSpPr>
-      <p:sp>
-        <p:nvSpPr>
-          <p:cNvPr id="468" name="Google Shape;468;p17:notes"/>
-          <p:cNvSpPr>
-            <a:spLocks noGrp="1" noRot="1" noChangeAspect="1"/>
-          </p:cNvSpPr>
-          <p:nvPr>
-            <p:ph type="sldImg" idx="2"/>
-          </p:nvPr>
-        </p:nvSpPr>
-        <p:spPr>
-          <a:xfrm>
-            <a:off x="381000" y="685800"/>
-            <a:ext cx="6096000" cy="3429000"/>
-          </a:xfrm>
-          <a:custGeom>
-            <a:avLst/>
-            <a:gdLst/>
-            <a:ahLst/>
-            <a:cxnLst/>
-            <a:rect l="l" t="t" r="r" b="b"/>
-            <a:pathLst>
-              <a:path w="120000" h="120000" extrusionOk="0">
-                <a:moveTo>
-                  <a:pt x="0" y="0"/>
-                </a:moveTo>
-                <a:lnTo>
-                  <a:pt x="120000" y="0"/>
-                </a:lnTo>
-                <a:lnTo>
-                  <a:pt x="120000" y="120000"/>
-                </a:lnTo>
-                <a:lnTo>
-                  <a:pt x="0" y="120000"/>
-                </a:lnTo>
-                <a:close/>
-              </a:path>
-            </a:pathLst>
-          </a:custGeom>
-          <a:noFill/>
-          <a:ln w="9525" cap="flat" cmpd="sng">
-            <a:solidFill>
-              <a:srgbClr val="000000"/>
-            </a:solidFill>
-            <a:prstDash val="solid"/>
-            <a:round/>
-            <a:headEnd type="none" w="sm" len="sm"/>
-            <a:tailEnd type="none" w="sm" len="sm"/>
-          </a:ln>
-        </p:spPr>
-      </p:sp>
-      <p:sp>
-        <p:nvSpPr>
-          <p:cNvPr id="469" name="Google Shape;469;p17:notes"/>
-          <p:cNvSpPr txBox="1">
-            <a:spLocks noGrp="1"/>
-          </p:cNvSpPr>
-          <p:nvPr>
-            <p:ph type="body" idx="1"/>
-          </p:nvPr>
-        </p:nvSpPr>
-        <p:spPr>
-          <a:xfrm>
-            <a:off x="685800" y="4343400"/>
-            <a:ext cx="5486400" cy="4114800"/>
-          </a:xfrm>
-          <a:prstGeom prst="rect">
-            <a:avLst/>
-          </a:prstGeom>
-          <a:noFill/>
-          <a:ln>
-            <a:noFill/>
-          </a:ln>
-        </p:spPr>
-        <p:txBody>
-          <a:bodyPr spcFirstLastPara="1" wrap="square" lIns="91425" tIns="91425" rIns="91425" bIns="91425" anchor="t" anchorCtr="0">
-            <a:noAutofit/>
-          </a:bodyPr>
-          <a:lstStyle/>
-          <a:p>
-            <a:pPr marL="0" lvl="0" indent="0" algn="l" rtl="0">
-              <a:lnSpc>
-                <a:spcPct val="100000"/>
-              </a:lnSpc>
-              <a:spcBef>
-                <a:spcPts val="0"/>
-              </a:spcBef>
-              <a:spcAft>
-                <a:spcPts val="0"/>
-              </a:spcAft>
-              <a:buSzPts val="1100"/>
-              <a:buNone/>
-            </a:pPr>
-            <a:endParaRPr/>
-          </a:p>
-        </p:txBody>
-      </p:sp>
-    </p:spTree>
-  </p:cSld>
-  <p:clrMapOvr>
-    <a:masterClrMapping/>
-  </p:clrMapOvr>
-</p:notes>
-</file>
-
-<file path=ppt/notesSlides/notesSlide15.xml><?xml version="1.0" encoding="utf-8"?>
-<p:notes xmlns:a="http://schemas.openxmlformats.org/drawingml/2006/main" xmlns:r="http://schemas.openxmlformats.org/officeDocument/2006/relationships" xmlns:p="http://schemas.openxmlformats.org/presentationml/2006/main" showMasterSp="0" showMasterPhAnim="0">
-  <p:cSld>
-    <p:spTree>
-      <p:nvGrpSpPr>
-        <p:cNvPr id="1" name="Shape 473"/>
-        <p:cNvGrpSpPr/>
-        <p:nvPr/>
-      </p:nvGrpSpPr>
-      <p:grpSpPr>
-        <a:xfrm>
-          <a:off x="0" y="0"/>
-          <a:ext cx="0" cy="0"/>
-          <a:chOff x="0" y="0"/>
-          <a:chExt cx="0" cy="0"/>
-        </a:xfrm>
-      </p:grpSpPr>
-      <p:sp>
-        <p:nvSpPr>
-          <p:cNvPr id="474" name="Google Shape;474;p18:notes"/>
-          <p:cNvSpPr>
-            <a:spLocks noGrp="1" noRot="1" noChangeAspect="1"/>
-          </p:cNvSpPr>
-          <p:nvPr>
-            <p:ph type="sldImg" idx="2"/>
-          </p:nvPr>
-        </p:nvSpPr>
-        <p:spPr>
-          <a:xfrm>
-            <a:off x="381000" y="685800"/>
-            <a:ext cx="6096000" cy="3429000"/>
-          </a:xfrm>
-          <a:custGeom>
-            <a:avLst/>
-            <a:gdLst/>
-            <a:ahLst/>
-            <a:cxnLst/>
-            <a:rect l="l" t="t" r="r" b="b"/>
-            <a:pathLst>
-              <a:path w="120000" h="120000" extrusionOk="0">
-                <a:moveTo>
-                  <a:pt x="0" y="0"/>
-                </a:moveTo>
-                <a:lnTo>
-                  <a:pt x="120000" y="0"/>
-                </a:lnTo>
-                <a:lnTo>
-                  <a:pt x="120000" y="120000"/>
-                </a:lnTo>
-                <a:lnTo>
-                  <a:pt x="0" y="120000"/>
-                </a:lnTo>
-                <a:close/>
-              </a:path>
-            </a:pathLst>
-          </a:custGeom>
-          <a:noFill/>
-          <a:ln w="9525" cap="flat" cmpd="sng">
-            <a:solidFill>
-              <a:srgbClr val="000000"/>
-            </a:solidFill>
-            <a:prstDash val="solid"/>
-            <a:round/>
-            <a:headEnd type="none" w="sm" len="sm"/>
-            <a:tailEnd type="none" w="sm" len="sm"/>
-          </a:ln>
-        </p:spPr>
-      </p:sp>
-      <p:sp>
-        <p:nvSpPr>
-          <p:cNvPr id="475" name="Google Shape;475;p18:notes"/>
-          <p:cNvSpPr txBox="1">
-            <a:spLocks noGrp="1"/>
-          </p:cNvSpPr>
-          <p:nvPr>
-            <p:ph type="body" idx="1"/>
-          </p:nvPr>
-        </p:nvSpPr>
-        <p:spPr>
-          <a:xfrm>
-            <a:off x="685800" y="4343400"/>
-            <a:ext cx="5486400" cy="4114800"/>
-          </a:xfrm>
-          <a:prstGeom prst="rect">
-            <a:avLst/>
-          </a:prstGeom>
-          <a:noFill/>
-          <a:ln>
-            <a:noFill/>
-          </a:ln>
-        </p:spPr>
-        <p:txBody>
-          <a:bodyPr spcFirstLastPara="1" wrap="square" lIns="91425" tIns="91425" rIns="91425" bIns="91425" anchor="t" anchorCtr="0">
-            <a:noAutofit/>
-          </a:bodyPr>
-          <a:lstStyle/>
-          <a:p>
-            <a:pPr marL="0" lvl="0" indent="0" algn="l" rtl="0">
-              <a:lnSpc>
-                <a:spcPct val="100000"/>
-              </a:lnSpc>
-              <a:spcBef>
-                <a:spcPts val="0"/>
-              </a:spcBef>
-              <a:spcAft>
-                <a:spcPts val="0"/>
-              </a:spcAft>
-              <a:buSzPts val="1100"/>
-              <a:buNone/>
-            </a:pPr>
-            <a:endParaRPr/>
-          </a:p>
-        </p:txBody>
-      </p:sp>
-    </p:spTree>
-  </p:cSld>
-  <p:clrMapOvr>
-    <a:masterClrMapping/>
-  </p:clrMapOvr>
-</p:notes>
-</file>
-
-<file path=ppt/notesSlides/notesSlide16.xml><?xml version="1.0" encoding="utf-8"?>
-<p:notes xmlns:a="http://schemas.openxmlformats.org/drawingml/2006/main" xmlns:r="http://schemas.openxmlformats.org/officeDocument/2006/relationships" xmlns:p="http://schemas.openxmlformats.org/presentationml/2006/main" showMasterSp="0" showMasterPhAnim="0">
-  <p:cSld>
-    <p:spTree>
-      <p:nvGrpSpPr>
-        <p:cNvPr id="1" name="Shape 479"/>
-        <p:cNvGrpSpPr/>
-        <p:nvPr/>
-      </p:nvGrpSpPr>
-      <p:grpSpPr>
-        <a:xfrm>
-          <a:off x="0" y="0"/>
-          <a:ext cx="0" cy="0"/>
-          <a:chOff x="0" y="0"/>
-          <a:chExt cx="0" cy="0"/>
-        </a:xfrm>
-      </p:grpSpPr>
-      <p:sp>
-        <p:nvSpPr>
-          <p:cNvPr id="480" name="Google Shape;480;p19:notes"/>
-          <p:cNvSpPr>
-            <a:spLocks noGrp="1" noRot="1" noChangeAspect="1"/>
-          </p:cNvSpPr>
-          <p:nvPr>
-            <p:ph type="sldImg" idx="2"/>
-          </p:nvPr>
-        </p:nvSpPr>
-        <p:spPr>
-          <a:xfrm>
-            <a:off x="381000" y="685800"/>
-            <a:ext cx="6096000" cy="3429000"/>
-          </a:xfrm>
-          <a:custGeom>
-            <a:avLst/>
-            <a:gdLst/>
-            <a:ahLst/>
-            <a:cxnLst/>
-            <a:rect l="l" t="t" r="r" b="b"/>
-            <a:pathLst>
-              <a:path w="120000" h="120000" extrusionOk="0">
-                <a:moveTo>
-                  <a:pt x="0" y="0"/>
-                </a:moveTo>
-                <a:lnTo>
-                  <a:pt x="120000" y="0"/>
-                </a:lnTo>
-                <a:lnTo>
-                  <a:pt x="120000" y="120000"/>
-                </a:lnTo>
-                <a:lnTo>
-                  <a:pt x="0" y="120000"/>
-                </a:lnTo>
-                <a:close/>
-              </a:path>
-            </a:pathLst>
-          </a:custGeom>
-          <a:noFill/>
-          <a:ln w="9525" cap="flat" cmpd="sng">
-            <a:solidFill>
-              <a:srgbClr val="000000"/>
-            </a:solidFill>
-            <a:prstDash val="solid"/>
-            <a:round/>
-            <a:headEnd type="none" w="sm" len="sm"/>
-            <a:tailEnd type="none" w="sm" len="sm"/>
-          </a:ln>
-        </p:spPr>
-      </p:sp>
-      <p:sp>
-        <p:nvSpPr>
-          <p:cNvPr id="481" name="Google Shape;481;p19:notes"/>
-          <p:cNvSpPr txBox="1">
-            <a:spLocks noGrp="1"/>
-          </p:cNvSpPr>
-          <p:nvPr>
-            <p:ph type="body" idx="1"/>
-          </p:nvPr>
-        </p:nvSpPr>
-        <p:spPr>
-          <a:xfrm>
-            <a:off x="685800" y="4343400"/>
-            <a:ext cx="5486400" cy="4114800"/>
-          </a:xfrm>
-          <a:prstGeom prst="rect">
-            <a:avLst/>
-          </a:prstGeom>
-          <a:noFill/>
-          <a:ln>
-            <a:noFill/>
-          </a:ln>
-        </p:spPr>
-        <p:txBody>
-          <a:bodyPr spcFirstLastPara="1" wrap="square" lIns="91425" tIns="91425" rIns="91425" bIns="91425" anchor="t" anchorCtr="0">
-            <a:noAutofit/>
-          </a:bodyPr>
-          <a:lstStyle/>
-          <a:p>
-            <a:pPr marL="0" lvl="0" indent="0" algn="l" rtl="0">
-              <a:lnSpc>
-                <a:spcPct val="100000"/>
-              </a:lnSpc>
-              <a:spcBef>
-                <a:spcPts val="0"/>
-              </a:spcBef>
-              <a:spcAft>
-                <a:spcPts val="0"/>
-              </a:spcAft>
-              <a:buSzPts val="1100"/>
-              <a:buNone/>
-            </a:pPr>
-            <a:endParaRPr/>
-          </a:p>
-        </p:txBody>
-      </p:sp>
-    </p:spTree>
-  </p:cSld>
-  <p:clrMapOvr>
-    <a:masterClrMapping/>
-  </p:clrMapOvr>
-</p:notes>
-</file>
-
-<file path=ppt/notesSlides/notesSlide17.xml><?xml version="1.0" encoding="utf-8"?>
-<p:notes xmlns:a="http://schemas.openxmlformats.org/drawingml/2006/main" xmlns:r="http://schemas.openxmlformats.org/officeDocument/2006/relationships" xmlns:p="http://schemas.openxmlformats.org/presentationml/2006/main" showMasterSp="0" showMasterPhAnim="0">
-  <p:cSld>
-    <p:spTree>
-      <p:nvGrpSpPr>
-        <p:cNvPr id="1" name="Shape 484"/>
-        <p:cNvGrpSpPr/>
-        <p:nvPr/>
-      </p:nvGrpSpPr>
-      <p:grpSpPr>
-        <a:xfrm>
-          <a:off x="0" y="0"/>
-          <a:ext cx="0" cy="0"/>
-          <a:chOff x="0" y="0"/>
-          <a:chExt cx="0" cy="0"/>
-        </a:xfrm>
-      </p:grpSpPr>
-      <p:sp>
-        <p:nvSpPr>
-          <p:cNvPr id="485" name="Google Shape;485;p20:notes"/>
-          <p:cNvSpPr>
-            <a:spLocks noGrp="1" noRot="1" noChangeAspect="1"/>
-          </p:cNvSpPr>
-          <p:nvPr>
-            <p:ph type="sldImg" idx="2"/>
-          </p:nvPr>
-        </p:nvSpPr>
-        <p:spPr>
-          <a:xfrm>
-            <a:off x="381000" y="685800"/>
-            <a:ext cx="6096000" cy="3429000"/>
-          </a:xfrm>
-          <a:custGeom>
-            <a:avLst/>
-            <a:gdLst/>
-            <a:ahLst/>
-            <a:cxnLst/>
-            <a:rect l="l" t="t" r="r" b="b"/>
-            <a:pathLst>
-              <a:path w="120000" h="120000" extrusionOk="0">
-                <a:moveTo>
-                  <a:pt x="0" y="0"/>
-                </a:moveTo>
-                <a:lnTo>
-                  <a:pt x="120000" y="0"/>
-                </a:lnTo>
-                <a:lnTo>
-                  <a:pt x="120000" y="120000"/>
-                </a:lnTo>
-                <a:lnTo>
-                  <a:pt x="0" y="120000"/>
-                </a:lnTo>
-                <a:close/>
-              </a:path>
-            </a:pathLst>
-          </a:custGeom>
-          <a:noFill/>
-          <a:ln w="9525" cap="flat" cmpd="sng">
-            <a:solidFill>
-              <a:srgbClr val="000000"/>
-            </a:solidFill>
-            <a:prstDash val="solid"/>
-            <a:round/>
-            <a:headEnd type="none" w="sm" len="sm"/>
-            <a:tailEnd type="none" w="sm" len="sm"/>
-          </a:ln>
-        </p:spPr>
-      </p:sp>
-      <p:sp>
-        <p:nvSpPr>
-          <p:cNvPr id="486" name="Google Shape;486;p20:notes"/>
-          <p:cNvSpPr txBox="1">
-            <a:spLocks noGrp="1"/>
-          </p:cNvSpPr>
-          <p:nvPr>
-            <p:ph type="body" idx="1"/>
-          </p:nvPr>
-        </p:nvSpPr>
-        <p:spPr>
-          <a:xfrm>
-            <a:off x="685800" y="4343400"/>
-            <a:ext cx="5486400" cy="4114800"/>
-          </a:xfrm>
-          <a:prstGeom prst="rect">
-            <a:avLst/>
-          </a:prstGeom>
-          <a:noFill/>
-          <a:ln>
-            <a:noFill/>
-          </a:ln>
-        </p:spPr>
-        <p:txBody>
-          <a:bodyPr spcFirstLastPara="1" wrap="square" lIns="91425" tIns="91425" rIns="91425" bIns="91425" anchor="t" anchorCtr="0">
-            <a:noAutofit/>
-          </a:bodyPr>
-          <a:lstStyle/>
-          <a:p>
-            <a:pPr marL="0" lvl="0" indent="0" algn="l" rtl="0">
-              <a:lnSpc>
-                <a:spcPct val="100000"/>
-              </a:lnSpc>
-              <a:spcBef>
-                <a:spcPts val="0"/>
-              </a:spcBef>
-              <a:spcAft>
-                <a:spcPts val="0"/>
-              </a:spcAft>
-              <a:buSzPts val="1100"/>
-              <a:buNone/>
-            </a:pPr>
-            <a:endParaRPr/>
-          </a:p>
-        </p:txBody>
-      </p:sp>
-    </p:spTree>
-  </p:cSld>
-  <p:clrMapOvr>
-    <a:masterClrMapping/>
-  </p:clrMapOvr>
-</p:notes>
-</file>
-
-<file path=ppt/notesSlides/notesSlide18.xml><?xml version="1.0" encoding="utf-8"?>
-<p:notes xmlns:a="http://schemas.openxmlformats.org/drawingml/2006/main" xmlns:r="http://schemas.openxmlformats.org/officeDocument/2006/relationships" xmlns:p="http://schemas.openxmlformats.org/presentationml/2006/main" showMasterSp="0" showMasterPhAnim="0">
-  <p:cSld>
-    <p:spTree>
-      <p:nvGrpSpPr>
-        <p:cNvPr id="1" name="Shape 490"/>
-        <p:cNvGrpSpPr/>
-        <p:nvPr/>
-      </p:nvGrpSpPr>
-      <p:grpSpPr>
-        <a:xfrm>
-          <a:off x="0" y="0"/>
-          <a:ext cx="0" cy="0"/>
-          <a:chOff x="0" y="0"/>
-          <a:chExt cx="0" cy="0"/>
-        </a:xfrm>
-      </p:grpSpPr>
-      <p:sp>
-        <p:nvSpPr>
-          <p:cNvPr id="491" name="Google Shape;491;p21:notes"/>
-          <p:cNvSpPr>
-            <a:spLocks noGrp="1" noRot="1" noChangeAspect="1"/>
-          </p:cNvSpPr>
-          <p:nvPr>
-            <p:ph type="sldImg" idx="2"/>
-          </p:nvPr>
-        </p:nvSpPr>
-        <p:spPr>
-          <a:xfrm>
-            <a:off x="381000" y="685800"/>
-            <a:ext cx="6096000" cy="3429000"/>
-          </a:xfrm>
-          <a:custGeom>
-            <a:avLst/>
-            <a:gdLst/>
-            <a:ahLst/>
-            <a:cxnLst/>
-            <a:rect l="l" t="t" r="r" b="b"/>
-            <a:pathLst>
-              <a:path w="120000" h="120000" extrusionOk="0">
-                <a:moveTo>
-                  <a:pt x="0" y="0"/>
-                </a:moveTo>
-                <a:lnTo>
-                  <a:pt x="120000" y="0"/>
-                </a:lnTo>
-                <a:lnTo>
-                  <a:pt x="120000" y="120000"/>
-                </a:lnTo>
-                <a:lnTo>
-                  <a:pt x="0" y="120000"/>
-                </a:lnTo>
-                <a:close/>
-              </a:path>
-            </a:pathLst>
-          </a:custGeom>
-          <a:noFill/>
-          <a:ln w="9525" cap="flat" cmpd="sng">
-            <a:solidFill>
-              <a:srgbClr val="000000"/>
-            </a:solidFill>
-            <a:prstDash val="solid"/>
-            <a:round/>
-            <a:headEnd type="none" w="sm" len="sm"/>
-            <a:tailEnd type="none" w="sm" len="sm"/>
-          </a:ln>
-        </p:spPr>
-      </p:sp>
-      <p:sp>
-        <p:nvSpPr>
-          <p:cNvPr id="492" name="Google Shape;492;p21:notes"/>
-          <p:cNvSpPr txBox="1">
-            <a:spLocks noGrp="1"/>
-          </p:cNvSpPr>
-          <p:nvPr>
-            <p:ph type="body" idx="1"/>
-          </p:nvPr>
-        </p:nvSpPr>
-        <p:spPr>
-          <a:xfrm>
-            <a:off x="685800" y="4343400"/>
-            <a:ext cx="5486400" cy="4114800"/>
-          </a:xfrm>
-          <a:prstGeom prst="rect">
-            <a:avLst/>
-          </a:prstGeom>
-          <a:noFill/>
-          <a:ln>
-            <a:noFill/>
-          </a:ln>
-        </p:spPr>
-        <p:txBody>
-          <a:bodyPr spcFirstLastPara="1" wrap="square" lIns="91425" tIns="91425" rIns="91425" bIns="91425" anchor="t" anchorCtr="0">
-            <a:noAutofit/>
-          </a:bodyPr>
-          <a:lstStyle/>
-          <a:p>
-            <a:pPr marL="0" lvl="0" indent="0" algn="l" rtl="0">
-              <a:lnSpc>
-                <a:spcPct val="100000"/>
-              </a:lnSpc>
-              <a:spcBef>
-                <a:spcPts val="0"/>
-              </a:spcBef>
-              <a:spcAft>
-                <a:spcPts val="0"/>
-              </a:spcAft>
-              <a:buSzPts val="1100"/>
-              <a:buNone/>
-            </a:pPr>
-            <a:endParaRPr/>
-          </a:p>
-        </p:txBody>
-      </p:sp>
-    </p:spTree>
-  </p:cSld>
-  <p:clrMapOvr>
-    <a:masterClrMapping/>
-  </p:clrMapOvr>
-</p:notes>
-</file>
-
-<file path=ppt/notesSlides/notesSlide19.xml><?xml version="1.0" encoding="utf-8"?>
-<p:notes xmlns:a="http://schemas.openxmlformats.org/drawingml/2006/main" xmlns:r="http://schemas.openxmlformats.org/officeDocument/2006/relationships" xmlns:p="http://schemas.openxmlformats.org/presentationml/2006/main" showMasterSp="0" showMasterPhAnim="0">
-  <p:cSld>
-    <p:spTree>
-      <p:nvGrpSpPr>
-        <p:cNvPr id="1" name="Shape 496"/>
-        <p:cNvGrpSpPr/>
-        <p:nvPr/>
-      </p:nvGrpSpPr>
-      <p:grpSpPr>
-        <a:xfrm>
-          <a:off x="0" y="0"/>
-          <a:ext cx="0" cy="0"/>
-          <a:chOff x="0" y="0"/>
-          <a:chExt cx="0" cy="0"/>
-        </a:xfrm>
-      </p:grpSpPr>
-      <p:sp>
-        <p:nvSpPr>
-          <p:cNvPr id="497" name="Google Shape;497;p22:notes"/>
-          <p:cNvSpPr>
-            <a:spLocks noGrp="1" noRot="1" noChangeAspect="1"/>
-          </p:cNvSpPr>
-          <p:nvPr>
-            <p:ph type="sldImg" idx="2"/>
-          </p:nvPr>
-        </p:nvSpPr>
-        <p:spPr>
-          <a:xfrm>
-            <a:off x="381000" y="685800"/>
-            <a:ext cx="6096000" cy="3429000"/>
-          </a:xfrm>
-          <a:custGeom>
-            <a:avLst/>
-            <a:gdLst/>
-            <a:ahLst/>
-            <a:cxnLst/>
-            <a:rect l="l" t="t" r="r" b="b"/>
-            <a:pathLst>
-              <a:path w="120000" h="120000" extrusionOk="0">
-                <a:moveTo>
-                  <a:pt x="0" y="0"/>
-                </a:moveTo>
-                <a:lnTo>
-                  <a:pt x="120000" y="0"/>
-                </a:lnTo>
-                <a:lnTo>
-                  <a:pt x="120000" y="120000"/>
-                </a:lnTo>
-                <a:lnTo>
-                  <a:pt x="0" y="120000"/>
-                </a:lnTo>
-                <a:close/>
-              </a:path>
-            </a:pathLst>
-          </a:custGeom>
-          <a:noFill/>
-          <a:ln w="9525" cap="flat" cmpd="sng">
-            <a:solidFill>
-              <a:srgbClr val="000000"/>
-            </a:solidFill>
-            <a:prstDash val="solid"/>
-            <a:round/>
-            <a:headEnd type="none" w="sm" len="sm"/>
-            <a:tailEnd type="none" w="sm" len="sm"/>
-          </a:ln>
-        </p:spPr>
-      </p:sp>
-      <p:sp>
-        <p:nvSpPr>
-          <p:cNvPr id="498" name="Google Shape;498;p22:notes"/>
-          <p:cNvSpPr txBox="1">
-            <a:spLocks noGrp="1"/>
-          </p:cNvSpPr>
-          <p:nvPr>
-            <p:ph type="body" idx="1"/>
-          </p:nvPr>
-        </p:nvSpPr>
-        <p:spPr>
-          <a:xfrm>
-            <a:off x="685800" y="4343400"/>
-            <a:ext cx="5486400" cy="4114800"/>
-          </a:xfrm>
-          <a:prstGeom prst="rect">
-            <a:avLst/>
-          </a:prstGeom>
-          <a:noFill/>
-          <a:ln>
-            <a:noFill/>
-          </a:ln>
-        </p:spPr>
-        <p:txBody>
-          <a:bodyPr spcFirstLastPara="1" wrap="square" lIns="91425" tIns="91425" rIns="91425" bIns="91425" anchor="t" anchorCtr="0">
-            <a:noAutofit/>
-          </a:bodyPr>
-          <a:lstStyle/>
-          <a:p>
-            <a:pPr marL="0" lvl="0" indent="0" algn="l" rtl="0">
-              <a:lnSpc>
-                <a:spcPct val="100000"/>
-              </a:lnSpc>
-              <a:spcBef>
-                <a:spcPts val="0"/>
-              </a:spcBef>
-              <a:spcAft>
-                <a:spcPts val="0"/>
-              </a:spcAft>
-              <a:buSzPts val="1100"/>
-              <a:buNone/>
-            </a:pPr>
-            <a:endParaRPr/>
-          </a:p>
-        </p:txBody>
-      </p:sp>
-    </p:spTree>
-  </p:cSld>
-  <p:clrMapOvr>
-    <a:masterClrMapping/>
-  </p:clrMapOvr>
-</p:notes>
-</file>
-
 <file path=ppt/notesSlides/notesSlide2.xml><?xml version="1.0" encoding="utf-8"?>
 <p:notes xmlns:a="http://schemas.openxmlformats.org/drawingml/2006/main" xmlns:r="http://schemas.openxmlformats.org/officeDocument/2006/relationships" xmlns:p="http://schemas.openxmlformats.org/presentationml/2006/main" showMasterSp="0" showMasterPhAnim="0">
   <p:cSld>
@@ -2296,372 +1556,6 @@
       <p:sp>
         <p:nvSpPr>
           <p:cNvPr id="385" name="Google Shape;385;p3:notes"/>
-          <p:cNvSpPr txBox="1">
-            <a:spLocks noGrp="1"/>
-          </p:cNvSpPr>
-          <p:nvPr>
-            <p:ph type="body" idx="1"/>
-          </p:nvPr>
-        </p:nvSpPr>
-        <p:spPr>
-          <a:xfrm>
-            <a:off x="685800" y="4343400"/>
-            <a:ext cx="5486400" cy="4114800"/>
-          </a:xfrm>
-          <a:prstGeom prst="rect">
-            <a:avLst/>
-          </a:prstGeom>
-          <a:noFill/>
-          <a:ln>
-            <a:noFill/>
-          </a:ln>
-        </p:spPr>
-        <p:txBody>
-          <a:bodyPr spcFirstLastPara="1" wrap="square" lIns="91425" tIns="91425" rIns="91425" bIns="91425" anchor="t" anchorCtr="0">
-            <a:noAutofit/>
-          </a:bodyPr>
-          <a:lstStyle/>
-          <a:p>
-            <a:pPr marL="0" lvl="0" indent="0" algn="l" rtl="0">
-              <a:lnSpc>
-                <a:spcPct val="100000"/>
-              </a:lnSpc>
-              <a:spcBef>
-                <a:spcPts val="0"/>
-              </a:spcBef>
-              <a:spcAft>
-                <a:spcPts val="0"/>
-              </a:spcAft>
-              <a:buSzPts val="1100"/>
-              <a:buNone/>
-            </a:pPr>
-            <a:endParaRPr/>
-          </a:p>
-        </p:txBody>
-      </p:sp>
-    </p:spTree>
-  </p:cSld>
-  <p:clrMapOvr>
-    <a:masterClrMapping/>
-  </p:clrMapOvr>
-</p:notes>
-</file>
-
-<file path=ppt/notesSlides/notesSlide20.xml><?xml version="1.0" encoding="utf-8"?>
-<p:notes xmlns:a="http://schemas.openxmlformats.org/drawingml/2006/main" xmlns:r="http://schemas.openxmlformats.org/officeDocument/2006/relationships" xmlns:p="http://schemas.openxmlformats.org/presentationml/2006/main" showMasterSp="0" showMasterPhAnim="0">
-  <p:cSld>
-    <p:spTree>
-      <p:nvGrpSpPr>
-        <p:cNvPr id="1" name="Shape 502"/>
-        <p:cNvGrpSpPr/>
-        <p:nvPr/>
-      </p:nvGrpSpPr>
-      <p:grpSpPr>
-        <a:xfrm>
-          <a:off x="0" y="0"/>
-          <a:ext cx="0" cy="0"/>
-          <a:chOff x="0" y="0"/>
-          <a:chExt cx="0" cy="0"/>
-        </a:xfrm>
-      </p:grpSpPr>
-      <p:sp>
-        <p:nvSpPr>
-          <p:cNvPr id="503" name="Google Shape;503;p23:notes"/>
-          <p:cNvSpPr>
-            <a:spLocks noGrp="1" noRot="1" noChangeAspect="1"/>
-          </p:cNvSpPr>
-          <p:nvPr>
-            <p:ph type="sldImg" idx="2"/>
-          </p:nvPr>
-        </p:nvSpPr>
-        <p:spPr>
-          <a:xfrm>
-            <a:off x="381000" y="685800"/>
-            <a:ext cx="6096000" cy="3429000"/>
-          </a:xfrm>
-          <a:custGeom>
-            <a:avLst/>
-            <a:gdLst/>
-            <a:ahLst/>
-            <a:cxnLst/>
-            <a:rect l="l" t="t" r="r" b="b"/>
-            <a:pathLst>
-              <a:path w="120000" h="120000" extrusionOk="0">
-                <a:moveTo>
-                  <a:pt x="0" y="0"/>
-                </a:moveTo>
-                <a:lnTo>
-                  <a:pt x="120000" y="0"/>
-                </a:lnTo>
-                <a:lnTo>
-                  <a:pt x="120000" y="120000"/>
-                </a:lnTo>
-                <a:lnTo>
-                  <a:pt x="0" y="120000"/>
-                </a:lnTo>
-                <a:close/>
-              </a:path>
-            </a:pathLst>
-          </a:custGeom>
-          <a:noFill/>
-          <a:ln w="9525" cap="flat" cmpd="sng">
-            <a:solidFill>
-              <a:srgbClr val="000000"/>
-            </a:solidFill>
-            <a:prstDash val="solid"/>
-            <a:round/>
-            <a:headEnd type="none" w="sm" len="sm"/>
-            <a:tailEnd type="none" w="sm" len="sm"/>
-          </a:ln>
-        </p:spPr>
-      </p:sp>
-      <p:sp>
-        <p:nvSpPr>
-          <p:cNvPr id="504" name="Google Shape;504;p23:notes"/>
-          <p:cNvSpPr txBox="1">
-            <a:spLocks noGrp="1"/>
-          </p:cNvSpPr>
-          <p:nvPr>
-            <p:ph type="body" idx="1"/>
-          </p:nvPr>
-        </p:nvSpPr>
-        <p:spPr>
-          <a:xfrm>
-            <a:off x="685800" y="4343400"/>
-            <a:ext cx="5486400" cy="4114800"/>
-          </a:xfrm>
-          <a:prstGeom prst="rect">
-            <a:avLst/>
-          </a:prstGeom>
-          <a:noFill/>
-          <a:ln>
-            <a:noFill/>
-          </a:ln>
-        </p:spPr>
-        <p:txBody>
-          <a:bodyPr spcFirstLastPara="1" wrap="square" lIns="91425" tIns="91425" rIns="91425" bIns="91425" anchor="t" anchorCtr="0">
-            <a:noAutofit/>
-          </a:bodyPr>
-          <a:lstStyle/>
-          <a:p>
-            <a:pPr marL="0" lvl="0" indent="0" algn="l" rtl="0">
-              <a:lnSpc>
-                <a:spcPct val="100000"/>
-              </a:lnSpc>
-              <a:spcBef>
-                <a:spcPts val="0"/>
-              </a:spcBef>
-              <a:spcAft>
-                <a:spcPts val="0"/>
-              </a:spcAft>
-              <a:buSzPts val="1100"/>
-              <a:buNone/>
-            </a:pPr>
-            <a:endParaRPr/>
-          </a:p>
-        </p:txBody>
-      </p:sp>
-    </p:spTree>
-  </p:cSld>
-  <p:clrMapOvr>
-    <a:masterClrMapping/>
-  </p:clrMapOvr>
-</p:notes>
-</file>
-
-<file path=ppt/notesSlides/notesSlide21.xml><?xml version="1.0" encoding="utf-8"?>
-<p:notes xmlns:a="http://schemas.openxmlformats.org/drawingml/2006/main" xmlns:r="http://schemas.openxmlformats.org/officeDocument/2006/relationships" xmlns:p="http://schemas.openxmlformats.org/presentationml/2006/main" showMasterSp="0" showMasterPhAnim="0">
-  <p:cSld>
-    <p:spTree>
-      <p:nvGrpSpPr>
-        <p:cNvPr id="1" name="Shape 508"/>
-        <p:cNvGrpSpPr/>
-        <p:nvPr/>
-      </p:nvGrpSpPr>
-      <p:grpSpPr>
-        <a:xfrm>
-          <a:off x="0" y="0"/>
-          <a:ext cx="0" cy="0"/>
-          <a:chOff x="0" y="0"/>
-          <a:chExt cx="0" cy="0"/>
-        </a:xfrm>
-      </p:grpSpPr>
-      <p:sp>
-        <p:nvSpPr>
-          <p:cNvPr id="509" name="Google Shape;509;p24:notes"/>
-          <p:cNvSpPr>
-            <a:spLocks noGrp="1" noRot="1" noChangeAspect="1"/>
-          </p:cNvSpPr>
-          <p:nvPr>
-            <p:ph type="sldImg" idx="2"/>
-          </p:nvPr>
-        </p:nvSpPr>
-        <p:spPr>
-          <a:xfrm>
-            <a:off x="381000" y="685800"/>
-            <a:ext cx="6096000" cy="3429000"/>
-          </a:xfrm>
-          <a:custGeom>
-            <a:avLst/>
-            <a:gdLst/>
-            <a:ahLst/>
-            <a:cxnLst/>
-            <a:rect l="l" t="t" r="r" b="b"/>
-            <a:pathLst>
-              <a:path w="120000" h="120000" extrusionOk="0">
-                <a:moveTo>
-                  <a:pt x="0" y="0"/>
-                </a:moveTo>
-                <a:lnTo>
-                  <a:pt x="120000" y="0"/>
-                </a:lnTo>
-                <a:lnTo>
-                  <a:pt x="120000" y="120000"/>
-                </a:lnTo>
-                <a:lnTo>
-                  <a:pt x="0" y="120000"/>
-                </a:lnTo>
-                <a:close/>
-              </a:path>
-            </a:pathLst>
-          </a:custGeom>
-          <a:noFill/>
-          <a:ln w="9525" cap="flat" cmpd="sng">
-            <a:solidFill>
-              <a:srgbClr val="000000"/>
-            </a:solidFill>
-            <a:prstDash val="solid"/>
-            <a:round/>
-            <a:headEnd type="none" w="sm" len="sm"/>
-            <a:tailEnd type="none" w="sm" len="sm"/>
-          </a:ln>
-        </p:spPr>
-      </p:sp>
-      <p:sp>
-        <p:nvSpPr>
-          <p:cNvPr id="510" name="Google Shape;510;p24:notes"/>
-          <p:cNvSpPr txBox="1">
-            <a:spLocks noGrp="1"/>
-          </p:cNvSpPr>
-          <p:nvPr>
-            <p:ph type="body" idx="1"/>
-          </p:nvPr>
-        </p:nvSpPr>
-        <p:spPr>
-          <a:xfrm>
-            <a:off x="685800" y="4343400"/>
-            <a:ext cx="5486400" cy="4114800"/>
-          </a:xfrm>
-          <a:prstGeom prst="rect">
-            <a:avLst/>
-          </a:prstGeom>
-          <a:noFill/>
-          <a:ln>
-            <a:noFill/>
-          </a:ln>
-        </p:spPr>
-        <p:txBody>
-          <a:bodyPr spcFirstLastPara="1" wrap="square" lIns="91425" tIns="91425" rIns="91425" bIns="91425" anchor="t" anchorCtr="0">
-            <a:noAutofit/>
-          </a:bodyPr>
-          <a:lstStyle/>
-          <a:p>
-            <a:pPr marL="0" lvl="0" indent="0" algn="l" rtl="0">
-              <a:lnSpc>
-                <a:spcPct val="100000"/>
-              </a:lnSpc>
-              <a:spcBef>
-                <a:spcPts val="0"/>
-              </a:spcBef>
-              <a:spcAft>
-                <a:spcPts val="0"/>
-              </a:spcAft>
-              <a:buSzPts val="1100"/>
-              <a:buNone/>
-            </a:pPr>
-            <a:endParaRPr/>
-          </a:p>
-        </p:txBody>
-      </p:sp>
-    </p:spTree>
-  </p:cSld>
-  <p:clrMapOvr>
-    <a:masterClrMapping/>
-  </p:clrMapOvr>
-</p:notes>
-</file>
-
-<file path=ppt/notesSlides/notesSlide22.xml><?xml version="1.0" encoding="utf-8"?>
-<p:notes xmlns:a="http://schemas.openxmlformats.org/drawingml/2006/main" xmlns:r="http://schemas.openxmlformats.org/officeDocument/2006/relationships" xmlns:p="http://schemas.openxmlformats.org/presentationml/2006/main" showMasterSp="0" showMasterPhAnim="0">
-  <p:cSld>
-    <p:spTree>
-      <p:nvGrpSpPr>
-        <p:cNvPr id="1" name="Shape 514"/>
-        <p:cNvGrpSpPr/>
-        <p:nvPr/>
-      </p:nvGrpSpPr>
-      <p:grpSpPr>
-        <a:xfrm>
-          <a:off x="0" y="0"/>
-          <a:ext cx="0" cy="0"/>
-          <a:chOff x="0" y="0"/>
-          <a:chExt cx="0" cy="0"/>
-        </a:xfrm>
-      </p:grpSpPr>
-      <p:sp>
-        <p:nvSpPr>
-          <p:cNvPr id="515" name="Google Shape;515;p25:notes"/>
-          <p:cNvSpPr>
-            <a:spLocks noGrp="1" noRot="1" noChangeAspect="1"/>
-          </p:cNvSpPr>
-          <p:nvPr>
-            <p:ph type="sldImg" idx="2"/>
-          </p:nvPr>
-        </p:nvSpPr>
-        <p:spPr>
-          <a:xfrm>
-            <a:off x="381000" y="685800"/>
-            <a:ext cx="6096000" cy="3429000"/>
-          </a:xfrm>
-          <a:custGeom>
-            <a:avLst/>
-            <a:gdLst/>
-            <a:ahLst/>
-            <a:cxnLst/>
-            <a:rect l="l" t="t" r="r" b="b"/>
-            <a:pathLst>
-              <a:path w="120000" h="120000" extrusionOk="0">
-                <a:moveTo>
-                  <a:pt x="0" y="0"/>
-                </a:moveTo>
-                <a:lnTo>
-                  <a:pt x="120000" y="0"/>
-                </a:lnTo>
-                <a:lnTo>
-                  <a:pt x="120000" y="120000"/>
-                </a:lnTo>
-                <a:lnTo>
-                  <a:pt x="0" y="120000"/>
-                </a:lnTo>
-                <a:close/>
-              </a:path>
-            </a:pathLst>
-          </a:custGeom>
-          <a:noFill/>
-          <a:ln w="9525" cap="flat" cmpd="sng">
-            <a:solidFill>
-              <a:srgbClr val="000000"/>
-            </a:solidFill>
-            <a:prstDash val="solid"/>
-            <a:round/>
-            <a:headEnd type="none" w="sm" len="sm"/>
-            <a:tailEnd type="none" w="sm" len="sm"/>
-          </a:ln>
-        </p:spPr>
-      </p:sp>
-      <p:sp>
-        <p:nvSpPr>
-          <p:cNvPr id="516" name="Google Shape;516;p25:notes"/>
           <p:cNvSpPr txBox="1">
             <a:spLocks noGrp="1"/>
           </p:cNvSpPr>
@@ -24029,830 +22923,6 @@
 </file>
 
 <file path=ppt/slideLayouts/slideLayout20.xml><?xml version="1.0" encoding="utf-8"?>
-<p:sldLayout xmlns:a="http://schemas.openxmlformats.org/drawingml/2006/main" xmlns:r="http://schemas.openxmlformats.org/officeDocument/2006/relationships" xmlns:p="http://schemas.openxmlformats.org/presentationml/2006/main" showMasterSp="0" matchingName="Section Header">
-  <p:cSld name="Section Header">
-    <p:bg>
-      <p:bgPr>
-        <a:solidFill>
-          <a:srgbClr val="221F20"/>
-        </a:solidFill>
-        <a:effectLst/>
-      </p:bgPr>
-    </p:bg>
-    <p:spTree>
-      <p:nvGrpSpPr>
-        <p:cNvPr id="1" name="Shape 276"/>
-        <p:cNvGrpSpPr/>
-        <p:nvPr/>
-      </p:nvGrpSpPr>
-      <p:grpSpPr>
-        <a:xfrm>
-          <a:off x="0" y="0"/>
-          <a:ext cx="0" cy="0"/>
-          <a:chOff x="0" y="0"/>
-          <a:chExt cx="0" cy="0"/>
-        </a:xfrm>
-      </p:grpSpPr>
-      <p:sp>
-        <p:nvSpPr>
-          <p:cNvPr id="277" name="Google Shape;277;p21"/>
-          <p:cNvSpPr txBox="1">
-            <a:spLocks noGrp="1"/>
-          </p:cNvSpPr>
-          <p:nvPr>
-            <p:ph type="title"/>
-          </p:nvPr>
-        </p:nvSpPr>
-        <p:spPr>
-          <a:xfrm>
-            <a:off x="411480" y="308611"/>
-            <a:ext cx="6173470" cy="891778"/>
-          </a:xfrm>
-          <a:prstGeom prst="rect">
-            <a:avLst/>
-          </a:prstGeom>
-          <a:noFill/>
-          <a:ln>
-            <a:noFill/>
-          </a:ln>
-        </p:spPr>
-        <p:txBody>
-          <a:bodyPr spcFirstLastPara="1" wrap="square" lIns="0" tIns="0" rIns="0" bIns="0" anchor="t" anchorCtr="0">
-            <a:noAutofit/>
-          </a:bodyPr>
-          <a:lstStyle>
-            <a:lvl1pPr lvl="0" algn="l">
-              <a:lnSpc>
-                <a:spcPct val="80000"/>
-              </a:lnSpc>
-              <a:spcBef>
-                <a:spcPts val="0"/>
-              </a:spcBef>
-              <a:spcAft>
-                <a:spcPts val="0"/>
-              </a:spcAft>
-              <a:buClr>
-                <a:schemeClr val="lt2"/>
-              </a:buClr>
-              <a:buSzPts val="3000"/>
-              <a:buFont typeface="Arial"/>
-              <a:buNone/>
-              <a:defRPr sz="3000">
-                <a:solidFill>
-                  <a:schemeClr val="lt2"/>
-                </a:solidFill>
-              </a:defRPr>
-            </a:lvl1pPr>
-            <a:lvl2pPr lvl="1">
-              <a:spcBef>
-                <a:spcPts val="0"/>
-              </a:spcBef>
-              <a:spcAft>
-                <a:spcPts val="0"/>
-              </a:spcAft>
-              <a:buSzPts val="1400"/>
-              <a:buNone/>
-              <a:defRPr/>
-            </a:lvl2pPr>
-            <a:lvl3pPr lvl="2">
-              <a:spcBef>
-                <a:spcPts val="0"/>
-              </a:spcBef>
-              <a:spcAft>
-                <a:spcPts val="0"/>
-              </a:spcAft>
-              <a:buSzPts val="1400"/>
-              <a:buNone/>
-              <a:defRPr/>
-            </a:lvl3pPr>
-            <a:lvl4pPr lvl="3">
-              <a:spcBef>
-                <a:spcPts val="0"/>
-              </a:spcBef>
-              <a:spcAft>
-                <a:spcPts val="0"/>
-              </a:spcAft>
-              <a:buSzPts val="1400"/>
-              <a:buNone/>
-              <a:defRPr/>
-            </a:lvl4pPr>
-            <a:lvl5pPr lvl="4">
-              <a:spcBef>
-                <a:spcPts val="0"/>
-              </a:spcBef>
-              <a:spcAft>
-                <a:spcPts val="0"/>
-              </a:spcAft>
-              <a:buSzPts val="1400"/>
-              <a:buNone/>
-              <a:defRPr/>
-            </a:lvl5pPr>
-            <a:lvl6pPr lvl="5">
-              <a:spcBef>
-                <a:spcPts val="0"/>
-              </a:spcBef>
-              <a:spcAft>
-                <a:spcPts val="0"/>
-              </a:spcAft>
-              <a:buSzPts val="1400"/>
-              <a:buNone/>
-              <a:defRPr/>
-            </a:lvl6pPr>
-            <a:lvl7pPr lvl="6">
-              <a:spcBef>
-                <a:spcPts val="0"/>
-              </a:spcBef>
-              <a:spcAft>
-                <a:spcPts val="0"/>
-              </a:spcAft>
-              <a:buSzPts val="1400"/>
-              <a:buNone/>
-              <a:defRPr/>
-            </a:lvl7pPr>
-            <a:lvl8pPr lvl="7">
-              <a:spcBef>
-                <a:spcPts val="0"/>
-              </a:spcBef>
-              <a:spcAft>
-                <a:spcPts val="0"/>
-              </a:spcAft>
-              <a:buSzPts val="1400"/>
-              <a:buNone/>
-              <a:defRPr/>
-            </a:lvl8pPr>
-            <a:lvl9pPr lvl="8">
-              <a:spcBef>
-                <a:spcPts val="0"/>
-              </a:spcBef>
-              <a:spcAft>
-                <a:spcPts val="0"/>
-              </a:spcAft>
-              <a:buSzPts val="1400"/>
-              <a:buNone/>
-              <a:defRPr/>
-            </a:lvl9pPr>
-          </a:lstStyle>
-          <a:p>
-            <a:endParaRPr/>
-          </a:p>
-        </p:txBody>
-      </p:sp>
-      <p:sp>
-        <p:nvSpPr>
-          <p:cNvPr id="278" name="Google Shape;278;p21"/>
-          <p:cNvSpPr txBox="1">
-            <a:spLocks noGrp="1"/>
-          </p:cNvSpPr>
-          <p:nvPr>
-            <p:ph type="body" idx="1"/>
-          </p:nvPr>
-        </p:nvSpPr>
-        <p:spPr>
-          <a:xfrm>
-            <a:off x="411480" y="1611630"/>
-            <a:ext cx="5096351" cy="3017520"/>
-          </a:xfrm>
-          <a:prstGeom prst="rect">
-            <a:avLst/>
-          </a:prstGeom>
-          <a:noFill/>
-          <a:ln>
-            <a:noFill/>
-          </a:ln>
-        </p:spPr>
-        <p:txBody>
-          <a:bodyPr spcFirstLastPara="1" wrap="square" lIns="0" tIns="0" rIns="0" bIns="0" anchor="t" anchorCtr="0">
-            <a:noAutofit/>
-          </a:bodyPr>
-          <a:lstStyle>
-            <a:lvl1pPr marL="457200" lvl="0" indent="-228600" algn="l">
-              <a:lnSpc>
-                <a:spcPct val="95000"/>
-              </a:lnSpc>
-              <a:spcBef>
-                <a:spcPts val="0"/>
-              </a:spcBef>
-              <a:spcAft>
-                <a:spcPts val="0"/>
-              </a:spcAft>
-              <a:buClr>
-                <a:schemeClr val="lt1"/>
-              </a:buClr>
-              <a:buSzPts val="2100"/>
-              <a:buFont typeface="Arial"/>
-              <a:buNone/>
-              <a:defRPr sz="2100"/>
-            </a:lvl1pPr>
-            <a:lvl2pPr marL="914400" lvl="1" indent="-309562" algn="l">
-              <a:lnSpc>
-                <a:spcPct val="95000"/>
-              </a:lnSpc>
-              <a:spcBef>
-                <a:spcPts val="750"/>
-              </a:spcBef>
-              <a:spcAft>
-                <a:spcPts val="0"/>
-              </a:spcAft>
-              <a:buClr>
-                <a:schemeClr val="lt1"/>
-              </a:buClr>
-              <a:buSzPts val="1275"/>
-              <a:buFont typeface="Arial"/>
-              <a:buChar char="▪"/>
-              <a:defRPr/>
-            </a:lvl2pPr>
-            <a:lvl3pPr marL="1371600" lvl="2" indent="-309562" algn="l">
-              <a:lnSpc>
-                <a:spcPct val="95000"/>
-              </a:lnSpc>
-              <a:spcBef>
-                <a:spcPts val="375"/>
-              </a:spcBef>
-              <a:spcAft>
-                <a:spcPts val="0"/>
-              </a:spcAft>
-              <a:buClr>
-                <a:schemeClr val="lt1"/>
-              </a:buClr>
-              <a:buSzPts val="1275"/>
-              <a:buChar char="–"/>
-              <a:defRPr/>
-            </a:lvl3pPr>
-            <a:lvl4pPr marL="1828800" lvl="3" indent="-309562" algn="l">
-              <a:lnSpc>
-                <a:spcPct val="95000"/>
-              </a:lnSpc>
-              <a:spcBef>
-                <a:spcPts val="375"/>
-              </a:spcBef>
-              <a:spcAft>
-                <a:spcPts val="0"/>
-              </a:spcAft>
-              <a:buClr>
-                <a:schemeClr val="lt1"/>
-              </a:buClr>
-              <a:buSzPts val="1275"/>
-              <a:buChar char="–"/>
-              <a:defRPr/>
-            </a:lvl4pPr>
-            <a:lvl5pPr marL="2286000" lvl="4" indent="-309562" algn="l">
-              <a:lnSpc>
-                <a:spcPct val="95000"/>
-              </a:lnSpc>
-              <a:spcBef>
-                <a:spcPts val="375"/>
-              </a:spcBef>
-              <a:spcAft>
-                <a:spcPts val="0"/>
-              </a:spcAft>
-              <a:buClr>
-                <a:schemeClr val="lt1"/>
-              </a:buClr>
-              <a:buSzPts val="1275"/>
-              <a:buChar char="–"/>
-              <a:defRPr/>
-            </a:lvl5pPr>
-            <a:lvl6pPr marL="2743200" lvl="5" indent="-309562" algn="l">
-              <a:lnSpc>
-                <a:spcPct val="95000"/>
-              </a:lnSpc>
-              <a:spcBef>
-                <a:spcPts val="375"/>
-              </a:spcBef>
-              <a:spcAft>
-                <a:spcPts val="0"/>
-              </a:spcAft>
-              <a:buClr>
-                <a:schemeClr val="lt1"/>
-              </a:buClr>
-              <a:buSzPts val="1275"/>
-              <a:buChar char="–"/>
-              <a:defRPr/>
-            </a:lvl6pPr>
-            <a:lvl7pPr marL="3200400" lvl="6" indent="-309562" algn="l">
-              <a:lnSpc>
-                <a:spcPct val="95000"/>
-              </a:lnSpc>
-              <a:spcBef>
-                <a:spcPts val="375"/>
-              </a:spcBef>
-              <a:spcAft>
-                <a:spcPts val="0"/>
-              </a:spcAft>
-              <a:buClr>
-                <a:schemeClr val="lt1"/>
-              </a:buClr>
-              <a:buSzPts val="1275"/>
-              <a:buChar char="–"/>
-              <a:defRPr/>
-            </a:lvl7pPr>
-            <a:lvl8pPr marL="3657600" lvl="7" indent="-309562" algn="l">
-              <a:lnSpc>
-                <a:spcPct val="95000"/>
-              </a:lnSpc>
-              <a:spcBef>
-                <a:spcPts val="375"/>
-              </a:spcBef>
-              <a:spcAft>
-                <a:spcPts val="0"/>
-              </a:spcAft>
-              <a:buClr>
-                <a:schemeClr val="lt1"/>
-              </a:buClr>
-              <a:buSzPts val="1275"/>
-              <a:buChar char="–"/>
-              <a:defRPr/>
-            </a:lvl8pPr>
-            <a:lvl9pPr marL="4114800" lvl="8" indent="-309562" algn="l">
-              <a:lnSpc>
-                <a:spcPct val="95000"/>
-              </a:lnSpc>
-              <a:spcBef>
-                <a:spcPts val="375"/>
-              </a:spcBef>
-              <a:spcAft>
-                <a:spcPts val="0"/>
-              </a:spcAft>
-              <a:buClr>
-                <a:schemeClr val="lt1"/>
-              </a:buClr>
-              <a:buSzPts val="1275"/>
-              <a:buChar char="–"/>
-              <a:defRPr/>
-            </a:lvl9pPr>
-          </a:lstStyle>
-          <a:p>
-            <a:endParaRPr/>
-          </a:p>
-        </p:txBody>
-      </p:sp>
-      <p:sp>
-        <p:nvSpPr>
-          <p:cNvPr id="279" name="Google Shape;279;p21"/>
-          <p:cNvSpPr txBox="1">
-            <a:spLocks noGrp="1"/>
-          </p:cNvSpPr>
-          <p:nvPr>
-            <p:ph type="dt" idx="10"/>
-          </p:nvPr>
-        </p:nvSpPr>
-        <p:spPr>
-          <a:xfrm>
-            <a:off x="410766" y="4972050"/>
-            <a:ext cx="617934" cy="171450"/>
-          </a:xfrm>
-          <a:prstGeom prst="rect">
-            <a:avLst/>
-          </a:prstGeom>
-          <a:noFill/>
-          <a:ln>
-            <a:noFill/>
-          </a:ln>
-        </p:spPr>
-        <p:txBody>
-          <a:bodyPr spcFirstLastPara="1" wrap="square" lIns="0" tIns="45700" rIns="0" bIns="45700" anchor="b" anchorCtr="0">
-            <a:noAutofit/>
-          </a:bodyPr>
-          <a:lstStyle>
-            <a:lvl1pPr lvl="0" algn="l">
-              <a:spcBef>
-                <a:spcPts val="0"/>
-              </a:spcBef>
-              <a:spcAft>
-                <a:spcPts val="0"/>
-              </a:spcAft>
-              <a:buSzPts val="1400"/>
-              <a:buNone/>
-              <a:defRPr/>
-            </a:lvl1pPr>
-            <a:lvl2pPr lvl="1" algn="l">
-              <a:spcBef>
-                <a:spcPts val="0"/>
-              </a:spcBef>
-              <a:spcAft>
-                <a:spcPts val="0"/>
-              </a:spcAft>
-              <a:buSzPts val="1400"/>
-              <a:buNone/>
-              <a:defRPr/>
-            </a:lvl2pPr>
-            <a:lvl3pPr lvl="2" algn="l">
-              <a:spcBef>
-                <a:spcPts val="0"/>
-              </a:spcBef>
-              <a:spcAft>
-                <a:spcPts val="0"/>
-              </a:spcAft>
-              <a:buSzPts val="1400"/>
-              <a:buNone/>
-              <a:defRPr/>
-            </a:lvl3pPr>
-            <a:lvl4pPr lvl="3" algn="l">
-              <a:spcBef>
-                <a:spcPts val="0"/>
-              </a:spcBef>
-              <a:spcAft>
-                <a:spcPts val="0"/>
-              </a:spcAft>
-              <a:buSzPts val="1400"/>
-              <a:buNone/>
-              <a:defRPr/>
-            </a:lvl4pPr>
-            <a:lvl5pPr lvl="4" algn="l">
-              <a:spcBef>
-                <a:spcPts val="0"/>
-              </a:spcBef>
-              <a:spcAft>
-                <a:spcPts val="0"/>
-              </a:spcAft>
-              <a:buSzPts val="1400"/>
-              <a:buNone/>
-              <a:defRPr/>
-            </a:lvl5pPr>
-            <a:lvl6pPr lvl="5" algn="l">
-              <a:spcBef>
-                <a:spcPts val="0"/>
-              </a:spcBef>
-              <a:spcAft>
-                <a:spcPts val="0"/>
-              </a:spcAft>
-              <a:buSzPts val="1400"/>
-              <a:buNone/>
-              <a:defRPr/>
-            </a:lvl6pPr>
-            <a:lvl7pPr lvl="6" algn="l">
-              <a:spcBef>
-                <a:spcPts val="0"/>
-              </a:spcBef>
-              <a:spcAft>
-                <a:spcPts val="0"/>
-              </a:spcAft>
-              <a:buSzPts val="1400"/>
-              <a:buNone/>
-              <a:defRPr/>
-            </a:lvl7pPr>
-            <a:lvl8pPr lvl="7" algn="l">
-              <a:spcBef>
-                <a:spcPts val="0"/>
-              </a:spcBef>
-              <a:spcAft>
-                <a:spcPts val="0"/>
-              </a:spcAft>
-              <a:buSzPts val="1400"/>
-              <a:buNone/>
-              <a:defRPr/>
-            </a:lvl8pPr>
-            <a:lvl9pPr lvl="8" algn="l">
-              <a:spcBef>
-                <a:spcPts val="0"/>
-              </a:spcBef>
-              <a:spcAft>
-                <a:spcPts val="0"/>
-              </a:spcAft>
-              <a:buSzPts val="1400"/>
-              <a:buNone/>
-              <a:defRPr/>
-            </a:lvl9pPr>
-          </a:lstStyle>
-          <a:p>
-            <a:endParaRPr/>
-          </a:p>
-        </p:txBody>
-      </p:sp>
-      <p:sp>
-        <p:nvSpPr>
-          <p:cNvPr id="280" name="Google Shape;280;p21"/>
-          <p:cNvSpPr txBox="1">
-            <a:spLocks noGrp="1"/>
-          </p:cNvSpPr>
-          <p:nvPr>
-            <p:ph type="sldNum" idx="12"/>
-          </p:nvPr>
-        </p:nvSpPr>
-        <p:spPr>
-          <a:xfrm>
-            <a:off x="8408037" y="4972050"/>
-            <a:ext cx="331501" cy="171450"/>
-          </a:xfrm>
-          <a:prstGeom prst="rect">
-            <a:avLst/>
-          </a:prstGeom>
-          <a:noFill/>
-          <a:ln>
-            <a:noFill/>
-          </a:ln>
-        </p:spPr>
-        <p:txBody>
-          <a:bodyPr spcFirstLastPara="1" wrap="square" lIns="0" tIns="45700" rIns="0" bIns="45700" anchor="b" anchorCtr="0">
-            <a:noAutofit/>
-          </a:bodyPr>
-          <a:lstStyle>
-            <a:lvl1pPr marL="0" lvl="0" indent="0" algn="r">
-              <a:spcBef>
-                <a:spcPts val="0"/>
-              </a:spcBef>
-              <a:spcAft>
-                <a:spcPts val="0"/>
-              </a:spcAft>
-              <a:buClr>
-                <a:schemeClr val="lt1"/>
-              </a:buClr>
-              <a:buSzPts val="500"/>
-              <a:buFont typeface="Arial"/>
-              <a:buNone/>
-              <a:defRPr/>
-            </a:lvl1pPr>
-            <a:lvl2pPr marL="0" lvl="1" indent="0" algn="r">
-              <a:spcBef>
-                <a:spcPts val="0"/>
-              </a:spcBef>
-              <a:spcAft>
-                <a:spcPts val="0"/>
-              </a:spcAft>
-              <a:buClr>
-                <a:schemeClr val="lt1"/>
-              </a:buClr>
-              <a:buSzPts val="500"/>
-              <a:buFont typeface="Arial"/>
-              <a:buNone/>
-              <a:defRPr/>
-            </a:lvl2pPr>
-            <a:lvl3pPr marL="0" lvl="2" indent="0" algn="r">
-              <a:spcBef>
-                <a:spcPts val="0"/>
-              </a:spcBef>
-              <a:spcAft>
-                <a:spcPts val="0"/>
-              </a:spcAft>
-              <a:buClr>
-                <a:schemeClr val="lt1"/>
-              </a:buClr>
-              <a:buSzPts val="500"/>
-              <a:buFont typeface="Arial"/>
-              <a:buNone/>
-              <a:defRPr/>
-            </a:lvl3pPr>
-            <a:lvl4pPr marL="0" lvl="3" indent="0" algn="r">
-              <a:spcBef>
-                <a:spcPts val="0"/>
-              </a:spcBef>
-              <a:spcAft>
-                <a:spcPts val="0"/>
-              </a:spcAft>
-              <a:buClr>
-                <a:schemeClr val="lt1"/>
-              </a:buClr>
-              <a:buSzPts val="500"/>
-              <a:buFont typeface="Arial"/>
-              <a:buNone/>
-              <a:defRPr/>
-            </a:lvl4pPr>
-            <a:lvl5pPr marL="0" lvl="4" indent="0" algn="r">
-              <a:spcBef>
-                <a:spcPts val="0"/>
-              </a:spcBef>
-              <a:spcAft>
-                <a:spcPts val="0"/>
-              </a:spcAft>
-              <a:buClr>
-                <a:schemeClr val="lt1"/>
-              </a:buClr>
-              <a:buSzPts val="500"/>
-              <a:buFont typeface="Arial"/>
-              <a:buNone/>
-              <a:defRPr/>
-            </a:lvl5pPr>
-            <a:lvl6pPr marL="0" lvl="5" indent="0" algn="r">
-              <a:spcBef>
-                <a:spcPts val="0"/>
-              </a:spcBef>
-              <a:spcAft>
-                <a:spcPts val="0"/>
-              </a:spcAft>
-              <a:buClr>
-                <a:schemeClr val="lt1"/>
-              </a:buClr>
-              <a:buSzPts val="500"/>
-              <a:buFont typeface="Arial"/>
-              <a:buNone/>
-              <a:defRPr/>
-            </a:lvl6pPr>
-            <a:lvl7pPr marL="0" lvl="6" indent="0" algn="r">
-              <a:spcBef>
-                <a:spcPts val="0"/>
-              </a:spcBef>
-              <a:spcAft>
-                <a:spcPts val="0"/>
-              </a:spcAft>
-              <a:buClr>
-                <a:schemeClr val="lt1"/>
-              </a:buClr>
-              <a:buSzPts val="500"/>
-              <a:buFont typeface="Arial"/>
-              <a:buNone/>
-              <a:defRPr/>
-            </a:lvl7pPr>
-            <a:lvl8pPr marL="0" lvl="7" indent="0" algn="r">
-              <a:spcBef>
-                <a:spcPts val="0"/>
-              </a:spcBef>
-              <a:spcAft>
-                <a:spcPts val="0"/>
-              </a:spcAft>
-              <a:buClr>
-                <a:schemeClr val="lt1"/>
-              </a:buClr>
-              <a:buSzPts val="500"/>
-              <a:buFont typeface="Arial"/>
-              <a:buNone/>
-              <a:defRPr/>
-            </a:lvl8pPr>
-            <a:lvl9pPr marL="0" lvl="8" indent="0" algn="r">
-              <a:spcBef>
-                <a:spcPts val="0"/>
-              </a:spcBef>
-              <a:spcAft>
-                <a:spcPts val="0"/>
-              </a:spcAft>
-              <a:buClr>
-                <a:schemeClr val="lt1"/>
-              </a:buClr>
-              <a:buSzPts val="500"/>
-              <a:buFont typeface="Arial"/>
-              <a:buNone/>
-              <a:defRPr/>
-            </a:lvl9pPr>
-          </a:lstStyle>
-          <a:p>
-            <a:pPr marL="0" lvl="0" indent="0" algn="r" rtl="0">
-              <a:spcBef>
-                <a:spcPts val="0"/>
-              </a:spcBef>
-              <a:spcAft>
-                <a:spcPts val="0"/>
-              </a:spcAft>
-              <a:buNone/>
-            </a:pPr>
-            <a:fld id="{00000000-1234-1234-1234-123412341234}" type="slidenum">
-              <a:rPr lang="en"/>
-              <a:t>‹#›</a:t>
-            </a:fld>
-            <a:endParaRPr/>
-          </a:p>
-        </p:txBody>
-      </p:sp>
-      <p:sp>
-        <p:nvSpPr>
-          <p:cNvPr id="281" name="Google Shape;281;p21"/>
-          <p:cNvSpPr/>
-          <p:nvPr/>
-        </p:nvSpPr>
-        <p:spPr>
-          <a:xfrm>
-            <a:off x="1040130" y="4970376"/>
-            <a:ext cx="7063740" cy="173124"/>
-          </a:xfrm>
-          <a:prstGeom prst="rect">
-            <a:avLst/>
-          </a:prstGeom>
-          <a:noFill/>
-          <a:ln>
-            <a:noFill/>
-          </a:ln>
-        </p:spPr>
-        <p:txBody>
-          <a:bodyPr spcFirstLastPara="1" wrap="square" lIns="0" tIns="45700" rIns="0" bIns="45700" anchor="b" anchorCtr="0">
-            <a:noAutofit/>
-          </a:bodyPr>
-          <a:lstStyle/>
-          <a:p>
-            <a:pPr marL="0" marR="0" lvl="0" indent="0" algn="ctr" rtl="0">
-              <a:spcBef>
-                <a:spcPts val="0"/>
-              </a:spcBef>
-              <a:spcAft>
-                <a:spcPts val="0"/>
-              </a:spcAft>
-              <a:buNone/>
-            </a:pPr>
-            <a:r>
-              <a:rPr lang="en" sz="525" b="1" i="0" u="none" strike="noStrike" cap="none">
-                <a:solidFill>
-                  <a:schemeClr val="lt1"/>
-                </a:solidFill>
-                <a:latin typeface="Arial"/>
-                <a:ea typeface="Arial"/>
-                <a:cs typeface="Arial"/>
-                <a:sym typeface="Arial"/>
-              </a:rPr>
-              <a:t>EDIT CONTROL STATEMENT UNDER &gt; VIEW &gt; SLIDE MASTER &gt; SCROLL TO TOP &gt; CHANGE HEADER AND FOOTER</a:t>
-            </a:r>
-            <a:endParaRPr/>
-          </a:p>
-        </p:txBody>
-      </p:sp>
-      <p:sp>
-        <p:nvSpPr>
-          <p:cNvPr id="282" name="Google Shape;282;p21"/>
-          <p:cNvSpPr/>
-          <p:nvPr/>
-        </p:nvSpPr>
-        <p:spPr>
-          <a:xfrm>
-            <a:off x="1040130" y="0"/>
-            <a:ext cx="7063740" cy="173124"/>
-          </a:xfrm>
-          <a:prstGeom prst="rect">
-            <a:avLst/>
-          </a:prstGeom>
-          <a:noFill/>
-          <a:ln>
-            <a:noFill/>
-          </a:ln>
-        </p:spPr>
-        <p:txBody>
-          <a:bodyPr spcFirstLastPara="1" wrap="square" lIns="91425" tIns="45700" rIns="91425" bIns="45700" anchor="t" anchorCtr="0">
-            <a:noAutofit/>
-          </a:bodyPr>
-          <a:lstStyle/>
-          <a:p>
-            <a:pPr marL="0" marR="0" lvl="0" indent="0" algn="ctr" rtl="0">
-              <a:spcBef>
-                <a:spcPts val="0"/>
-              </a:spcBef>
-              <a:spcAft>
-                <a:spcPts val="0"/>
-              </a:spcAft>
-              <a:buNone/>
-            </a:pPr>
-            <a:r>
-              <a:rPr lang="en" sz="525" b="1" i="0" u="none" strike="noStrike" cap="none">
-                <a:solidFill>
-                  <a:schemeClr val="lt1"/>
-                </a:solidFill>
-                <a:latin typeface="Arial"/>
-                <a:ea typeface="Arial"/>
-                <a:cs typeface="Arial"/>
-                <a:sym typeface="Arial"/>
-              </a:rPr>
-              <a:t>EDIT CONTROL STATEMENT UNDER &gt; VIEW &gt; SLIDE MASTER &gt; SCROLL TO TOP &gt; CHANGE HEADER AND FOOTER</a:t>
-            </a:r>
-            <a:endParaRPr/>
-          </a:p>
-        </p:txBody>
-      </p:sp>
-      <p:pic>
-        <p:nvPicPr>
-          <p:cNvPr id="283" name="Google Shape;283;p21"/>
-          <p:cNvPicPr preferRelativeResize="0"/>
-          <p:nvPr/>
-        </p:nvPicPr>
-        <p:blipFill rotWithShape="1">
-          <a:blip r:embed="rId2">
-            <a:alphaModFix/>
-          </a:blip>
-          <a:srcRect/>
-          <a:stretch/>
-        </p:blipFill>
-        <p:spPr>
-          <a:xfrm>
-            <a:off x="7503462" y="308372"/>
-            <a:ext cx="1222280" cy="358517"/>
-          </a:xfrm>
-          <a:prstGeom prst="rect">
-            <a:avLst/>
-          </a:prstGeom>
-          <a:noFill/>
-          <a:ln>
-            <a:noFill/>
-          </a:ln>
-        </p:spPr>
-      </p:pic>
-    </p:spTree>
-  </p:cSld>
-  <p:clrMapOvr>
-    <a:masterClrMapping/>
-  </p:clrMapOvr>
-  <p:extLst>
-    <p:ext uri="{DCECCB84-F9BA-43D5-87BE-67443E8EF086}">
-      <p15:sldGuideLst xmlns:p15="http://schemas.microsoft.com/office/powerpoint/2012/main">
-        <p15:guide id="1" orient="horz" pos="1354">
-          <p15:clr>
-            <a:srgbClr val="A4A3A4"/>
-          </p15:clr>
-        </p15:guide>
-        <p15:guide id="2" orient="horz" pos="3888">
-          <p15:clr>
-            <a:srgbClr val="A4A3A4"/>
-          </p15:clr>
-        </p15:guide>
-      </p15:sldGuideLst>
-    </p:ext>
-  </p:extLst>
-</p:sldLayout>
-</file>
-
-<file path=ppt/slideLayouts/slideLayout21.xml><?xml version="1.0" encoding="utf-8"?>
 <p:sldLayout xmlns:a="http://schemas.openxmlformats.org/drawingml/2006/main" xmlns:r="http://schemas.openxmlformats.org/officeDocument/2006/relationships" xmlns:p="http://schemas.openxmlformats.org/presentationml/2006/main" matchingName="Section Header - Image">
   <p:cSld name="Section Header - Image">
     <p:bg>
@@ -25678,7 +23748,7 @@
 </p:sldLayout>
 </file>
 
-<file path=ppt/slideLayouts/slideLayout22.xml><?xml version="1.0" encoding="utf-8"?>
+<file path=ppt/slideLayouts/slideLayout21.xml><?xml version="1.0" encoding="utf-8"?>
 <p:sldLayout xmlns:a="http://schemas.openxmlformats.org/drawingml/2006/main" xmlns:r="http://schemas.openxmlformats.org/officeDocument/2006/relationships" xmlns:p="http://schemas.openxmlformats.org/presentationml/2006/main" matchingName="Section Header - White 01">
   <p:cSld name="Section Header - White 01">
     <p:bg>
@@ -26375,7 +24445,7 @@
 </p:sldLayout>
 </file>
 
-<file path=ppt/slideLayouts/slideLayout23.xml><?xml version="1.0" encoding="utf-8"?>
+<file path=ppt/slideLayouts/slideLayout22.xml><?xml version="1.0" encoding="utf-8"?>
 <p:sldLayout xmlns:a="http://schemas.openxmlformats.org/drawingml/2006/main" xmlns:r="http://schemas.openxmlformats.org/officeDocument/2006/relationships" xmlns:p="http://schemas.openxmlformats.org/presentationml/2006/main" matchingName="Section Header - White 02">
   <p:cSld name="Section Header - White 02">
     <p:bg>
@@ -27072,7 +25142,7 @@
 </p:sldLayout>
 </file>
 
-<file path=ppt/slideLayouts/slideLayout24.xml><?xml version="1.0" encoding="utf-8"?>
+<file path=ppt/slideLayouts/slideLayout23.xml><?xml version="1.0" encoding="utf-8"?>
 <p:sldLayout xmlns:a="http://schemas.openxmlformats.org/drawingml/2006/main" xmlns:r="http://schemas.openxmlformats.org/officeDocument/2006/relationships" xmlns:p="http://schemas.openxmlformats.org/presentationml/2006/main" showMasterSp="0" matchingName="Section Header - Half Image">
   <p:cSld name="Section Header - Half Image">
     <p:bg>
@@ -27922,7 +25992,7 @@
 </p:sldLayout>
 </file>
 
-<file path=ppt/slideLayouts/slideLayout25.xml><?xml version="1.0" encoding="utf-8"?>
+<file path=ppt/slideLayouts/slideLayout24.xml><?xml version="1.0" encoding="utf-8"?>
 <p:sldLayout xmlns:a="http://schemas.openxmlformats.org/drawingml/2006/main" xmlns:r="http://schemas.openxmlformats.org/officeDocument/2006/relationships" xmlns:p="http://schemas.openxmlformats.org/presentationml/2006/main" matchingName="Section Header - Half Image - White">
   <p:cSld name="Section Header - Half Image - White">
     <p:bg>
@@ -28645,7 +26715,7 @@
 </p:sldLayout>
 </file>
 
-<file path=ppt/slideLayouts/slideLayout26.xml><?xml version="1.0" encoding="utf-8"?>
+<file path=ppt/slideLayouts/slideLayout25.xml><?xml version="1.0" encoding="utf-8"?>
 <p:sldLayout xmlns:a="http://schemas.openxmlformats.org/drawingml/2006/main" xmlns:r="http://schemas.openxmlformats.org/officeDocument/2006/relationships" xmlns:p="http://schemas.openxmlformats.org/presentationml/2006/main" matchingName="Title Only">
   <p:cSld name="Title Only">
     <p:spTree>
@@ -29140,7 +27210,7 @@
 </p:sldLayout>
 </file>
 
-<file path=ppt/slideLayouts/slideLayout27.xml><?xml version="1.0" encoding="utf-8"?>
+<file path=ppt/slideLayouts/slideLayout26.xml><?xml version="1.0" encoding="utf-8"?>
 <p:sldLayout xmlns:a="http://schemas.openxmlformats.org/drawingml/2006/main" xmlns:r="http://schemas.openxmlformats.org/officeDocument/2006/relationships" xmlns:p="http://schemas.openxmlformats.org/presentationml/2006/main" showMasterSp="0" matchingName="Title Only - Black">
   <p:cSld name="Title Only - Black">
     <p:bg>
@@ -29770,7 +27840,7 @@
 </p:sldLayout>
 </file>
 
-<file path=ppt/slideLayouts/slideLayout28.xml><?xml version="1.0" encoding="utf-8"?>
+<file path=ppt/slideLayouts/slideLayout27.xml><?xml version="1.0" encoding="utf-8"?>
 <p:sldLayout xmlns:a="http://schemas.openxmlformats.org/drawingml/2006/main" xmlns:r="http://schemas.openxmlformats.org/officeDocument/2006/relationships" xmlns:p="http://schemas.openxmlformats.org/presentationml/2006/main" matchingName="Blank">
   <p:cSld name="Blank">
     <p:spTree>
@@ -30126,7 +28196,7 @@
 </p:sldLayout>
 </file>
 
-<file path=ppt/slideLayouts/slideLayout29.xml><?xml version="1.0" encoding="utf-8"?>
+<file path=ppt/slideLayouts/slideLayout28.xml><?xml version="1.0" encoding="utf-8"?>
 <p:sldLayout xmlns:a="http://schemas.openxmlformats.org/drawingml/2006/main" xmlns:r="http://schemas.openxmlformats.org/officeDocument/2006/relationships" xmlns:p="http://schemas.openxmlformats.org/presentationml/2006/main" showMasterSp="0" matchingName="Blank - Black">
   <p:cSld name="Blank - Black">
     <p:bg>
@@ -30614,6 +28684,635 @@
       </p15:sldGuideLst>
     </p:ext>
   </p:extLst>
+</p:sldLayout>
+</file>
+
+<file path=ppt/slideLayouts/slideLayout29.xml><?xml version="1.0" encoding="utf-8"?>
+<p:sldLayout xmlns:a="http://schemas.openxmlformats.org/drawingml/2006/main" xmlns:r="http://schemas.openxmlformats.org/officeDocument/2006/relationships" xmlns:p="http://schemas.openxmlformats.org/presentationml/2006/main" showMasterSp="0" matchingName="Thank You">
+  <p:cSld name="Thank You">
+    <p:bg>
+      <p:bgPr>
+        <a:solidFill>
+          <a:srgbClr val="221F20"/>
+        </a:solidFill>
+        <a:effectLst/>
+      </p:bgPr>
+    </p:bg>
+    <p:spTree>
+      <p:nvGrpSpPr>
+        <p:cNvPr id="1" name="Shape 336"/>
+        <p:cNvGrpSpPr/>
+        <p:nvPr/>
+      </p:nvGrpSpPr>
+      <p:grpSpPr>
+        <a:xfrm>
+          <a:off x="0" y="0"/>
+          <a:ext cx="0" cy="0"/>
+          <a:chOff x="0" y="0"/>
+          <a:chExt cx="0" cy="0"/>
+        </a:xfrm>
+      </p:grpSpPr>
+      <p:sp>
+        <p:nvSpPr>
+          <p:cNvPr id="337" name="Google Shape;337;p31"/>
+          <p:cNvSpPr txBox="1"/>
+          <p:nvPr/>
+        </p:nvSpPr>
+        <p:spPr>
+          <a:xfrm>
+            <a:off x="411162" y="1611630"/>
+            <a:ext cx="8321040" cy="1028700"/>
+          </a:xfrm>
+          <a:prstGeom prst="rect">
+            <a:avLst/>
+          </a:prstGeom>
+          <a:noFill/>
+          <a:ln>
+            <a:noFill/>
+          </a:ln>
+        </p:spPr>
+        <p:txBody>
+          <a:bodyPr spcFirstLastPara="1" wrap="square" lIns="0" tIns="0" rIns="0" bIns="0" anchor="t" anchorCtr="0">
+            <a:noAutofit/>
+          </a:bodyPr>
+          <a:lstStyle/>
+          <a:p>
+            <a:pPr marL="0" marR="0" lvl="0" indent="0" algn="l" rtl="0">
+              <a:lnSpc>
+                <a:spcPct val="90000"/>
+              </a:lnSpc>
+              <a:spcBef>
+                <a:spcPts val="0"/>
+              </a:spcBef>
+              <a:spcAft>
+                <a:spcPts val="0"/>
+              </a:spcAft>
+              <a:buClr>
+                <a:srgbClr val="FFCC01"/>
+              </a:buClr>
+              <a:buSzPts val="3600"/>
+              <a:buFont typeface="Arial"/>
+              <a:buNone/>
+            </a:pPr>
+            <a:r>
+              <a:rPr lang="en" sz="3600" b="0" i="0" u="none" strike="noStrike" cap="none">
+                <a:solidFill>
+                  <a:srgbClr val="FFCC01"/>
+                </a:solidFill>
+                <a:latin typeface="Arial"/>
+                <a:ea typeface="Arial"/>
+                <a:cs typeface="Arial"/>
+                <a:sym typeface="Arial"/>
+              </a:rPr>
+              <a:t>THANK YOU.</a:t>
+            </a:r>
+            <a:endParaRPr/>
+          </a:p>
+        </p:txBody>
+      </p:sp>
+      <p:sp>
+        <p:nvSpPr>
+          <p:cNvPr id="338" name="Google Shape;338;p31"/>
+          <p:cNvSpPr txBox="1">
+            <a:spLocks noGrp="1"/>
+          </p:cNvSpPr>
+          <p:nvPr>
+            <p:ph type="body" idx="1"/>
+          </p:nvPr>
+        </p:nvSpPr>
+        <p:spPr>
+          <a:xfrm>
+            <a:off x="411164" y="3614561"/>
+            <a:ext cx="4024312" cy="1028699"/>
+          </a:xfrm>
+          <a:prstGeom prst="rect">
+            <a:avLst/>
+          </a:prstGeom>
+          <a:noFill/>
+          <a:ln>
+            <a:noFill/>
+          </a:ln>
+        </p:spPr>
+        <p:txBody>
+          <a:bodyPr spcFirstLastPara="1" wrap="square" lIns="0" tIns="0" rIns="0" bIns="0" anchor="b" anchorCtr="0">
+            <a:noAutofit/>
+          </a:bodyPr>
+          <a:lstStyle>
+            <a:lvl1pPr marL="457200" lvl="0" indent="-228600" algn="l">
+              <a:lnSpc>
+                <a:spcPct val="95000"/>
+              </a:lnSpc>
+              <a:spcBef>
+                <a:spcPts val="0"/>
+              </a:spcBef>
+              <a:spcAft>
+                <a:spcPts val="0"/>
+              </a:spcAft>
+              <a:buClr>
+                <a:schemeClr val="lt1"/>
+              </a:buClr>
+              <a:buSzPts val="900"/>
+              <a:buFont typeface="Arial"/>
+              <a:buNone/>
+              <a:defRPr sz="900"/>
+            </a:lvl1pPr>
+            <a:lvl2pPr marL="914400" lvl="1" indent="-228600" algn="l">
+              <a:lnSpc>
+                <a:spcPct val="95000"/>
+              </a:lnSpc>
+              <a:spcBef>
+                <a:spcPts val="0"/>
+              </a:spcBef>
+              <a:spcAft>
+                <a:spcPts val="0"/>
+              </a:spcAft>
+              <a:buClr>
+                <a:schemeClr val="lt1"/>
+              </a:buClr>
+              <a:buSzPts val="900"/>
+              <a:buFont typeface="Arial"/>
+              <a:buNone/>
+              <a:defRPr sz="900"/>
+            </a:lvl2pPr>
+            <a:lvl3pPr marL="1371600" lvl="2" indent="-228600" algn="l">
+              <a:lnSpc>
+                <a:spcPct val="95000"/>
+              </a:lnSpc>
+              <a:spcBef>
+                <a:spcPts val="0"/>
+              </a:spcBef>
+              <a:spcAft>
+                <a:spcPts val="0"/>
+              </a:spcAft>
+              <a:buClr>
+                <a:schemeClr val="lt1"/>
+              </a:buClr>
+              <a:buSzPts val="900"/>
+              <a:buFont typeface="Arial"/>
+              <a:buNone/>
+              <a:defRPr sz="900"/>
+            </a:lvl3pPr>
+            <a:lvl4pPr marL="1828800" lvl="3" indent="-228600" algn="l">
+              <a:lnSpc>
+                <a:spcPct val="95000"/>
+              </a:lnSpc>
+              <a:spcBef>
+                <a:spcPts val="0"/>
+              </a:spcBef>
+              <a:spcAft>
+                <a:spcPts val="0"/>
+              </a:spcAft>
+              <a:buClr>
+                <a:schemeClr val="lt1"/>
+              </a:buClr>
+              <a:buSzPts val="900"/>
+              <a:buFont typeface="Arial"/>
+              <a:buNone/>
+              <a:defRPr sz="900"/>
+            </a:lvl4pPr>
+            <a:lvl5pPr marL="2286000" lvl="4" indent="-228600" algn="l">
+              <a:lnSpc>
+                <a:spcPct val="95000"/>
+              </a:lnSpc>
+              <a:spcBef>
+                <a:spcPts val="0"/>
+              </a:spcBef>
+              <a:spcAft>
+                <a:spcPts val="0"/>
+              </a:spcAft>
+              <a:buClr>
+                <a:schemeClr val="lt1"/>
+              </a:buClr>
+              <a:buSzPts val="900"/>
+              <a:buFont typeface="Arial"/>
+              <a:buNone/>
+              <a:defRPr sz="900"/>
+            </a:lvl5pPr>
+            <a:lvl6pPr marL="2743200" lvl="5" indent="-228600" algn="l">
+              <a:lnSpc>
+                <a:spcPct val="95000"/>
+              </a:lnSpc>
+              <a:spcBef>
+                <a:spcPts val="0"/>
+              </a:spcBef>
+              <a:spcAft>
+                <a:spcPts val="0"/>
+              </a:spcAft>
+              <a:buClr>
+                <a:schemeClr val="lt1"/>
+              </a:buClr>
+              <a:buSzPts val="900"/>
+              <a:buFont typeface="Arial"/>
+              <a:buNone/>
+              <a:defRPr sz="900"/>
+            </a:lvl6pPr>
+            <a:lvl7pPr marL="3200400" lvl="6" indent="-228600" algn="l">
+              <a:lnSpc>
+                <a:spcPct val="95000"/>
+              </a:lnSpc>
+              <a:spcBef>
+                <a:spcPts val="0"/>
+              </a:spcBef>
+              <a:spcAft>
+                <a:spcPts val="0"/>
+              </a:spcAft>
+              <a:buClr>
+                <a:schemeClr val="lt1"/>
+              </a:buClr>
+              <a:buSzPts val="900"/>
+              <a:buFont typeface="Arial"/>
+              <a:buNone/>
+              <a:defRPr sz="900"/>
+            </a:lvl7pPr>
+            <a:lvl8pPr marL="3657600" lvl="7" indent="-228600" algn="l">
+              <a:lnSpc>
+                <a:spcPct val="95000"/>
+              </a:lnSpc>
+              <a:spcBef>
+                <a:spcPts val="0"/>
+              </a:spcBef>
+              <a:spcAft>
+                <a:spcPts val="0"/>
+              </a:spcAft>
+              <a:buClr>
+                <a:schemeClr val="lt1"/>
+              </a:buClr>
+              <a:buSzPts val="900"/>
+              <a:buFont typeface="Arial"/>
+              <a:buNone/>
+              <a:defRPr sz="900"/>
+            </a:lvl8pPr>
+            <a:lvl9pPr marL="4114800" lvl="8" indent="-228600" algn="l">
+              <a:lnSpc>
+                <a:spcPct val="95000"/>
+              </a:lnSpc>
+              <a:spcBef>
+                <a:spcPts val="0"/>
+              </a:spcBef>
+              <a:spcAft>
+                <a:spcPts val="0"/>
+              </a:spcAft>
+              <a:buClr>
+                <a:schemeClr val="lt1"/>
+              </a:buClr>
+              <a:buSzPts val="900"/>
+              <a:buFont typeface="Arial"/>
+              <a:buNone/>
+              <a:defRPr sz="900"/>
+            </a:lvl9pPr>
+          </a:lstStyle>
+          <a:p>
+            <a:endParaRPr/>
+          </a:p>
+        </p:txBody>
+      </p:sp>
+      <p:sp>
+        <p:nvSpPr>
+          <p:cNvPr id="339" name="Google Shape;339;p31"/>
+          <p:cNvSpPr txBox="1">
+            <a:spLocks noGrp="1"/>
+          </p:cNvSpPr>
+          <p:nvPr>
+            <p:ph type="dt" idx="10"/>
+          </p:nvPr>
+        </p:nvSpPr>
+        <p:spPr>
+          <a:xfrm>
+            <a:off x="410766" y="4972050"/>
+            <a:ext cx="617934" cy="171450"/>
+          </a:xfrm>
+          <a:prstGeom prst="rect">
+            <a:avLst/>
+          </a:prstGeom>
+          <a:noFill/>
+          <a:ln>
+            <a:noFill/>
+          </a:ln>
+        </p:spPr>
+        <p:txBody>
+          <a:bodyPr spcFirstLastPara="1" wrap="square" lIns="0" tIns="45700" rIns="0" bIns="45700" anchor="b" anchorCtr="0">
+            <a:noAutofit/>
+          </a:bodyPr>
+          <a:lstStyle>
+            <a:lvl1pPr lvl="0" algn="l">
+              <a:spcBef>
+                <a:spcPts val="0"/>
+              </a:spcBef>
+              <a:spcAft>
+                <a:spcPts val="0"/>
+              </a:spcAft>
+              <a:buSzPts val="1400"/>
+              <a:buNone/>
+              <a:defRPr/>
+            </a:lvl1pPr>
+            <a:lvl2pPr lvl="1" algn="l">
+              <a:spcBef>
+                <a:spcPts val="0"/>
+              </a:spcBef>
+              <a:spcAft>
+                <a:spcPts val="0"/>
+              </a:spcAft>
+              <a:buSzPts val="1400"/>
+              <a:buNone/>
+              <a:defRPr/>
+            </a:lvl2pPr>
+            <a:lvl3pPr lvl="2" algn="l">
+              <a:spcBef>
+                <a:spcPts val="0"/>
+              </a:spcBef>
+              <a:spcAft>
+                <a:spcPts val="0"/>
+              </a:spcAft>
+              <a:buSzPts val="1400"/>
+              <a:buNone/>
+              <a:defRPr/>
+            </a:lvl3pPr>
+            <a:lvl4pPr lvl="3" algn="l">
+              <a:spcBef>
+                <a:spcPts val="0"/>
+              </a:spcBef>
+              <a:spcAft>
+                <a:spcPts val="0"/>
+              </a:spcAft>
+              <a:buSzPts val="1400"/>
+              <a:buNone/>
+              <a:defRPr/>
+            </a:lvl4pPr>
+            <a:lvl5pPr lvl="4" algn="l">
+              <a:spcBef>
+                <a:spcPts val="0"/>
+              </a:spcBef>
+              <a:spcAft>
+                <a:spcPts val="0"/>
+              </a:spcAft>
+              <a:buSzPts val="1400"/>
+              <a:buNone/>
+              <a:defRPr/>
+            </a:lvl5pPr>
+            <a:lvl6pPr lvl="5" algn="l">
+              <a:spcBef>
+                <a:spcPts val="0"/>
+              </a:spcBef>
+              <a:spcAft>
+                <a:spcPts val="0"/>
+              </a:spcAft>
+              <a:buSzPts val="1400"/>
+              <a:buNone/>
+              <a:defRPr/>
+            </a:lvl6pPr>
+            <a:lvl7pPr lvl="6" algn="l">
+              <a:spcBef>
+                <a:spcPts val="0"/>
+              </a:spcBef>
+              <a:spcAft>
+                <a:spcPts val="0"/>
+              </a:spcAft>
+              <a:buSzPts val="1400"/>
+              <a:buNone/>
+              <a:defRPr/>
+            </a:lvl7pPr>
+            <a:lvl8pPr lvl="7" algn="l">
+              <a:spcBef>
+                <a:spcPts val="0"/>
+              </a:spcBef>
+              <a:spcAft>
+                <a:spcPts val="0"/>
+              </a:spcAft>
+              <a:buSzPts val="1400"/>
+              <a:buNone/>
+              <a:defRPr/>
+            </a:lvl8pPr>
+            <a:lvl9pPr lvl="8" algn="l">
+              <a:spcBef>
+                <a:spcPts val="0"/>
+              </a:spcBef>
+              <a:spcAft>
+                <a:spcPts val="0"/>
+              </a:spcAft>
+              <a:buSzPts val="1400"/>
+              <a:buNone/>
+              <a:defRPr/>
+            </a:lvl9pPr>
+          </a:lstStyle>
+          <a:p>
+            <a:endParaRPr/>
+          </a:p>
+        </p:txBody>
+      </p:sp>
+      <p:sp>
+        <p:nvSpPr>
+          <p:cNvPr id="340" name="Google Shape;340;p31"/>
+          <p:cNvSpPr txBox="1">
+            <a:spLocks noGrp="1"/>
+          </p:cNvSpPr>
+          <p:nvPr>
+            <p:ph type="sldNum" idx="12"/>
+          </p:nvPr>
+        </p:nvSpPr>
+        <p:spPr>
+          <a:xfrm>
+            <a:off x="8408037" y="4972050"/>
+            <a:ext cx="331501" cy="171450"/>
+          </a:xfrm>
+          <a:prstGeom prst="rect">
+            <a:avLst/>
+          </a:prstGeom>
+          <a:noFill/>
+          <a:ln>
+            <a:noFill/>
+          </a:ln>
+        </p:spPr>
+        <p:txBody>
+          <a:bodyPr spcFirstLastPara="1" wrap="square" lIns="0" tIns="45700" rIns="0" bIns="45700" anchor="b" anchorCtr="0">
+            <a:noAutofit/>
+          </a:bodyPr>
+          <a:lstStyle>
+            <a:lvl1pPr marL="0" lvl="0" indent="0" algn="r">
+              <a:spcBef>
+                <a:spcPts val="0"/>
+              </a:spcBef>
+              <a:spcAft>
+                <a:spcPts val="0"/>
+              </a:spcAft>
+              <a:buClr>
+                <a:schemeClr val="lt1"/>
+              </a:buClr>
+              <a:buSzPts val="500"/>
+              <a:buFont typeface="Arial"/>
+              <a:buNone/>
+              <a:defRPr/>
+            </a:lvl1pPr>
+            <a:lvl2pPr marL="0" lvl="1" indent="0" algn="r">
+              <a:spcBef>
+                <a:spcPts val="0"/>
+              </a:spcBef>
+              <a:spcAft>
+                <a:spcPts val="0"/>
+              </a:spcAft>
+              <a:buClr>
+                <a:schemeClr val="lt1"/>
+              </a:buClr>
+              <a:buSzPts val="500"/>
+              <a:buFont typeface="Arial"/>
+              <a:buNone/>
+              <a:defRPr/>
+            </a:lvl2pPr>
+            <a:lvl3pPr marL="0" lvl="2" indent="0" algn="r">
+              <a:spcBef>
+                <a:spcPts val="0"/>
+              </a:spcBef>
+              <a:spcAft>
+                <a:spcPts val="0"/>
+              </a:spcAft>
+              <a:buClr>
+                <a:schemeClr val="lt1"/>
+              </a:buClr>
+              <a:buSzPts val="500"/>
+              <a:buFont typeface="Arial"/>
+              <a:buNone/>
+              <a:defRPr/>
+            </a:lvl3pPr>
+            <a:lvl4pPr marL="0" lvl="3" indent="0" algn="r">
+              <a:spcBef>
+                <a:spcPts val="0"/>
+              </a:spcBef>
+              <a:spcAft>
+                <a:spcPts val="0"/>
+              </a:spcAft>
+              <a:buClr>
+                <a:schemeClr val="lt1"/>
+              </a:buClr>
+              <a:buSzPts val="500"/>
+              <a:buFont typeface="Arial"/>
+              <a:buNone/>
+              <a:defRPr/>
+            </a:lvl4pPr>
+            <a:lvl5pPr marL="0" lvl="4" indent="0" algn="r">
+              <a:spcBef>
+                <a:spcPts val="0"/>
+              </a:spcBef>
+              <a:spcAft>
+                <a:spcPts val="0"/>
+              </a:spcAft>
+              <a:buClr>
+                <a:schemeClr val="lt1"/>
+              </a:buClr>
+              <a:buSzPts val="500"/>
+              <a:buFont typeface="Arial"/>
+              <a:buNone/>
+              <a:defRPr/>
+            </a:lvl5pPr>
+            <a:lvl6pPr marL="0" lvl="5" indent="0" algn="r">
+              <a:spcBef>
+                <a:spcPts val="0"/>
+              </a:spcBef>
+              <a:spcAft>
+                <a:spcPts val="0"/>
+              </a:spcAft>
+              <a:buClr>
+                <a:schemeClr val="lt1"/>
+              </a:buClr>
+              <a:buSzPts val="500"/>
+              <a:buFont typeface="Arial"/>
+              <a:buNone/>
+              <a:defRPr/>
+            </a:lvl6pPr>
+            <a:lvl7pPr marL="0" lvl="6" indent="0" algn="r">
+              <a:spcBef>
+                <a:spcPts val="0"/>
+              </a:spcBef>
+              <a:spcAft>
+                <a:spcPts val="0"/>
+              </a:spcAft>
+              <a:buClr>
+                <a:schemeClr val="lt1"/>
+              </a:buClr>
+              <a:buSzPts val="500"/>
+              <a:buFont typeface="Arial"/>
+              <a:buNone/>
+              <a:defRPr/>
+            </a:lvl7pPr>
+            <a:lvl8pPr marL="0" lvl="7" indent="0" algn="r">
+              <a:spcBef>
+                <a:spcPts val="0"/>
+              </a:spcBef>
+              <a:spcAft>
+                <a:spcPts val="0"/>
+              </a:spcAft>
+              <a:buClr>
+                <a:schemeClr val="lt1"/>
+              </a:buClr>
+              <a:buSzPts val="500"/>
+              <a:buFont typeface="Arial"/>
+              <a:buNone/>
+              <a:defRPr/>
+            </a:lvl8pPr>
+            <a:lvl9pPr marL="0" lvl="8" indent="0" algn="r">
+              <a:spcBef>
+                <a:spcPts val="0"/>
+              </a:spcBef>
+              <a:spcAft>
+                <a:spcPts val="0"/>
+              </a:spcAft>
+              <a:buClr>
+                <a:schemeClr val="lt1"/>
+              </a:buClr>
+              <a:buSzPts val="500"/>
+              <a:buFont typeface="Arial"/>
+              <a:buNone/>
+              <a:defRPr/>
+            </a:lvl9pPr>
+          </a:lstStyle>
+          <a:p>
+            <a:pPr marL="0" lvl="0" indent="0" algn="r" rtl="0">
+              <a:spcBef>
+                <a:spcPts val="0"/>
+              </a:spcBef>
+              <a:spcAft>
+                <a:spcPts val="0"/>
+              </a:spcAft>
+              <a:buNone/>
+            </a:pPr>
+            <a:fld id="{00000000-1234-1234-1234-123412341234}" type="slidenum">
+              <a:rPr lang="en"/>
+              <a:t>‹#›</a:t>
+            </a:fld>
+            <a:endParaRPr/>
+          </a:p>
+        </p:txBody>
+      </p:sp>
+      <p:pic>
+        <p:nvPicPr>
+          <p:cNvPr id="341" name="Google Shape;341;p31"/>
+          <p:cNvPicPr preferRelativeResize="0"/>
+          <p:nvPr/>
+        </p:nvPicPr>
+        <p:blipFill rotWithShape="1">
+          <a:blip r:embed="rId2">
+            <a:alphaModFix/>
+          </a:blip>
+          <a:srcRect/>
+          <a:stretch/>
+        </p:blipFill>
+        <p:spPr>
+          <a:xfrm>
+            <a:off x="7503462" y="308372"/>
+            <a:ext cx="1222280" cy="358517"/>
+          </a:xfrm>
+          <a:prstGeom prst="rect">
+            <a:avLst/>
+          </a:prstGeom>
+          <a:noFill/>
+          <a:ln>
+            <a:noFill/>
+          </a:ln>
+        </p:spPr>
+      </p:pic>
+    </p:spTree>
+  </p:cSld>
+  <p:clrMapOvr>
+    <a:masterClrMapping/>
+  </p:clrMapOvr>
 </p:sldLayout>
 </file>
 
@@ -33920,635 +32619,6 @@
 </file>
 
 <file path=ppt/slideLayouts/slideLayout30.xml><?xml version="1.0" encoding="utf-8"?>
-<p:sldLayout xmlns:a="http://schemas.openxmlformats.org/drawingml/2006/main" xmlns:r="http://schemas.openxmlformats.org/officeDocument/2006/relationships" xmlns:p="http://schemas.openxmlformats.org/presentationml/2006/main" showMasterSp="0" matchingName="Thank You">
-  <p:cSld name="Thank You">
-    <p:bg>
-      <p:bgPr>
-        <a:solidFill>
-          <a:srgbClr val="221F20"/>
-        </a:solidFill>
-        <a:effectLst/>
-      </p:bgPr>
-    </p:bg>
-    <p:spTree>
-      <p:nvGrpSpPr>
-        <p:cNvPr id="1" name="Shape 336"/>
-        <p:cNvGrpSpPr/>
-        <p:nvPr/>
-      </p:nvGrpSpPr>
-      <p:grpSpPr>
-        <a:xfrm>
-          <a:off x="0" y="0"/>
-          <a:ext cx="0" cy="0"/>
-          <a:chOff x="0" y="0"/>
-          <a:chExt cx="0" cy="0"/>
-        </a:xfrm>
-      </p:grpSpPr>
-      <p:sp>
-        <p:nvSpPr>
-          <p:cNvPr id="337" name="Google Shape;337;p31"/>
-          <p:cNvSpPr txBox="1"/>
-          <p:nvPr/>
-        </p:nvSpPr>
-        <p:spPr>
-          <a:xfrm>
-            <a:off x="411162" y="1611630"/>
-            <a:ext cx="8321040" cy="1028700"/>
-          </a:xfrm>
-          <a:prstGeom prst="rect">
-            <a:avLst/>
-          </a:prstGeom>
-          <a:noFill/>
-          <a:ln>
-            <a:noFill/>
-          </a:ln>
-        </p:spPr>
-        <p:txBody>
-          <a:bodyPr spcFirstLastPara="1" wrap="square" lIns="0" tIns="0" rIns="0" bIns="0" anchor="t" anchorCtr="0">
-            <a:noAutofit/>
-          </a:bodyPr>
-          <a:lstStyle/>
-          <a:p>
-            <a:pPr marL="0" marR="0" lvl="0" indent="0" algn="l" rtl="0">
-              <a:lnSpc>
-                <a:spcPct val="90000"/>
-              </a:lnSpc>
-              <a:spcBef>
-                <a:spcPts val="0"/>
-              </a:spcBef>
-              <a:spcAft>
-                <a:spcPts val="0"/>
-              </a:spcAft>
-              <a:buClr>
-                <a:srgbClr val="FFCC01"/>
-              </a:buClr>
-              <a:buSzPts val="3600"/>
-              <a:buFont typeface="Arial"/>
-              <a:buNone/>
-            </a:pPr>
-            <a:r>
-              <a:rPr lang="en" sz="3600" b="0" i="0" u="none" strike="noStrike" cap="none">
-                <a:solidFill>
-                  <a:srgbClr val="FFCC01"/>
-                </a:solidFill>
-                <a:latin typeface="Arial"/>
-                <a:ea typeface="Arial"/>
-                <a:cs typeface="Arial"/>
-                <a:sym typeface="Arial"/>
-              </a:rPr>
-              <a:t>THANK YOU.</a:t>
-            </a:r>
-            <a:endParaRPr/>
-          </a:p>
-        </p:txBody>
-      </p:sp>
-      <p:sp>
-        <p:nvSpPr>
-          <p:cNvPr id="338" name="Google Shape;338;p31"/>
-          <p:cNvSpPr txBox="1">
-            <a:spLocks noGrp="1"/>
-          </p:cNvSpPr>
-          <p:nvPr>
-            <p:ph type="body" idx="1"/>
-          </p:nvPr>
-        </p:nvSpPr>
-        <p:spPr>
-          <a:xfrm>
-            <a:off x="411164" y="3614561"/>
-            <a:ext cx="4024312" cy="1028699"/>
-          </a:xfrm>
-          <a:prstGeom prst="rect">
-            <a:avLst/>
-          </a:prstGeom>
-          <a:noFill/>
-          <a:ln>
-            <a:noFill/>
-          </a:ln>
-        </p:spPr>
-        <p:txBody>
-          <a:bodyPr spcFirstLastPara="1" wrap="square" lIns="0" tIns="0" rIns="0" bIns="0" anchor="b" anchorCtr="0">
-            <a:noAutofit/>
-          </a:bodyPr>
-          <a:lstStyle>
-            <a:lvl1pPr marL="457200" lvl="0" indent="-228600" algn="l">
-              <a:lnSpc>
-                <a:spcPct val="95000"/>
-              </a:lnSpc>
-              <a:spcBef>
-                <a:spcPts val="0"/>
-              </a:spcBef>
-              <a:spcAft>
-                <a:spcPts val="0"/>
-              </a:spcAft>
-              <a:buClr>
-                <a:schemeClr val="lt1"/>
-              </a:buClr>
-              <a:buSzPts val="900"/>
-              <a:buFont typeface="Arial"/>
-              <a:buNone/>
-              <a:defRPr sz="900"/>
-            </a:lvl1pPr>
-            <a:lvl2pPr marL="914400" lvl="1" indent="-228600" algn="l">
-              <a:lnSpc>
-                <a:spcPct val="95000"/>
-              </a:lnSpc>
-              <a:spcBef>
-                <a:spcPts val="0"/>
-              </a:spcBef>
-              <a:spcAft>
-                <a:spcPts val="0"/>
-              </a:spcAft>
-              <a:buClr>
-                <a:schemeClr val="lt1"/>
-              </a:buClr>
-              <a:buSzPts val="900"/>
-              <a:buFont typeface="Arial"/>
-              <a:buNone/>
-              <a:defRPr sz="900"/>
-            </a:lvl2pPr>
-            <a:lvl3pPr marL="1371600" lvl="2" indent="-228600" algn="l">
-              <a:lnSpc>
-                <a:spcPct val="95000"/>
-              </a:lnSpc>
-              <a:spcBef>
-                <a:spcPts val="0"/>
-              </a:spcBef>
-              <a:spcAft>
-                <a:spcPts val="0"/>
-              </a:spcAft>
-              <a:buClr>
-                <a:schemeClr val="lt1"/>
-              </a:buClr>
-              <a:buSzPts val="900"/>
-              <a:buFont typeface="Arial"/>
-              <a:buNone/>
-              <a:defRPr sz="900"/>
-            </a:lvl3pPr>
-            <a:lvl4pPr marL="1828800" lvl="3" indent="-228600" algn="l">
-              <a:lnSpc>
-                <a:spcPct val="95000"/>
-              </a:lnSpc>
-              <a:spcBef>
-                <a:spcPts val="0"/>
-              </a:spcBef>
-              <a:spcAft>
-                <a:spcPts val="0"/>
-              </a:spcAft>
-              <a:buClr>
-                <a:schemeClr val="lt1"/>
-              </a:buClr>
-              <a:buSzPts val="900"/>
-              <a:buFont typeface="Arial"/>
-              <a:buNone/>
-              <a:defRPr sz="900"/>
-            </a:lvl4pPr>
-            <a:lvl5pPr marL="2286000" lvl="4" indent="-228600" algn="l">
-              <a:lnSpc>
-                <a:spcPct val="95000"/>
-              </a:lnSpc>
-              <a:spcBef>
-                <a:spcPts val="0"/>
-              </a:spcBef>
-              <a:spcAft>
-                <a:spcPts val="0"/>
-              </a:spcAft>
-              <a:buClr>
-                <a:schemeClr val="lt1"/>
-              </a:buClr>
-              <a:buSzPts val="900"/>
-              <a:buFont typeface="Arial"/>
-              <a:buNone/>
-              <a:defRPr sz="900"/>
-            </a:lvl5pPr>
-            <a:lvl6pPr marL="2743200" lvl="5" indent="-228600" algn="l">
-              <a:lnSpc>
-                <a:spcPct val="95000"/>
-              </a:lnSpc>
-              <a:spcBef>
-                <a:spcPts val="0"/>
-              </a:spcBef>
-              <a:spcAft>
-                <a:spcPts val="0"/>
-              </a:spcAft>
-              <a:buClr>
-                <a:schemeClr val="lt1"/>
-              </a:buClr>
-              <a:buSzPts val="900"/>
-              <a:buFont typeface="Arial"/>
-              <a:buNone/>
-              <a:defRPr sz="900"/>
-            </a:lvl6pPr>
-            <a:lvl7pPr marL="3200400" lvl="6" indent="-228600" algn="l">
-              <a:lnSpc>
-                <a:spcPct val="95000"/>
-              </a:lnSpc>
-              <a:spcBef>
-                <a:spcPts val="0"/>
-              </a:spcBef>
-              <a:spcAft>
-                <a:spcPts val="0"/>
-              </a:spcAft>
-              <a:buClr>
-                <a:schemeClr val="lt1"/>
-              </a:buClr>
-              <a:buSzPts val="900"/>
-              <a:buFont typeface="Arial"/>
-              <a:buNone/>
-              <a:defRPr sz="900"/>
-            </a:lvl7pPr>
-            <a:lvl8pPr marL="3657600" lvl="7" indent="-228600" algn="l">
-              <a:lnSpc>
-                <a:spcPct val="95000"/>
-              </a:lnSpc>
-              <a:spcBef>
-                <a:spcPts val="0"/>
-              </a:spcBef>
-              <a:spcAft>
-                <a:spcPts val="0"/>
-              </a:spcAft>
-              <a:buClr>
-                <a:schemeClr val="lt1"/>
-              </a:buClr>
-              <a:buSzPts val="900"/>
-              <a:buFont typeface="Arial"/>
-              <a:buNone/>
-              <a:defRPr sz="900"/>
-            </a:lvl8pPr>
-            <a:lvl9pPr marL="4114800" lvl="8" indent="-228600" algn="l">
-              <a:lnSpc>
-                <a:spcPct val="95000"/>
-              </a:lnSpc>
-              <a:spcBef>
-                <a:spcPts val="0"/>
-              </a:spcBef>
-              <a:spcAft>
-                <a:spcPts val="0"/>
-              </a:spcAft>
-              <a:buClr>
-                <a:schemeClr val="lt1"/>
-              </a:buClr>
-              <a:buSzPts val="900"/>
-              <a:buFont typeface="Arial"/>
-              <a:buNone/>
-              <a:defRPr sz="900"/>
-            </a:lvl9pPr>
-          </a:lstStyle>
-          <a:p>
-            <a:endParaRPr/>
-          </a:p>
-        </p:txBody>
-      </p:sp>
-      <p:sp>
-        <p:nvSpPr>
-          <p:cNvPr id="339" name="Google Shape;339;p31"/>
-          <p:cNvSpPr txBox="1">
-            <a:spLocks noGrp="1"/>
-          </p:cNvSpPr>
-          <p:nvPr>
-            <p:ph type="dt" idx="10"/>
-          </p:nvPr>
-        </p:nvSpPr>
-        <p:spPr>
-          <a:xfrm>
-            <a:off x="410766" y="4972050"/>
-            <a:ext cx="617934" cy="171450"/>
-          </a:xfrm>
-          <a:prstGeom prst="rect">
-            <a:avLst/>
-          </a:prstGeom>
-          <a:noFill/>
-          <a:ln>
-            <a:noFill/>
-          </a:ln>
-        </p:spPr>
-        <p:txBody>
-          <a:bodyPr spcFirstLastPara="1" wrap="square" lIns="0" tIns="45700" rIns="0" bIns="45700" anchor="b" anchorCtr="0">
-            <a:noAutofit/>
-          </a:bodyPr>
-          <a:lstStyle>
-            <a:lvl1pPr lvl="0" algn="l">
-              <a:spcBef>
-                <a:spcPts val="0"/>
-              </a:spcBef>
-              <a:spcAft>
-                <a:spcPts val="0"/>
-              </a:spcAft>
-              <a:buSzPts val="1400"/>
-              <a:buNone/>
-              <a:defRPr/>
-            </a:lvl1pPr>
-            <a:lvl2pPr lvl="1" algn="l">
-              <a:spcBef>
-                <a:spcPts val="0"/>
-              </a:spcBef>
-              <a:spcAft>
-                <a:spcPts val="0"/>
-              </a:spcAft>
-              <a:buSzPts val="1400"/>
-              <a:buNone/>
-              <a:defRPr/>
-            </a:lvl2pPr>
-            <a:lvl3pPr lvl="2" algn="l">
-              <a:spcBef>
-                <a:spcPts val="0"/>
-              </a:spcBef>
-              <a:spcAft>
-                <a:spcPts val="0"/>
-              </a:spcAft>
-              <a:buSzPts val="1400"/>
-              <a:buNone/>
-              <a:defRPr/>
-            </a:lvl3pPr>
-            <a:lvl4pPr lvl="3" algn="l">
-              <a:spcBef>
-                <a:spcPts val="0"/>
-              </a:spcBef>
-              <a:spcAft>
-                <a:spcPts val="0"/>
-              </a:spcAft>
-              <a:buSzPts val="1400"/>
-              <a:buNone/>
-              <a:defRPr/>
-            </a:lvl4pPr>
-            <a:lvl5pPr lvl="4" algn="l">
-              <a:spcBef>
-                <a:spcPts val="0"/>
-              </a:spcBef>
-              <a:spcAft>
-                <a:spcPts val="0"/>
-              </a:spcAft>
-              <a:buSzPts val="1400"/>
-              <a:buNone/>
-              <a:defRPr/>
-            </a:lvl5pPr>
-            <a:lvl6pPr lvl="5" algn="l">
-              <a:spcBef>
-                <a:spcPts val="0"/>
-              </a:spcBef>
-              <a:spcAft>
-                <a:spcPts val="0"/>
-              </a:spcAft>
-              <a:buSzPts val="1400"/>
-              <a:buNone/>
-              <a:defRPr/>
-            </a:lvl6pPr>
-            <a:lvl7pPr lvl="6" algn="l">
-              <a:spcBef>
-                <a:spcPts val="0"/>
-              </a:spcBef>
-              <a:spcAft>
-                <a:spcPts val="0"/>
-              </a:spcAft>
-              <a:buSzPts val="1400"/>
-              <a:buNone/>
-              <a:defRPr/>
-            </a:lvl7pPr>
-            <a:lvl8pPr lvl="7" algn="l">
-              <a:spcBef>
-                <a:spcPts val="0"/>
-              </a:spcBef>
-              <a:spcAft>
-                <a:spcPts val="0"/>
-              </a:spcAft>
-              <a:buSzPts val="1400"/>
-              <a:buNone/>
-              <a:defRPr/>
-            </a:lvl8pPr>
-            <a:lvl9pPr lvl="8" algn="l">
-              <a:spcBef>
-                <a:spcPts val="0"/>
-              </a:spcBef>
-              <a:spcAft>
-                <a:spcPts val="0"/>
-              </a:spcAft>
-              <a:buSzPts val="1400"/>
-              <a:buNone/>
-              <a:defRPr/>
-            </a:lvl9pPr>
-          </a:lstStyle>
-          <a:p>
-            <a:endParaRPr/>
-          </a:p>
-        </p:txBody>
-      </p:sp>
-      <p:sp>
-        <p:nvSpPr>
-          <p:cNvPr id="340" name="Google Shape;340;p31"/>
-          <p:cNvSpPr txBox="1">
-            <a:spLocks noGrp="1"/>
-          </p:cNvSpPr>
-          <p:nvPr>
-            <p:ph type="sldNum" idx="12"/>
-          </p:nvPr>
-        </p:nvSpPr>
-        <p:spPr>
-          <a:xfrm>
-            <a:off x="8408037" y="4972050"/>
-            <a:ext cx="331501" cy="171450"/>
-          </a:xfrm>
-          <a:prstGeom prst="rect">
-            <a:avLst/>
-          </a:prstGeom>
-          <a:noFill/>
-          <a:ln>
-            <a:noFill/>
-          </a:ln>
-        </p:spPr>
-        <p:txBody>
-          <a:bodyPr spcFirstLastPara="1" wrap="square" lIns="0" tIns="45700" rIns="0" bIns="45700" anchor="b" anchorCtr="0">
-            <a:noAutofit/>
-          </a:bodyPr>
-          <a:lstStyle>
-            <a:lvl1pPr marL="0" lvl="0" indent="0" algn="r">
-              <a:spcBef>
-                <a:spcPts val="0"/>
-              </a:spcBef>
-              <a:spcAft>
-                <a:spcPts val="0"/>
-              </a:spcAft>
-              <a:buClr>
-                <a:schemeClr val="lt1"/>
-              </a:buClr>
-              <a:buSzPts val="500"/>
-              <a:buFont typeface="Arial"/>
-              <a:buNone/>
-              <a:defRPr/>
-            </a:lvl1pPr>
-            <a:lvl2pPr marL="0" lvl="1" indent="0" algn="r">
-              <a:spcBef>
-                <a:spcPts val="0"/>
-              </a:spcBef>
-              <a:spcAft>
-                <a:spcPts val="0"/>
-              </a:spcAft>
-              <a:buClr>
-                <a:schemeClr val="lt1"/>
-              </a:buClr>
-              <a:buSzPts val="500"/>
-              <a:buFont typeface="Arial"/>
-              <a:buNone/>
-              <a:defRPr/>
-            </a:lvl2pPr>
-            <a:lvl3pPr marL="0" lvl="2" indent="0" algn="r">
-              <a:spcBef>
-                <a:spcPts val="0"/>
-              </a:spcBef>
-              <a:spcAft>
-                <a:spcPts val="0"/>
-              </a:spcAft>
-              <a:buClr>
-                <a:schemeClr val="lt1"/>
-              </a:buClr>
-              <a:buSzPts val="500"/>
-              <a:buFont typeface="Arial"/>
-              <a:buNone/>
-              <a:defRPr/>
-            </a:lvl3pPr>
-            <a:lvl4pPr marL="0" lvl="3" indent="0" algn="r">
-              <a:spcBef>
-                <a:spcPts val="0"/>
-              </a:spcBef>
-              <a:spcAft>
-                <a:spcPts val="0"/>
-              </a:spcAft>
-              <a:buClr>
-                <a:schemeClr val="lt1"/>
-              </a:buClr>
-              <a:buSzPts val="500"/>
-              <a:buFont typeface="Arial"/>
-              <a:buNone/>
-              <a:defRPr/>
-            </a:lvl4pPr>
-            <a:lvl5pPr marL="0" lvl="4" indent="0" algn="r">
-              <a:spcBef>
-                <a:spcPts val="0"/>
-              </a:spcBef>
-              <a:spcAft>
-                <a:spcPts val="0"/>
-              </a:spcAft>
-              <a:buClr>
-                <a:schemeClr val="lt1"/>
-              </a:buClr>
-              <a:buSzPts val="500"/>
-              <a:buFont typeface="Arial"/>
-              <a:buNone/>
-              <a:defRPr/>
-            </a:lvl5pPr>
-            <a:lvl6pPr marL="0" lvl="5" indent="0" algn="r">
-              <a:spcBef>
-                <a:spcPts val="0"/>
-              </a:spcBef>
-              <a:spcAft>
-                <a:spcPts val="0"/>
-              </a:spcAft>
-              <a:buClr>
-                <a:schemeClr val="lt1"/>
-              </a:buClr>
-              <a:buSzPts val="500"/>
-              <a:buFont typeface="Arial"/>
-              <a:buNone/>
-              <a:defRPr/>
-            </a:lvl6pPr>
-            <a:lvl7pPr marL="0" lvl="6" indent="0" algn="r">
-              <a:spcBef>
-                <a:spcPts val="0"/>
-              </a:spcBef>
-              <a:spcAft>
-                <a:spcPts val="0"/>
-              </a:spcAft>
-              <a:buClr>
-                <a:schemeClr val="lt1"/>
-              </a:buClr>
-              <a:buSzPts val="500"/>
-              <a:buFont typeface="Arial"/>
-              <a:buNone/>
-              <a:defRPr/>
-            </a:lvl7pPr>
-            <a:lvl8pPr marL="0" lvl="7" indent="0" algn="r">
-              <a:spcBef>
-                <a:spcPts val="0"/>
-              </a:spcBef>
-              <a:spcAft>
-                <a:spcPts val="0"/>
-              </a:spcAft>
-              <a:buClr>
-                <a:schemeClr val="lt1"/>
-              </a:buClr>
-              <a:buSzPts val="500"/>
-              <a:buFont typeface="Arial"/>
-              <a:buNone/>
-              <a:defRPr/>
-            </a:lvl8pPr>
-            <a:lvl9pPr marL="0" lvl="8" indent="0" algn="r">
-              <a:spcBef>
-                <a:spcPts val="0"/>
-              </a:spcBef>
-              <a:spcAft>
-                <a:spcPts val="0"/>
-              </a:spcAft>
-              <a:buClr>
-                <a:schemeClr val="lt1"/>
-              </a:buClr>
-              <a:buSzPts val="500"/>
-              <a:buFont typeface="Arial"/>
-              <a:buNone/>
-              <a:defRPr/>
-            </a:lvl9pPr>
-          </a:lstStyle>
-          <a:p>
-            <a:pPr marL="0" lvl="0" indent="0" algn="r" rtl="0">
-              <a:spcBef>
-                <a:spcPts val="0"/>
-              </a:spcBef>
-              <a:spcAft>
-                <a:spcPts val="0"/>
-              </a:spcAft>
-              <a:buNone/>
-            </a:pPr>
-            <a:fld id="{00000000-1234-1234-1234-123412341234}" type="slidenum">
-              <a:rPr lang="en"/>
-              <a:t>‹#›</a:t>
-            </a:fld>
-            <a:endParaRPr/>
-          </a:p>
-        </p:txBody>
-      </p:sp>
-      <p:pic>
-        <p:nvPicPr>
-          <p:cNvPr id="341" name="Google Shape;341;p31"/>
-          <p:cNvPicPr preferRelativeResize="0"/>
-          <p:nvPr/>
-        </p:nvPicPr>
-        <p:blipFill rotWithShape="1">
-          <a:blip r:embed="rId2">
-            <a:alphaModFix/>
-          </a:blip>
-          <a:srcRect/>
-          <a:stretch/>
-        </p:blipFill>
-        <p:spPr>
-          <a:xfrm>
-            <a:off x="7503462" y="308372"/>
-            <a:ext cx="1222280" cy="358517"/>
-          </a:xfrm>
-          <a:prstGeom prst="rect">
-            <a:avLst/>
-          </a:prstGeom>
-          <a:noFill/>
-          <a:ln>
-            <a:noFill/>
-          </a:ln>
-        </p:spPr>
-      </p:pic>
-    </p:spTree>
-  </p:cSld>
-  <p:clrMapOvr>
-    <a:masterClrMapping/>
-  </p:clrMapOvr>
-</p:sldLayout>
-</file>
-
-<file path=ppt/slideLayouts/slideLayout31.xml><?xml version="1.0" encoding="utf-8"?>
 <p:sldLayout xmlns:a="http://schemas.openxmlformats.org/drawingml/2006/main" xmlns:r="http://schemas.openxmlformats.org/officeDocument/2006/relationships" xmlns:p="http://schemas.openxmlformats.org/presentationml/2006/main" showMasterSp="0" matchingName="Logo">
   <p:cSld name="Logo">
     <p:bg>
@@ -34608,7 +32678,7 @@
 </p:sldLayout>
 </file>
 
-<file path=ppt/slideLayouts/slideLayout32.xml><?xml version="1.0" encoding="utf-8"?>
+<file path=ppt/slideLayouts/slideLayout31.xml><?xml version="1.0" encoding="utf-8"?>
 <p:sldLayout xmlns:a="http://schemas.openxmlformats.org/drawingml/2006/main" xmlns:r="http://schemas.openxmlformats.org/officeDocument/2006/relationships" xmlns:p="http://schemas.openxmlformats.org/presentationml/2006/main" matchingName="Section header" type="secHead">
   <p:cSld name="SECTION_HEADER">
     <p:bg>
@@ -35086,7 +33156,7 @@
 </p:sldLayout>
 </file>
 
-<file path=ppt/slideLayouts/slideLayout33.xml><?xml version="1.0" encoding="utf-8"?>
+<file path=ppt/slideLayouts/slideLayout32.xml><?xml version="1.0" encoding="utf-8"?>
 <p:sldLayout xmlns:a="http://schemas.openxmlformats.org/drawingml/2006/main" xmlns:r="http://schemas.openxmlformats.org/officeDocument/2006/relationships" xmlns:p="http://schemas.openxmlformats.org/presentationml/2006/main" matchingName="Title only" type="titleOnly">
   <p:cSld name="TITLE_ONLY">
     <p:spTree>
@@ -35616,7 +33686,7 @@
 </p:sldLayout>
 </file>
 
-<file path=ppt/slideLayouts/slideLayout34.xml><?xml version="1.0" encoding="utf-8"?>
+<file path=ppt/slideLayouts/slideLayout33.xml><?xml version="1.0" encoding="utf-8"?>
 <p:sldLayout xmlns:a="http://schemas.openxmlformats.org/drawingml/2006/main" xmlns:r="http://schemas.openxmlformats.org/officeDocument/2006/relationships" xmlns:p="http://schemas.openxmlformats.org/presentationml/2006/main" matchingName="Title and body" type="tx">
   <p:cSld name="TITLE_AND_BODY">
     <p:spTree>
@@ -36333,7 +34403,7 @@
 </p:sldLayout>
 </file>
 
-<file path=ppt/slideLayouts/slideLayout35.xml><?xml version="1.0" encoding="utf-8"?>
+<file path=ppt/slideLayouts/slideLayout34.xml><?xml version="1.0" encoding="utf-8"?>
 <p:sldLayout xmlns:a="http://schemas.openxmlformats.org/drawingml/2006/main" xmlns:r="http://schemas.openxmlformats.org/officeDocument/2006/relationships" xmlns:p="http://schemas.openxmlformats.org/presentationml/2006/main" matchingName="Blank" type="blank">
   <p:cSld name="BLANK">
     <p:spTree>
@@ -45334,7 +43404,7 @@
           <p:nvPr/>
         </p:nvPicPr>
         <p:blipFill rotWithShape="1">
-          <a:blip r:embed="rId37">
+          <a:blip r:embed="rId36">
             <a:alphaModFix/>
           </a:blip>
           <a:srcRect l="26274" t="67"/>
@@ -46336,7 +44406,7 @@
           <p:nvPr/>
         </p:nvPicPr>
         <p:blipFill rotWithShape="1">
-          <a:blip r:embed="rId38">
+          <a:blip r:embed="rId37">
             <a:alphaModFix/>
           </a:blip>
           <a:srcRect/>
@@ -46379,22 +44449,21 @@
     <p:sldLayoutId id="2147483664" r:id="rId17"/>
     <p:sldLayoutId id="2147483665" r:id="rId18"/>
     <p:sldLayoutId id="2147483666" r:id="rId19"/>
-    <p:sldLayoutId id="2147483667" r:id="rId20"/>
-    <p:sldLayoutId id="2147483668" r:id="rId21"/>
-    <p:sldLayoutId id="2147483669" r:id="rId22"/>
-    <p:sldLayoutId id="2147483670" r:id="rId23"/>
-    <p:sldLayoutId id="2147483671" r:id="rId24"/>
-    <p:sldLayoutId id="2147483672" r:id="rId25"/>
-    <p:sldLayoutId id="2147483673" r:id="rId26"/>
-    <p:sldLayoutId id="2147483674" r:id="rId27"/>
-    <p:sldLayoutId id="2147483675" r:id="rId28"/>
-    <p:sldLayoutId id="2147483676" r:id="rId29"/>
-    <p:sldLayoutId id="2147483677" r:id="rId30"/>
-    <p:sldLayoutId id="2147483678" r:id="rId31"/>
-    <p:sldLayoutId id="2147483679" r:id="rId32"/>
-    <p:sldLayoutId id="2147483680" r:id="rId33"/>
-    <p:sldLayoutId id="2147483681" r:id="rId34"/>
-    <p:sldLayoutId id="2147483682" r:id="rId35"/>
+    <p:sldLayoutId id="2147483668" r:id="rId20"/>
+    <p:sldLayoutId id="2147483669" r:id="rId21"/>
+    <p:sldLayoutId id="2147483670" r:id="rId22"/>
+    <p:sldLayoutId id="2147483671" r:id="rId23"/>
+    <p:sldLayoutId id="2147483672" r:id="rId24"/>
+    <p:sldLayoutId id="2147483673" r:id="rId25"/>
+    <p:sldLayoutId id="2147483674" r:id="rId26"/>
+    <p:sldLayoutId id="2147483675" r:id="rId27"/>
+    <p:sldLayoutId id="2147483676" r:id="rId28"/>
+    <p:sldLayoutId id="2147483677" r:id="rId29"/>
+    <p:sldLayoutId id="2147483678" r:id="rId30"/>
+    <p:sldLayoutId id="2147483679" r:id="rId31"/>
+    <p:sldLayoutId id="2147483680" r:id="rId32"/>
+    <p:sldLayoutId id="2147483681" r:id="rId33"/>
+    <p:sldLayoutId id="2147483682" r:id="rId34"/>
   </p:sldLayoutIdLst>
   <p:hf sldNum="0" hdr="0" ftr="0" dt="0"/>
   <p:txStyles>
@@ -49488,7 +47557,13 @@
   <p:cSld>
     <p:spTree>
       <p:nvGrpSpPr>
-        <p:cNvPr id="1" name="Shape 470"/>
+        <p:cNvPr id="1" name="">
+          <a:extLst>
+            <a:ext uri="{FF2B5EF4-FFF2-40B4-BE49-F238E27FC236}">
+              <a16:creationId xmlns:a16="http://schemas.microsoft.com/office/drawing/2014/main" id="{40DF07C9-1A41-F073-AC02-D1B040B56504}"/>
+            </a:ext>
+          </a:extLst>
+        </p:cNvPr>
         <p:cNvGrpSpPr/>
         <p:nvPr/>
       </p:nvGrpSpPr>
@@ -49502,3434 +47577,10 @@
       </p:grpSpPr>
       <p:sp>
         <p:nvSpPr>
-          <p:cNvPr id="471" name="Google Shape;471;p55"/>
-          <p:cNvSpPr txBox="1">
-            <a:spLocks noGrp="1"/>
-          </p:cNvSpPr>
-          <p:nvPr>
-            <p:ph type="title"/>
-          </p:nvPr>
-        </p:nvSpPr>
-        <p:spPr>
-          <a:xfrm>
-            <a:off x="411480" y="308611"/>
-            <a:ext cx="6173470" cy="891778"/>
-          </a:xfrm>
-          <a:noFill/>
-          <a:ln>
-            <a:noFill/>
-          </a:ln>
-        </p:spPr>
-        <p:txBody>
-          <a:bodyPr spcFirstLastPara="1" wrap="square" lIns="91425" tIns="91425" rIns="91425" bIns="91425" anchor="t" anchorCtr="0">
-            <a:normAutofit/>
-          </a:bodyPr>
-          <a:lstStyle/>
-          <a:p>
-            <a:pPr lvl="0"/>
-            <a:r>
-              <a:rPr lang="en-US"/>
-              <a:t>PYTHON ERRORS</a:t>
-            </a:r>
-          </a:p>
-        </p:txBody>
-      </p:sp>
-      <p:sp>
-        <p:nvSpPr>
-          <p:cNvPr id="3" name="Text Placeholder 2">
-            <a:extLst>
-              <a:ext uri="{FF2B5EF4-FFF2-40B4-BE49-F238E27FC236}">
-                <a16:creationId xmlns:a16="http://schemas.microsoft.com/office/drawing/2014/main" id="{3F7E1484-2479-D5C8-C114-A85D1147D8B2}"/>
-              </a:ext>
-            </a:extLst>
-          </p:cNvPr>
-          <p:cNvSpPr>
-            <a:spLocks noGrp="1"/>
-          </p:cNvSpPr>
-          <p:nvPr>
-            <p:ph type="body" idx="1"/>
-          </p:nvPr>
-        </p:nvSpPr>
-        <p:spPr/>
-        <p:txBody>
-          <a:bodyPr/>
-          <a:lstStyle/>
-          <a:p>
-            <a:endParaRPr lang="en-US"/>
-          </a:p>
-        </p:txBody>
-      </p:sp>
-      <p:sp>
-        <p:nvSpPr>
-          <p:cNvPr id="472" name="Google Shape;472;p55"/>
-          <p:cNvSpPr txBox="1"/>
-          <p:nvPr/>
-        </p:nvSpPr>
-        <p:spPr>
-          <a:xfrm>
-            <a:off x="616150" y="1580550"/>
-            <a:ext cx="7647000" cy="3241500"/>
-          </a:xfrm>
-          <a:prstGeom prst="rect">
-            <a:avLst/>
-          </a:prstGeom>
-          <a:noFill/>
-          <a:ln>
-            <a:noFill/>
-          </a:ln>
-        </p:spPr>
-        <p:txBody>
-          <a:bodyPr spcFirstLastPara="1" wrap="square" lIns="91425" tIns="91425" rIns="91425" bIns="91425" anchor="t" anchorCtr="0">
-            <a:noAutofit/>
-          </a:bodyPr>
-          <a:lstStyle/>
-          <a:p>
-            <a:pPr marL="457200" marR="0" lvl="0" indent="-342900" algn="l" rtl="0">
-              <a:lnSpc>
-                <a:spcPct val="100000"/>
-              </a:lnSpc>
-              <a:spcBef>
-                <a:spcPts val="0"/>
-              </a:spcBef>
-              <a:spcAft>
-                <a:spcPts val="0"/>
-              </a:spcAft>
-              <a:buClr>
-                <a:schemeClr val="dk2"/>
-              </a:buClr>
-              <a:buSzPts val="1800"/>
-              <a:buFont typeface="Roboto"/>
-              <a:buChar char="●"/>
-            </a:pPr>
-            <a:r>
-              <a:rPr lang="en" sz="1800" b="0" i="0" u="none" strike="noStrike" cap="none">
-                <a:solidFill>
-                  <a:schemeClr val="lt1"/>
-                </a:solidFill>
-                <a:latin typeface="Roboto"/>
-                <a:ea typeface="Roboto"/>
-                <a:cs typeface="Roboto"/>
-                <a:sym typeface="Roboto"/>
-              </a:rPr>
-              <a:t>Errors are issues in a program that prevent it from running as expected</a:t>
-            </a:r>
-            <a:endParaRPr sz="1800" b="0" i="0" u="none" strike="noStrike" cap="none">
-              <a:solidFill>
-                <a:schemeClr val="lt1"/>
-              </a:solidFill>
-              <a:latin typeface="Roboto"/>
-              <a:ea typeface="Roboto"/>
-              <a:cs typeface="Roboto"/>
-              <a:sym typeface="Roboto"/>
-            </a:endParaRPr>
-          </a:p>
-          <a:p>
-            <a:pPr marL="457200" marR="0" lvl="0" indent="-342900" algn="l" rtl="0">
-              <a:lnSpc>
-                <a:spcPct val="100000"/>
-              </a:lnSpc>
-              <a:spcBef>
-                <a:spcPts val="0"/>
-              </a:spcBef>
-              <a:spcAft>
-                <a:spcPts val="0"/>
-              </a:spcAft>
-              <a:buClr>
-                <a:schemeClr val="dk2"/>
-              </a:buClr>
-              <a:buSzPts val="1800"/>
-              <a:buFont typeface="Roboto"/>
-              <a:buChar char="●"/>
-            </a:pPr>
-            <a:r>
-              <a:rPr lang="en" sz="1800" b="0" i="0" u="none" strike="noStrike" cap="none">
-                <a:solidFill>
-                  <a:schemeClr val="lt1"/>
-                </a:solidFill>
-                <a:latin typeface="Roboto"/>
-                <a:ea typeface="Roboto"/>
-                <a:cs typeface="Roboto"/>
-                <a:sym typeface="Roboto"/>
-              </a:rPr>
-              <a:t>They help programmers find and fix mistakes</a:t>
-            </a:r>
-            <a:endParaRPr sz="1800" b="0" i="0" u="none" strike="noStrike" cap="none">
-              <a:solidFill>
-                <a:schemeClr val="lt1"/>
-              </a:solidFill>
-              <a:latin typeface="Roboto"/>
-              <a:ea typeface="Roboto"/>
-              <a:cs typeface="Roboto"/>
-              <a:sym typeface="Roboto"/>
-            </a:endParaRPr>
-          </a:p>
-          <a:p>
-            <a:pPr marL="457200" marR="0" lvl="0" indent="-342900" algn="l" rtl="0">
-              <a:lnSpc>
-                <a:spcPct val="100000"/>
-              </a:lnSpc>
-              <a:spcBef>
-                <a:spcPts val="0"/>
-              </a:spcBef>
-              <a:spcAft>
-                <a:spcPts val="0"/>
-              </a:spcAft>
-              <a:buClr>
-                <a:schemeClr val="dk2"/>
-              </a:buClr>
-              <a:buSzPts val="1800"/>
-              <a:buFont typeface="Roboto"/>
-              <a:buChar char="●"/>
-            </a:pPr>
-            <a:r>
-              <a:rPr lang="en" sz="1800" b="0" i="0" u="none" strike="noStrike" cap="none">
-                <a:solidFill>
-                  <a:schemeClr val="lt1"/>
-                </a:solidFill>
-                <a:latin typeface="Roboto"/>
-                <a:ea typeface="Roboto"/>
-                <a:cs typeface="Roboto"/>
-                <a:sym typeface="Roboto"/>
-              </a:rPr>
-              <a:t>Why learn errors?</a:t>
-            </a:r>
-            <a:endParaRPr sz="1800" b="0" i="0" u="none" strike="noStrike" cap="none">
-              <a:solidFill>
-                <a:schemeClr val="lt1"/>
-              </a:solidFill>
-              <a:latin typeface="Roboto"/>
-              <a:ea typeface="Roboto"/>
-              <a:cs typeface="Roboto"/>
-              <a:sym typeface="Roboto"/>
-            </a:endParaRPr>
-          </a:p>
-          <a:p>
-            <a:pPr marL="914400" marR="0" lvl="1" indent="-342900" algn="l" rtl="0">
-              <a:lnSpc>
-                <a:spcPct val="100000"/>
-              </a:lnSpc>
-              <a:spcBef>
-                <a:spcPts val="0"/>
-              </a:spcBef>
-              <a:spcAft>
-                <a:spcPts val="0"/>
-              </a:spcAft>
-              <a:buClr>
-                <a:schemeClr val="dk2"/>
-              </a:buClr>
-              <a:buSzPts val="1800"/>
-              <a:buFont typeface="Roboto"/>
-              <a:buChar char="○"/>
-            </a:pPr>
-            <a:r>
-              <a:rPr lang="en" sz="1800" b="0" i="0" u="none" strike="noStrike" cap="none">
-                <a:solidFill>
-                  <a:schemeClr val="lt1"/>
-                </a:solidFill>
-                <a:latin typeface="Roboto"/>
-                <a:ea typeface="Roboto"/>
-                <a:cs typeface="Roboto"/>
-                <a:sym typeface="Roboto"/>
-              </a:rPr>
-              <a:t>Errors help you debug</a:t>
-            </a:r>
-            <a:endParaRPr sz="1800" b="0" i="0" u="none" strike="noStrike" cap="none">
-              <a:solidFill>
-                <a:schemeClr val="lt1"/>
-              </a:solidFill>
-              <a:latin typeface="Roboto"/>
-              <a:ea typeface="Roboto"/>
-              <a:cs typeface="Roboto"/>
-              <a:sym typeface="Roboto"/>
-            </a:endParaRPr>
-          </a:p>
-          <a:p>
-            <a:pPr marL="914400" marR="0" lvl="1" indent="-342900" algn="l" rtl="0">
-              <a:lnSpc>
-                <a:spcPct val="100000"/>
-              </a:lnSpc>
-              <a:spcBef>
-                <a:spcPts val="0"/>
-              </a:spcBef>
-              <a:spcAft>
-                <a:spcPts val="0"/>
-              </a:spcAft>
-              <a:buClr>
-                <a:schemeClr val="dk2"/>
-              </a:buClr>
-              <a:buSzPts val="1800"/>
-              <a:buFont typeface="Roboto"/>
-              <a:buChar char="○"/>
-            </a:pPr>
-            <a:r>
-              <a:rPr lang="en" sz="1800" b="0" i="0" u="none" strike="noStrike" cap="none">
-                <a:solidFill>
-                  <a:schemeClr val="lt1"/>
-                </a:solidFill>
-                <a:latin typeface="Roboto"/>
-                <a:ea typeface="Roboto"/>
-                <a:cs typeface="Roboto"/>
-                <a:sym typeface="Roboto"/>
-              </a:rPr>
-              <a:t>Knowing common errors makes writing and fixing code faster</a:t>
-            </a:r>
-            <a:endParaRPr sz="1800" b="0" i="0" u="none" strike="noStrike" cap="none">
-              <a:solidFill>
-                <a:schemeClr val="lt1"/>
-              </a:solidFill>
-              <a:latin typeface="Roboto"/>
-              <a:ea typeface="Roboto"/>
-              <a:cs typeface="Roboto"/>
-              <a:sym typeface="Roboto"/>
-            </a:endParaRPr>
-          </a:p>
-          <a:p>
-            <a:pPr marL="914400" marR="0" lvl="1" indent="-342900" algn="l" rtl="0">
-              <a:lnSpc>
-                <a:spcPct val="100000"/>
-              </a:lnSpc>
-              <a:spcBef>
-                <a:spcPts val="0"/>
-              </a:spcBef>
-              <a:spcAft>
-                <a:spcPts val="0"/>
-              </a:spcAft>
-              <a:buClr>
-                <a:schemeClr val="dk2"/>
-              </a:buClr>
-              <a:buSzPts val="1800"/>
-              <a:buFont typeface="Roboto"/>
-              <a:buChar char="○"/>
-            </a:pPr>
-            <a:r>
-              <a:rPr lang="en" sz="1800" b="0" i="0" u="none" strike="noStrike" cap="none">
-                <a:solidFill>
-                  <a:schemeClr val="lt1"/>
-                </a:solidFill>
-                <a:latin typeface="Roboto"/>
-                <a:ea typeface="Roboto"/>
-                <a:cs typeface="Roboto"/>
-                <a:sym typeface="Roboto"/>
-              </a:rPr>
-              <a:t>Good programs handle errors gracefully</a:t>
-            </a:r>
-            <a:endParaRPr sz="1800" b="0" i="0" u="none" strike="noStrike" cap="none">
-              <a:solidFill>
-                <a:schemeClr val="lt1"/>
-              </a:solidFill>
-              <a:latin typeface="Roboto"/>
-              <a:ea typeface="Roboto"/>
-              <a:cs typeface="Roboto"/>
-              <a:sym typeface="Roboto"/>
-            </a:endParaRPr>
-          </a:p>
-        </p:txBody>
-      </p:sp>
-    </p:spTree>
-  </p:cSld>
-  <p:clrMapOvr>
-    <a:masterClrMapping/>
-  </p:clrMapOvr>
-</p:sld>
-</file>
-
-<file path=ppt/slides/slide22.xml><?xml version="1.0" encoding="utf-8"?>
-<p:sld xmlns:a="http://schemas.openxmlformats.org/drawingml/2006/main" xmlns:r="http://schemas.openxmlformats.org/officeDocument/2006/relationships" xmlns:p="http://schemas.openxmlformats.org/presentationml/2006/main" show="0">
-  <p:cSld>
-    <p:spTree>
-      <p:nvGrpSpPr>
-        <p:cNvPr id="1" name="Shape 476"/>
-        <p:cNvGrpSpPr/>
-        <p:nvPr/>
-      </p:nvGrpSpPr>
-      <p:grpSpPr>
-        <a:xfrm>
-          <a:off x="0" y="0"/>
-          <a:ext cx="0" cy="0"/>
-          <a:chOff x="0" y="0"/>
-          <a:chExt cx="0" cy="0"/>
-        </a:xfrm>
-      </p:grpSpPr>
-      <p:sp>
-        <p:nvSpPr>
-          <p:cNvPr id="477" name="Google Shape;477;p56"/>
-          <p:cNvSpPr txBox="1">
-            <a:spLocks noGrp="1"/>
-          </p:cNvSpPr>
-          <p:nvPr>
-            <p:ph type="title"/>
-          </p:nvPr>
-        </p:nvSpPr>
-        <p:spPr>
-          <a:xfrm>
-            <a:off x="411480" y="308611"/>
-            <a:ext cx="6173470" cy="891778"/>
-          </a:xfrm>
-          <a:noFill/>
-          <a:ln>
-            <a:noFill/>
-          </a:ln>
-        </p:spPr>
-        <p:txBody>
-          <a:bodyPr spcFirstLastPara="1" wrap="square" lIns="91425" tIns="91425" rIns="91425" bIns="91425" anchor="t" anchorCtr="0">
-            <a:normAutofit/>
-          </a:bodyPr>
-          <a:lstStyle/>
-          <a:p>
-            <a:pPr lvl="0"/>
-            <a:r>
-              <a:rPr lang="en-US"/>
-              <a:t>EXERCISE - PYTHON ERRORS</a:t>
-            </a:r>
-          </a:p>
-        </p:txBody>
-      </p:sp>
-      <p:sp>
-        <p:nvSpPr>
-          <p:cNvPr id="478" name="Google Shape;478;p56"/>
-          <p:cNvSpPr txBox="1">
-            <a:spLocks noGrp="1"/>
-          </p:cNvSpPr>
-          <p:nvPr>
-            <p:ph type="body" idx="1"/>
-          </p:nvPr>
-        </p:nvSpPr>
-        <p:spPr>
-          <a:xfrm>
-            <a:off x="411480" y="1611630"/>
-            <a:ext cx="5096351" cy="3017520"/>
-          </a:xfrm>
-          <a:noFill/>
-          <a:ln>
-            <a:noFill/>
-          </a:ln>
-        </p:spPr>
-        <p:txBody>
-          <a:bodyPr spcFirstLastPara="1" wrap="square" lIns="91425" tIns="91425" rIns="91425" bIns="91425" anchor="t" anchorCtr="0">
-            <a:normAutofit fontScale="77500" lnSpcReduction="20000"/>
-          </a:bodyPr>
-          <a:lstStyle/>
-          <a:p>
-            <a:pPr lvl="0"/>
-            <a:r>
-              <a:rPr lang="en-US"/>
-              <a:t>5 minutes</a:t>
-            </a:r>
-          </a:p>
-          <a:p>
-            <a:pPr lvl="0"/>
-            <a:endParaRPr lang="en-US"/>
-          </a:p>
-          <a:p>
-            <a:pPr lvl="0"/>
-            <a:r>
-              <a:rPr lang="en-US"/>
-              <a:t>Groups of 2-3</a:t>
-            </a:r>
-          </a:p>
-          <a:p>
-            <a:pPr lvl="0"/>
-            <a:r>
-              <a:rPr lang="en-US"/>
-              <a:t>Research each python error and demonstrate an example case of when this error will be raised</a:t>
-            </a:r>
-          </a:p>
-          <a:p>
-            <a:pPr lvl="0"/>
-            <a:r>
-              <a:rPr lang="en-US"/>
-              <a:t>SyntaxError</a:t>
-            </a:r>
-          </a:p>
-          <a:p>
-            <a:pPr lvl="0"/>
-            <a:r>
-              <a:rPr lang="en-US"/>
-              <a:t>IndentationError</a:t>
-            </a:r>
-          </a:p>
-          <a:p>
-            <a:pPr lvl="0"/>
-            <a:r>
-              <a:rPr lang="en-US"/>
-              <a:t>TypeError </a:t>
-            </a:r>
-          </a:p>
-          <a:p>
-            <a:pPr lvl="0"/>
-            <a:r>
-              <a:rPr lang="en-US"/>
-              <a:t>ValueError</a:t>
-            </a:r>
-          </a:p>
-          <a:p>
-            <a:pPr lvl="0"/>
-            <a:r>
-              <a:rPr lang="en-US"/>
-              <a:t>ZeroDivisionError</a:t>
-            </a:r>
-          </a:p>
-          <a:p>
-            <a:pPr lvl="0"/>
-            <a:r>
-              <a:rPr lang="en-US"/>
-              <a:t>IndexError</a:t>
-            </a:r>
-          </a:p>
-          <a:p>
-            <a:pPr lvl="0"/>
-            <a:r>
-              <a:rPr lang="en-US"/>
-              <a:t>KeyError</a:t>
-            </a:r>
-          </a:p>
-          <a:p>
-            <a:pPr lvl="0"/>
-            <a:r>
-              <a:rPr lang="en-US"/>
-              <a:t>AttributeError</a:t>
-            </a:r>
-          </a:p>
-          <a:p>
-            <a:pPr lvl="0"/>
-            <a:r>
-              <a:rPr lang="en-US"/>
-              <a:t>FileNotFoundError</a:t>
-            </a:r>
-          </a:p>
-          <a:p>
-            <a:pPr lvl="0"/>
-            <a:r>
-              <a:rPr lang="en-US"/>
-              <a:t>ImportError</a:t>
-            </a:r>
-          </a:p>
-        </p:txBody>
-      </p:sp>
-    </p:spTree>
-  </p:cSld>
-  <p:clrMapOvr>
-    <a:masterClrMapping/>
-  </p:clrMapOvr>
-</p:sld>
-</file>
-
-<file path=ppt/slides/slide23.xml><?xml version="1.0" encoding="utf-8"?>
-<p:sld xmlns:a="http://schemas.openxmlformats.org/drawingml/2006/main" xmlns:r="http://schemas.openxmlformats.org/officeDocument/2006/relationships" xmlns:p="http://schemas.openxmlformats.org/presentationml/2006/main">
-  <p:cSld>
-    <p:spTree>
-      <p:nvGrpSpPr>
-        <p:cNvPr id="1" name="Shape 482"/>
-        <p:cNvGrpSpPr/>
-        <p:nvPr/>
-      </p:nvGrpSpPr>
-      <p:grpSpPr>
-        <a:xfrm>
-          <a:off x="0" y="0"/>
-          <a:ext cx="0" cy="0"/>
-          <a:chOff x="0" y="0"/>
-          <a:chExt cx="0" cy="0"/>
-        </a:xfrm>
-      </p:grpSpPr>
-      <p:graphicFrame>
-        <p:nvGraphicFramePr>
-          <p:cNvPr id="483" name="Google Shape;483;p57"/>
-          <p:cNvGraphicFramePr/>
-          <p:nvPr/>
-        </p:nvGraphicFramePr>
-        <p:xfrm>
-          <a:off x="107150" y="712766"/>
-          <a:ext cx="8991600" cy="3870630"/>
-        </p:xfrm>
-        <a:graphic>
-          <a:graphicData uri="http://schemas.openxmlformats.org/drawingml/2006/table">
-            <a:tbl>
-              <a:tblPr>
-                <a:noFill/>
-                <a:tableStyleId>{5B9063A8-BC75-44AB-A561-BE0A82F3F6A3}</a:tableStyleId>
-              </a:tblPr>
-              <a:tblGrid>
-                <a:gridCol w="2550425">
-                  <a:extLst>
-                    <a:ext uri="{9D8B030D-6E8A-4147-A177-3AD203B41FA5}">
-                      <a16:colId xmlns:a16="http://schemas.microsoft.com/office/drawing/2014/main" val="20000"/>
-                    </a:ext>
-                  </a:extLst>
-                </a:gridCol>
-                <a:gridCol w="3909375">
-                  <a:extLst>
-                    <a:ext uri="{9D8B030D-6E8A-4147-A177-3AD203B41FA5}">
-                      <a16:colId xmlns:a16="http://schemas.microsoft.com/office/drawing/2014/main" val="20001"/>
-                    </a:ext>
-                  </a:extLst>
-                </a:gridCol>
-                <a:gridCol w="2531800">
-                  <a:extLst>
-                    <a:ext uri="{9D8B030D-6E8A-4147-A177-3AD203B41FA5}">
-                      <a16:colId xmlns:a16="http://schemas.microsoft.com/office/drawing/2014/main" val="20002"/>
-                    </a:ext>
-                  </a:extLst>
-                </a:gridCol>
-              </a:tblGrid>
-              <a:tr h="328325">
-                <a:tc>
-                  <a:txBody>
-                    <a:bodyPr/>
-                    <a:lstStyle/>
-                    <a:p>
-                      <a:pPr marL="0" marR="0" lvl="0" indent="0" algn="ctr" rtl="0">
-                        <a:lnSpc>
-                          <a:spcPct val="100000"/>
-                        </a:lnSpc>
-                        <a:spcBef>
-                          <a:spcPts val="0"/>
-                        </a:spcBef>
-                        <a:spcAft>
-                          <a:spcPts val="0"/>
-                        </a:spcAft>
-                        <a:buClr>
-                          <a:schemeClr val="lt1"/>
-                        </a:buClr>
-                        <a:buSzPts val="1200"/>
-                        <a:buFont typeface="Consolas"/>
-                        <a:buNone/>
-                      </a:pPr>
-                      <a:r>
-                        <a:rPr lang="en" sz="1200" b="1" u="none" strike="noStrike" cap="none">
-                          <a:solidFill>
-                            <a:schemeClr val="lt1"/>
-                          </a:solidFill>
-                          <a:latin typeface="Consolas"/>
-                          <a:ea typeface="Consolas"/>
-                          <a:cs typeface="Consolas"/>
-                          <a:sym typeface="Consolas"/>
-                        </a:rPr>
-                        <a:t>Type</a:t>
-                      </a:r>
-                      <a:endParaRPr sz="1200" b="1" u="none" strike="noStrike" cap="none">
-                        <a:solidFill>
-                          <a:schemeClr val="lt1"/>
-                        </a:solidFill>
-                        <a:latin typeface="Consolas"/>
-                        <a:ea typeface="Consolas"/>
-                        <a:cs typeface="Consolas"/>
-                        <a:sym typeface="Consolas"/>
-                      </a:endParaRPr>
-                    </a:p>
-                  </a:txBody>
-                  <a:tcPr marL="91425" marR="91425" marT="91425" marB="91425">
-                    <a:lnL w="9525" cap="flat" cmpd="sng">
-                      <a:solidFill>
-                        <a:srgbClr val="000000"/>
-                      </a:solidFill>
-                      <a:prstDash val="solid"/>
-                      <a:round/>
-                      <a:headEnd type="none" w="sm" len="sm"/>
-                      <a:tailEnd type="none" w="sm" len="sm"/>
-                    </a:lnL>
-                    <a:lnR w="9525" cap="flat" cmpd="sng">
-                      <a:solidFill>
-                        <a:srgbClr val="000000"/>
-                      </a:solidFill>
-                      <a:prstDash val="solid"/>
-                      <a:round/>
-                      <a:headEnd type="none" w="sm" len="sm"/>
-                      <a:tailEnd type="none" w="sm" len="sm"/>
-                    </a:lnR>
-                    <a:lnT w="9525" cap="flat" cmpd="sng">
-                      <a:solidFill>
-                        <a:srgbClr val="000000"/>
-                      </a:solidFill>
-                      <a:prstDash val="solid"/>
-                      <a:round/>
-                      <a:headEnd type="none" w="sm" len="sm"/>
-                      <a:tailEnd type="none" w="sm" len="sm"/>
-                    </a:lnT>
-                    <a:lnB w="9525" cap="flat" cmpd="sng">
-                      <a:solidFill>
-                        <a:srgbClr val="000000"/>
-                      </a:solidFill>
-                      <a:prstDash val="solid"/>
-                      <a:round/>
-                      <a:headEnd type="none" w="sm" len="sm"/>
-                      <a:tailEnd type="none" w="sm" len="sm"/>
-                    </a:lnB>
-                  </a:tcPr>
-                </a:tc>
-                <a:tc>
-                  <a:txBody>
-                    <a:bodyPr/>
-                    <a:lstStyle/>
-                    <a:p>
-                      <a:pPr marL="0" marR="0" lvl="0" indent="0" algn="ctr" rtl="0">
-                        <a:lnSpc>
-                          <a:spcPct val="100000"/>
-                        </a:lnSpc>
-                        <a:spcBef>
-                          <a:spcPts val="0"/>
-                        </a:spcBef>
-                        <a:spcAft>
-                          <a:spcPts val="0"/>
-                        </a:spcAft>
-                        <a:buClr>
-                          <a:schemeClr val="lt1"/>
-                        </a:buClr>
-                        <a:buSzPts val="1200"/>
-                        <a:buFont typeface="Consolas"/>
-                        <a:buNone/>
-                      </a:pPr>
-                      <a:r>
-                        <a:rPr lang="en" sz="1200" b="1" u="none" strike="noStrike" cap="none">
-                          <a:solidFill>
-                            <a:schemeClr val="lt1"/>
-                          </a:solidFill>
-                          <a:latin typeface="Consolas"/>
-                          <a:ea typeface="Consolas"/>
-                          <a:cs typeface="Consolas"/>
-                          <a:sym typeface="Consolas"/>
-                        </a:rPr>
-                        <a:t>When it Happens</a:t>
-                      </a:r>
-                      <a:endParaRPr sz="1200" b="1" u="none" strike="noStrike" cap="none">
-                        <a:solidFill>
-                          <a:schemeClr val="lt1"/>
-                        </a:solidFill>
-                        <a:latin typeface="Consolas"/>
-                        <a:ea typeface="Consolas"/>
-                        <a:cs typeface="Consolas"/>
-                        <a:sym typeface="Consolas"/>
-                      </a:endParaRPr>
-                    </a:p>
-                  </a:txBody>
-                  <a:tcPr marL="91425" marR="91425" marT="91425" marB="91425">
-                    <a:lnL w="9525" cap="flat" cmpd="sng">
-                      <a:solidFill>
-                        <a:srgbClr val="000000"/>
-                      </a:solidFill>
-                      <a:prstDash val="solid"/>
-                      <a:round/>
-                      <a:headEnd type="none" w="sm" len="sm"/>
-                      <a:tailEnd type="none" w="sm" len="sm"/>
-                    </a:lnL>
-                    <a:lnR w="9525" cap="flat" cmpd="sng">
-                      <a:solidFill>
-                        <a:srgbClr val="000000"/>
-                      </a:solidFill>
-                      <a:prstDash val="solid"/>
-                      <a:round/>
-                      <a:headEnd type="none" w="sm" len="sm"/>
-                      <a:tailEnd type="none" w="sm" len="sm"/>
-                    </a:lnR>
-                    <a:lnT w="9525" cap="flat" cmpd="sng">
-                      <a:solidFill>
-                        <a:srgbClr val="000000"/>
-                      </a:solidFill>
-                      <a:prstDash val="solid"/>
-                      <a:round/>
-                      <a:headEnd type="none" w="sm" len="sm"/>
-                      <a:tailEnd type="none" w="sm" len="sm"/>
-                    </a:lnT>
-                    <a:lnB w="9525" cap="flat" cmpd="sng">
-                      <a:solidFill>
-                        <a:srgbClr val="000000"/>
-                      </a:solidFill>
-                      <a:prstDash val="solid"/>
-                      <a:round/>
-                      <a:headEnd type="none" w="sm" len="sm"/>
-                      <a:tailEnd type="none" w="sm" len="sm"/>
-                    </a:lnB>
-                  </a:tcPr>
-                </a:tc>
-                <a:tc>
-                  <a:txBody>
-                    <a:bodyPr/>
-                    <a:lstStyle/>
-                    <a:p>
-                      <a:pPr marL="0" marR="0" lvl="0" indent="0" algn="ctr" rtl="0">
-                        <a:lnSpc>
-                          <a:spcPct val="100000"/>
-                        </a:lnSpc>
-                        <a:spcBef>
-                          <a:spcPts val="0"/>
-                        </a:spcBef>
-                        <a:spcAft>
-                          <a:spcPts val="0"/>
-                        </a:spcAft>
-                        <a:buClr>
-                          <a:schemeClr val="lt1"/>
-                        </a:buClr>
-                        <a:buSzPts val="1200"/>
-                        <a:buFont typeface="Consolas"/>
-                        <a:buNone/>
-                      </a:pPr>
-                      <a:r>
-                        <a:rPr lang="en" sz="1200" b="1" u="none" strike="noStrike" cap="none">
-                          <a:solidFill>
-                            <a:schemeClr val="lt1"/>
-                          </a:solidFill>
-                          <a:latin typeface="Consolas"/>
-                          <a:ea typeface="Consolas"/>
-                          <a:cs typeface="Consolas"/>
-                          <a:sym typeface="Consolas"/>
-                        </a:rPr>
-                        <a:t>Example</a:t>
-                      </a:r>
-                      <a:endParaRPr sz="1200" b="1" u="none" strike="noStrike" cap="none">
-                        <a:solidFill>
-                          <a:schemeClr val="lt1"/>
-                        </a:solidFill>
-                        <a:latin typeface="Consolas"/>
-                        <a:ea typeface="Consolas"/>
-                        <a:cs typeface="Consolas"/>
-                        <a:sym typeface="Consolas"/>
-                      </a:endParaRPr>
-                    </a:p>
-                  </a:txBody>
-                  <a:tcPr marL="91425" marR="91425" marT="91425" marB="91425">
-                    <a:lnL w="9525" cap="flat" cmpd="sng">
-                      <a:solidFill>
-                        <a:srgbClr val="000000"/>
-                      </a:solidFill>
-                      <a:prstDash val="solid"/>
-                      <a:round/>
-                      <a:headEnd type="none" w="sm" len="sm"/>
-                      <a:tailEnd type="none" w="sm" len="sm"/>
-                    </a:lnL>
-                    <a:lnR w="9525" cap="flat" cmpd="sng">
-                      <a:solidFill>
-                        <a:srgbClr val="000000"/>
-                      </a:solidFill>
-                      <a:prstDash val="solid"/>
-                      <a:round/>
-                      <a:headEnd type="none" w="sm" len="sm"/>
-                      <a:tailEnd type="none" w="sm" len="sm"/>
-                    </a:lnR>
-                    <a:lnT w="9525" cap="flat" cmpd="sng">
-                      <a:solidFill>
-                        <a:srgbClr val="000000"/>
-                      </a:solidFill>
-                      <a:prstDash val="solid"/>
-                      <a:round/>
-                      <a:headEnd type="none" w="sm" len="sm"/>
-                      <a:tailEnd type="none" w="sm" len="sm"/>
-                    </a:lnT>
-                    <a:lnB w="9525" cap="flat" cmpd="sng">
-                      <a:solidFill>
-                        <a:srgbClr val="000000"/>
-                      </a:solidFill>
-                      <a:prstDash val="solid"/>
-                      <a:round/>
-                      <a:headEnd type="none" w="sm" len="sm"/>
-                      <a:tailEnd type="none" w="sm" len="sm"/>
-                    </a:lnB>
-                  </a:tcPr>
-                </a:tc>
-                <a:extLst>
-                  <a:ext uri="{0D108BD9-81ED-4DB2-BD59-A6C34878D82A}">
-                    <a16:rowId xmlns:a16="http://schemas.microsoft.com/office/drawing/2014/main" val="10000"/>
-                  </a:ext>
-                </a:extLst>
-              </a:tr>
-              <a:tr h="328325">
-                <a:tc>
-                  <a:txBody>
-                    <a:bodyPr/>
-                    <a:lstStyle/>
-                    <a:p>
-                      <a:pPr marL="0" marR="0" lvl="0" indent="0" algn="l" rtl="0">
-                        <a:lnSpc>
-                          <a:spcPct val="100000"/>
-                        </a:lnSpc>
-                        <a:spcBef>
-                          <a:spcPts val="0"/>
-                        </a:spcBef>
-                        <a:spcAft>
-                          <a:spcPts val="0"/>
-                        </a:spcAft>
-                        <a:buClr>
-                          <a:schemeClr val="lt1"/>
-                        </a:buClr>
-                        <a:buSzPts val="1100"/>
-                        <a:buFont typeface="Consolas"/>
-                        <a:buNone/>
-                      </a:pPr>
-                      <a:r>
-                        <a:rPr lang="en" sz="1100" b="1" u="none" strike="noStrike" cap="none">
-                          <a:solidFill>
-                            <a:schemeClr val="lt1"/>
-                          </a:solidFill>
-                          <a:latin typeface="Consolas"/>
-                          <a:ea typeface="Consolas"/>
-                          <a:cs typeface="Consolas"/>
-                          <a:sym typeface="Consolas"/>
-                        </a:rPr>
-                        <a:t>SyntaxError</a:t>
-                      </a:r>
-                      <a:endParaRPr sz="1100" b="1" u="none" strike="noStrike" cap="none">
-                        <a:solidFill>
-                          <a:schemeClr val="lt1"/>
-                        </a:solidFill>
-                        <a:latin typeface="Consolas"/>
-                        <a:ea typeface="Consolas"/>
-                        <a:cs typeface="Consolas"/>
-                        <a:sym typeface="Consolas"/>
-                      </a:endParaRPr>
-                    </a:p>
-                  </a:txBody>
-                  <a:tcPr marL="91425" marR="91425" marT="91425" marB="91425">
-                    <a:lnL w="9525" cap="flat" cmpd="sng">
-                      <a:solidFill>
-                        <a:srgbClr val="000000"/>
-                      </a:solidFill>
-                      <a:prstDash val="solid"/>
-                      <a:round/>
-                      <a:headEnd type="none" w="sm" len="sm"/>
-                      <a:tailEnd type="none" w="sm" len="sm"/>
-                    </a:lnL>
-                    <a:lnR w="9525" cap="flat" cmpd="sng">
-                      <a:solidFill>
-                        <a:srgbClr val="000000"/>
-                      </a:solidFill>
-                      <a:prstDash val="solid"/>
-                      <a:round/>
-                      <a:headEnd type="none" w="sm" len="sm"/>
-                      <a:tailEnd type="none" w="sm" len="sm"/>
-                    </a:lnR>
-                    <a:lnT w="9525" cap="flat" cmpd="sng">
-                      <a:solidFill>
-                        <a:srgbClr val="000000"/>
-                      </a:solidFill>
-                      <a:prstDash val="solid"/>
-                      <a:round/>
-                      <a:headEnd type="none" w="sm" len="sm"/>
-                      <a:tailEnd type="none" w="sm" len="sm"/>
-                    </a:lnT>
-                    <a:lnB w="9525" cap="flat" cmpd="sng">
-                      <a:solidFill>
-                        <a:srgbClr val="000000"/>
-                      </a:solidFill>
-                      <a:prstDash val="solid"/>
-                      <a:round/>
-                      <a:headEnd type="none" w="sm" len="sm"/>
-                      <a:tailEnd type="none" w="sm" len="sm"/>
-                    </a:lnB>
-                  </a:tcPr>
-                </a:tc>
-                <a:tc>
-                  <a:txBody>
-                    <a:bodyPr/>
-                    <a:lstStyle/>
-                    <a:p>
-                      <a:pPr marL="0" marR="0" lvl="0" indent="0" algn="l" rtl="0">
-                        <a:lnSpc>
-                          <a:spcPct val="100000"/>
-                        </a:lnSpc>
-                        <a:spcBef>
-                          <a:spcPts val="0"/>
-                        </a:spcBef>
-                        <a:spcAft>
-                          <a:spcPts val="0"/>
-                        </a:spcAft>
-                        <a:buClr>
-                          <a:schemeClr val="lt1"/>
-                        </a:buClr>
-                        <a:buSzPts val="1100"/>
-                        <a:buFont typeface="Consolas"/>
-                        <a:buNone/>
-                      </a:pPr>
-                      <a:r>
-                        <a:rPr lang="en" sz="1100" u="none" strike="noStrike" cap="none">
-                          <a:solidFill>
-                            <a:schemeClr val="lt1"/>
-                          </a:solidFill>
-                          <a:latin typeface="Consolas"/>
-                          <a:ea typeface="Consolas"/>
-                          <a:cs typeface="Consolas"/>
-                          <a:sym typeface="Consolas"/>
-                        </a:rPr>
-                        <a:t>Code violates Python’s rules</a:t>
-                      </a:r>
-                      <a:endParaRPr sz="1100" u="none" strike="noStrike" cap="none">
-                        <a:solidFill>
-                          <a:schemeClr val="lt1"/>
-                        </a:solidFill>
-                        <a:latin typeface="Consolas"/>
-                        <a:ea typeface="Consolas"/>
-                        <a:cs typeface="Consolas"/>
-                        <a:sym typeface="Consolas"/>
-                      </a:endParaRPr>
-                    </a:p>
-                  </a:txBody>
-                  <a:tcPr marL="91425" marR="91425" marT="91425" marB="91425">
-                    <a:lnL w="9525" cap="flat" cmpd="sng">
-                      <a:solidFill>
-                        <a:srgbClr val="000000"/>
-                      </a:solidFill>
-                      <a:prstDash val="solid"/>
-                      <a:round/>
-                      <a:headEnd type="none" w="sm" len="sm"/>
-                      <a:tailEnd type="none" w="sm" len="sm"/>
-                    </a:lnL>
-                    <a:lnR w="9525" cap="flat" cmpd="sng">
-                      <a:solidFill>
-                        <a:srgbClr val="000000"/>
-                      </a:solidFill>
-                      <a:prstDash val="solid"/>
-                      <a:round/>
-                      <a:headEnd type="none" w="sm" len="sm"/>
-                      <a:tailEnd type="none" w="sm" len="sm"/>
-                    </a:lnR>
-                    <a:lnT w="9525" cap="flat" cmpd="sng">
-                      <a:solidFill>
-                        <a:srgbClr val="000000"/>
-                      </a:solidFill>
-                      <a:prstDash val="solid"/>
-                      <a:round/>
-                      <a:headEnd type="none" w="sm" len="sm"/>
-                      <a:tailEnd type="none" w="sm" len="sm"/>
-                    </a:lnT>
-                    <a:lnB w="9525" cap="flat" cmpd="sng">
-                      <a:solidFill>
-                        <a:srgbClr val="000000"/>
-                      </a:solidFill>
-                      <a:prstDash val="solid"/>
-                      <a:round/>
-                      <a:headEnd type="none" w="sm" len="sm"/>
-                      <a:tailEnd type="none" w="sm" len="sm"/>
-                    </a:lnB>
-                  </a:tcPr>
-                </a:tc>
-                <a:tc>
-                  <a:txBody>
-                    <a:bodyPr/>
-                    <a:lstStyle/>
-                    <a:p>
-                      <a:pPr marL="0" marR="0" lvl="0" indent="0" algn="l" rtl="0">
-                        <a:lnSpc>
-                          <a:spcPct val="100000"/>
-                        </a:lnSpc>
-                        <a:spcBef>
-                          <a:spcPts val="0"/>
-                        </a:spcBef>
-                        <a:spcAft>
-                          <a:spcPts val="0"/>
-                        </a:spcAft>
-                        <a:buClr>
-                          <a:schemeClr val="lt1"/>
-                        </a:buClr>
-                        <a:buSzPts val="1100"/>
-                        <a:buFont typeface="Consolas"/>
-                        <a:buNone/>
-                      </a:pPr>
-                      <a:r>
-                        <a:rPr lang="en" sz="1100" u="none" strike="noStrike" cap="none">
-                          <a:solidFill>
-                            <a:schemeClr val="lt1"/>
-                          </a:solidFill>
-                          <a:latin typeface="Consolas"/>
-                          <a:ea typeface="Consolas"/>
-                          <a:cs typeface="Consolas"/>
-                          <a:sym typeface="Consolas"/>
-                        </a:rPr>
-                        <a:t>Missing colon :</a:t>
-                      </a:r>
-                      <a:endParaRPr sz="1100" u="none" strike="noStrike" cap="none">
-                        <a:solidFill>
-                          <a:schemeClr val="lt1"/>
-                        </a:solidFill>
-                        <a:latin typeface="Consolas"/>
-                        <a:ea typeface="Consolas"/>
-                        <a:cs typeface="Consolas"/>
-                        <a:sym typeface="Consolas"/>
-                      </a:endParaRPr>
-                    </a:p>
-                  </a:txBody>
-                  <a:tcPr marL="91425" marR="91425" marT="91425" marB="91425">
-                    <a:lnL w="9525" cap="flat" cmpd="sng">
-                      <a:solidFill>
-                        <a:srgbClr val="000000"/>
-                      </a:solidFill>
-                      <a:prstDash val="solid"/>
-                      <a:round/>
-                      <a:headEnd type="none" w="sm" len="sm"/>
-                      <a:tailEnd type="none" w="sm" len="sm"/>
-                    </a:lnL>
-                    <a:lnR w="9525" cap="flat" cmpd="sng">
-                      <a:solidFill>
-                        <a:srgbClr val="000000"/>
-                      </a:solidFill>
-                      <a:prstDash val="solid"/>
-                      <a:round/>
-                      <a:headEnd type="none" w="sm" len="sm"/>
-                      <a:tailEnd type="none" w="sm" len="sm"/>
-                    </a:lnR>
-                    <a:lnT w="9525" cap="flat" cmpd="sng">
-                      <a:solidFill>
-                        <a:srgbClr val="000000"/>
-                      </a:solidFill>
-                      <a:prstDash val="solid"/>
-                      <a:round/>
-                      <a:headEnd type="none" w="sm" len="sm"/>
-                      <a:tailEnd type="none" w="sm" len="sm"/>
-                    </a:lnT>
-                    <a:lnB w="9525" cap="flat" cmpd="sng">
-                      <a:solidFill>
-                        <a:srgbClr val="000000"/>
-                      </a:solidFill>
-                      <a:prstDash val="solid"/>
-                      <a:round/>
-                      <a:headEnd type="none" w="sm" len="sm"/>
-                      <a:tailEnd type="none" w="sm" len="sm"/>
-                    </a:lnB>
-                  </a:tcPr>
-                </a:tc>
-                <a:extLst>
-                  <a:ext uri="{0D108BD9-81ED-4DB2-BD59-A6C34878D82A}">
-                    <a16:rowId xmlns:a16="http://schemas.microsoft.com/office/drawing/2014/main" val="10001"/>
-                  </a:ext>
-                </a:extLst>
-              </a:tr>
-              <a:tr h="328325">
-                <a:tc>
-                  <a:txBody>
-                    <a:bodyPr/>
-                    <a:lstStyle/>
-                    <a:p>
-                      <a:pPr marL="0" marR="0" lvl="0" indent="0" algn="l" rtl="0">
-                        <a:lnSpc>
-                          <a:spcPct val="100000"/>
-                        </a:lnSpc>
-                        <a:spcBef>
-                          <a:spcPts val="0"/>
-                        </a:spcBef>
-                        <a:spcAft>
-                          <a:spcPts val="0"/>
-                        </a:spcAft>
-                        <a:buClr>
-                          <a:schemeClr val="lt1"/>
-                        </a:buClr>
-                        <a:buSzPts val="1100"/>
-                        <a:buFont typeface="Consolas"/>
-                        <a:buNone/>
-                      </a:pPr>
-                      <a:r>
-                        <a:rPr lang="en" sz="1100" b="1" u="none" strike="noStrike" cap="none">
-                          <a:solidFill>
-                            <a:schemeClr val="lt1"/>
-                          </a:solidFill>
-                          <a:latin typeface="Consolas"/>
-                          <a:ea typeface="Consolas"/>
-                          <a:cs typeface="Consolas"/>
-                          <a:sym typeface="Consolas"/>
-                        </a:rPr>
-                        <a:t>IndentationError</a:t>
-                      </a:r>
-                      <a:endParaRPr sz="1100" b="1" u="none" strike="noStrike" cap="none">
-                        <a:solidFill>
-                          <a:schemeClr val="lt1"/>
-                        </a:solidFill>
-                        <a:latin typeface="Consolas"/>
-                        <a:ea typeface="Consolas"/>
-                        <a:cs typeface="Consolas"/>
-                        <a:sym typeface="Consolas"/>
-                      </a:endParaRPr>
-                    </a:p>
-                  </a:txBody>
-                  <a:tcPr marL="91425" marR="91425" marT="91425" marB="91425">
-                    <a:lnL w="9525" cap="flat" cmpd="sng">
-                      <a:solidFill>
-                        <a:srgbClr val="000000"/>
-                      </a:solidFill>
-                      <a:prstDash val="solid"/>
-                      <a:round/>
-                      <a:headEnd type="none" w="sm" len="sm"/>
-                      <a:tailEnd type="none" w="sm" len="sm"/>
-                    </a:lnL>
-                    <a:lnR w="9525" cap="flat" cmpd="sng">
-                      <a:solidFill>
-                        <a:srgbClr val="000000"/>
-                      </a:solidFill>
-                      <a:prstDash val="solid"/>
-                      <a:round/>
-                      <a:headEnd type="none" w="sm" len="sm"/>
-                      <a:tailEnd type="none" w="sm" len="sm"/>
-                    </a:lnR>
-                    <a:lnT w="9525" cap="flat" cmpd="sng">
-                      <a:solidFill>
-                        <a:srgbClr val="000000"/>
-                      </a:solidFill>
-                      <a:prstDash val="solid"/>
-                      <a:round/>
-                      <a:headEnd type="none" w="sm" len="sm"/>
-                      <a:tailEnd type="none" w="sm" len="sm"/>
-                    </a:lnT>
-                    <a:lnB w="9525" cap="flat" cmpd="sng">
-                      <a:solidFill>
-                        <a:srgbClr val="000000"/>
-                      </a:solidFill>
-                      <a:prstDash val="solid"/>
-                      <a:round/>
-                      <a:headEnd type="none" w="sm" len="sm"/>
-                      <a:tailEnd type="none" w="sm" len="sm"/>
-                    </a:lnB>
-                  </a:tcPr>
-                </a:tc>
-                <a:tc>
-                  <a:txBody>
-                    <a:bodyPr/>
-                    <a:lstStyle/>
-                    <a:p>
-                      <a:pPr marL="0" marR="0" lvl="0" indent="0" algn="l" rtl="0">
-                        <a:lnSpc>
-                          <a:spcPct val="100000"/>
-                        </a:lnSpc>
-                        <a:spcBef>
-                          <a:spcPts val="0"/>
-                        </a:spcBef>
-                        <a:spcAft>
-                          <a:spcPts val="0"/>
-                        </a:spcAft>
-                        <a:buClr>
-                          <a:schemeClr val="lt1"/>
-                        </a:buClr>
-                        <a:buSzPts val="1100"/>
-                        <a:buFont typeface="Consolas"/>
-                        <a:buNone/>
-                      </a:pPr>
-                      <a:r>
-                        <a:rPr lang="en" sz="1100" u="none" strike="noStrike" cap="none">
-                          <a:solidFill>
-                            <a:schemeClr val="lt1"/>
-                          </a:solidFill>
-                          <a:latin typeface="Consolas"/>
-                          <a:ea typeface="Consolas"/>
-                          <a:cs typeface="Consolas"/>
-                          <a:sym typeface="Consolas"/>
-                        </a:rPr>
-                        <a:t>Code has wrong indentation</a:t>
-                      </a:r>
-                      <a:endParaRPr sz="1100" u="none" strike="noStrike" cap="none">
-                        <a:solidFill>
-                          <a:schemeClr val="lt1"/>
-                        </a:solidFill>
-                        <a:latin typeface="Consolas"/>
-                        <a:ea typeface="Consolas"/>
-                        <a:cs typeface="Consolas"/>
-                        <a:sym typeface="Consolas"/>
-                      </a:endParaRPr>
-                    </a:p>
-                  </a:txBody>
-                  <a:tcPr marL="91425" marR="91425" marT="91425" marB="91425">
-                    <a:lnL w="9525" cap="flat" cmpd="sng">
-                      <a:solidFill>
-                        <a:srgbClr val="000000"/>
-                      </a:solidFill>
-                      <a:prstDash val="solid"/>
-                      <a:round/>
-                      <a:headEnd type="none" w="sm" len="sm"/>
-                      <a:tailEnd type="none" w="sm" len="sm"/>
-                    </a:lnL>
-                    <a:lnR w="9525" cap="flat" cmpd="sng">
-                      <a:solidFill>
-                        <a:srgbClr val="000000"/>
-                      </a:solidFill>
-                      <a:prstDash val="solid"/>
-                      <a:round/>
-                      <a:headEnd type="none" w="sm" len="sm"/>
-                      <a:tailEnd type="none" w="sm" len="sm"/>
-                    </a:lnR>
-                    <a:lnT w="9525" cap="flat" cmpd="sng">
-                      <a:solidFill>
-                        <a:srgbClr val="000000"/>
-                      </a:solidFill>
-                      <a:prstDash val="solid"/>
-                      <a:round/>
-                      <a:headEnd type="none" w="sm" len="sm"/>
-                      <a:tailEnd type="none" w="sm" len="sm"/>
-                    </a:lnT>
-                    <a:lnB w="9525" cap="flat" cmpd="sng">
-                      <a:solidFill>
-                        <a:srgbClr val="000000"/>
-                      </a:solidFill>
-                      <a:prstDash val="solid"/>
-                      <a:round/>
-                      <a:headEnd type="none" w="sm" len="sm"/>
-                      <a:tailEnd type="none" w="sm" len="sm"/>
-                    </a:lnB>
-                  </a:tcPr>
-                </a:tc>
-                <a:tc>
-                  <a:txBody>
-                    <a:bodyPr/>
-                    <a:lstStyle/>
-                    <a:p>
-                      <a:pPr marL="0" marR="0" lvl="0" indent="0" algn="l" rtl="0">
-                        <a:lnSpc>
-                          <a:spcPct val="100000"/>
-                        </a:lnSpc>
-                        <a:spcBef>
-                          <a:spcPts val="0"/>
-                        </a:spcBef>
-                        <a:spcAft>
-                          <a:spcPts val="0"/>
-                        </a:spcAft>
-                        <a:buClr>
-                          <a:schemeClr val="lt1"/>
-                        </a:buClr>
-                        <a:buSzPts val="1100"/>
-                        <a:buFont typeface="Consolas"/>
-                        <a:buNone/>
-                      </a:pPr>
-                      <a:r>
-                        <a:rPr lang="en" sz="1100" u="none" strike="noStrike" cap="none">
-                          <a:solidFill>
-                            <a:schemeClr val="lt1"/>
-                          </a:solidFill>
-                          <a:latin typeface="Consolas"/>
-                          <a:ea typeface="Consolas"/>
-                          <a:cs typeface="Consolas"/>
-                          <a:sym typeface="Consolas"/>
-                        </a:rPr>
-                        <a:t>Misaligned blocks</a:t>
-                      </a:r>
-                      <a:endParaRPr sz="1100" u="none" strike="noStrike" cap="none">
-                        <a:solidFill>
-                          <a:schemeClr val="lt1"/>
-                        </a:solidFill>
-                        <a:latin typeface="Consolas"/>
-                        <a:ea typeface="Consolas"/>
-                        <a:cs typeface="Consolas"/>
-                        <a:sym typeface="Consolas"/>
-                      </a:endParaRPr>
-                    </a:p>
-                  </a:txBody>
-                  <a:tcPr marL="91425" marR="91425" marT="91425" marB="91425">
-                    <a:lnL w="9525" cap="flat" cmpd="sng">
-                      <a:solidFill>
-                        <a:srgbClr val="000000"/>
-                      </a:solidFill>
-                      <a:prstDash val="solid"/>
-                      <a:round/>
-                      <a:headEnd type="none" w="sm" len="sm"/>
-                      <a:tailEnd type="none" w="sm" len="sm"/>
-                    </a:lnL>
-                    <a:lnR w="9525" cap="flat" cmpd="sng">
-                      <a:solidFill>
-                        <a:srgbClr val="000000"/>
-                      </a:solidFill>
-                      <a:prstDash val="solid"/>
-                      <a:round/>
-                      <a:headEnd type="none" w="sm" len="sm"/>
-                      <a:tailEnd type="none" w="sm" len="sm"/>
-                    </a:lnR>
-                    <a:lnT w="9525" cap="flat" cmpd="sng">
-                      <a:solidFill>
-                        <a:srgbClr val="000000"/>
-                      </a:solidFill>
-                      <a:prstDash val="solid"/>
-                      <a:round/>
-                      <a:headEnd type="none" w="sm" len="sm"/>
-                      <a:tailEnd type="none" w="sm" len="sm"/>
-                    </a:lnT>
-                    <a:lnB w="9525" cap="flat" cmpd="sng">
-                      <a:solidFill>
-                        <a:srgbClr val="000000"/>
-                      </a:solidFill>
-                      <a:prstDash val="solid"/>
-                      <a:round/>
-                      <a:headEnd type="none" w="sm" len="sm"/>
-                      <a:tailEnd type="none" w="sm" len="sm"/>
-                    </a:lnB>
-                  </a:tcPr>
-                </a:tc>
-                <a:extLst>
-                  <a:ext uri="{0D108BD9-81ED-4DB2-BD59-A6C34878D82A}">
-                    <a16:rowId xmlns:a16="http://schemas.microsoft.com/office/drawing/2014/main" val="10002"/>
-                  </a:ext>
-                </a:extLst>
-              </a:tr>
-              <a:tr h="328325">
-                <a:tc>
-                  <a:txBody>
-                    <a:bodyPr/>
-                    <a:lstStyle/>
-                    <a:p>
-                      <a:pPr marL="0" marR="0" lvl="0" indent="0" algn="l" rtl="0">
-                        <a:lnSpc>
-                          <a:spcPct val="100000"/>
-                        </a:lnSpc>
-                        <a:spcBef>
-                          <a:spcPts val="0"/>
-                        </a:spcBef>
-                        <a:spcAft>
-                          <a:spcPts val="0"/>
-                        </a:spcAft>
-                        <a:buClr>
-                          <a:schemeClr val="lt1"/>
-                        </a:buClr>
-                        <a:buSzPts val="1100"/>
-                        <a:buFont typeface="Consolas"/>
-                        <a:buNone/>
-                      </a:pPr>
-                      <a:r>
-                        <a:rPr lang="en" sz="1100" b="1" u="none" strike="noStrike" cap="none">
-                          <a:solidFill>
-                            <a:schemeClr val="lt1"/>
-                          </a:solidFill>
-                          <a:latin typeface="Consolas"/>
-                          <a:ea typeface="Consolas"/>
-                          <a:cs typeface="Consolas"/>
-                          <a:sym typeface="Consolas"/>
-                        </a:rPr>
-                        <a:t>TypeError</a:t>
-                      </a:r>
-                      <a:endParaRPr sz="1100" b="1" u="none" strike="noStrike" cap="none">
-                        <a:solidFill>
-                          <a:schemeClr val="lt1"/>
-                        </a:solidFill>
-                        <a:latin typeface="Consolas"/>
-                        <a:ea typeface="Consolas"/>
-                        <a:cs typeface="Consolas"/>
-                        <a:sym typeface="Consolas"/>
-                      </a:endParaRPr>
-                    </a:p>
-                  </a:txBody>
-                  <a:tcPr marL="91425" marR="91425" marT="91425" marB="91425">
-                    <a:lnL w="9525" cap="flat" cmpd="sng">
-                      <a:solidFill>
-                        <a:srgbClr val="000000"/>
-                      </a:solidFill>
-                      <a:prstDash val="solid"/>
-                      <a:round/>
-                      <a:headEnd type="none" w="sm" len="sm"/>
-                      <a:tailEnd type="none" w="sm" len="sm"/>
-                    </a:lnL>
-                    <a:lnR w="9525" cap="flat" cmpd="sng">
-                      <a:solidFill>
-                        <a:srgbClr val="000000"/>
-                      </a:solidFill>
-                      <a:prstDash val="solid"/>
-                      <a:round/>
-                      <a:headEnd type="none" w="sm" len="sm"/>
-                      <a:tailEnd type="none" w="sm" len="sm"/>
-                    </a:lnR>
-                    <a:lnT w="9525" cap="flat" cmpd="sng">
-                      <a:solidFill>
-                        <a:srgbClr val="000000"/>
-                      </a:solidFill>
-                      <a:prstDash val="solid"/>
-                      <a:round/>
-                      <a:headEnd type="none" w="sm" len="sm"/>
-                      <a:tailEnd type="none" w="sm" len="sm"/>
-                    </a:lnT>
-                    <a:lnB w="9525" cap="flat" cmpd="sng">
-                      <a:solidFill>
-                        <a:srgbClr val="000000"/>
-                      </a:solidFill>
-                      <a:prstDash val="solid"/>
-                      <a:round/>
-                      <a:headEnd type="none" w="sm" len="sm"/>
-                      <a:tailEnd type="none" w="sm" len="sm"/>
-                    </a:lnB>
-                  </a:tcPr>
-                </a:tc>
-                <a:tc>
-                  <a:txBody>
-                    <a:bodyPr/>
-                    <a:lstStyle/>
-                    <a:p>
-                      <a:pPr marL="0" marR="0" lvl="0" indent="0" algn="l" rtl="0">
-                        <a:lnSpc>
-                          <a:spcPct val="100000"/>
-                        </a:lnSpc>
-                        <a:spcBef>
-                          <a:spcPts val="0"/>
-                        </a:spcBef>
-                        <a:spcAft>
-                          <a:spcPts val="0"/>
-                        </a:spcAft>
-                        <a:buClr>
-                          <a:schemeClr val="lt1"/>
-                        </a:buClr>
-                        <a:buSzPts val="1100"/>
-                        <a:buFont typeface="Consolas"/>
-                        <a:buNone/>
-                      </a:pPr>
-                      <a:r>
-                        <a:rPr lang="en" sz="1100" u="none" strike="noStrike" cap="none">
-                          <a:solidFill>
-                            <a:schemeClr val="lt1"/>
-                          </a:solidFill>
-                          <a:latin typeface="Consolas"/>
-                          <a:ea typeface="Consolas"/>
-                          <a:cs typeface="Consolas"/>
-                          <a:sym typeface="Consolas"/>
-                        </a:rPr>
-                        <a:t>Wrong type used in operation</a:t>
-                      </a:r>
-                      <a:endParaRPr sz="1100" u="none" strike="noStrike" cap="none">
-                        <a:solidFill>
-                          <a:schemeClr val="lt1"/>
-                        </a:solidFill>
-                        <a:latin typeface="Consolas"/>
-                        <a:ea typeface="Consolas"/>
-                        <a:cs typeface="Consolas"/>
-                        <a:sym typeface="Consolas"/>
-                      </a:endParaRPr>
-                    </a:p>
-                  </a:txBody>
-                  <a:tcPr marL="91425" marR="91425" marT="91425" marB="91425">
-                    <a:lnL w="9525" cap="flat" cmpd="sng">
-                      <a:solidFill>
-                        <a:srgbClr val="000000"/>
-                      </a:solidFill>
-                      <a:prstDash val="solid"/>
-                      <a:round/>
-                      <a:headEnd type="none" w="sm" len="sm"/>
-                      <a:tailEnd type="none" w="sm" len="sm"/>
-                    </a:lnL>
-                    <a:lnR w="9525" cap="flat" cmpd="sng">
-                      <a:solidFill>
-                        <a:srgbClr val="000000"/>
-                      </a:solidFill>
-                      <a:prstDash val="solid"/>
-                      <a:round/>
-                      <a:headEnd type="none" w="sm" len="sm"/>
-                      <a:tailEnd type="none" w="sm" len="sm"/>
-                    </a:lnR>
-                    <a:lnT w="9525" cap="flat" cmpd="sng">
-                      <a:solidFill>
-                        <a:srgbClr val="000000"/>
-                      </a:solidFill>
-                      <a:prstDash val="solid"/>
-                      <a:round/>
-                      <a:headEnd type="none" w="sm" len="sm"/>
-                      <a:tailEnd type="none" w="sm" len="sm"/>
-                    </a:lnT>
-                    <a:lnB w="9525" cap="flat" cmpd="sng">
-                      <a:solidFill>
-                        <a:srgbClr val="000000"/>
-                      </a:solidFill>
-                      <a:prstDash val="solid"/>
-                      <a:round/>
-                      <a:headEnd type="none" w="sm" len="sm"/>
-                      <a:tailEnd type="none" w="sm" len="sm"/>
-                    </a:lnB>
-                  </a:tcPr>
-                </a:tc>
-                <a:tc>
-                  <a:txBody>
-                    <a:bodyPr/>
-                    <a:lstStyle/>
-                    <a:p>
-                      <a:pPr marL="0" marR="0" lvl="0" indent="0" algn="l" rtl="0">
-                        <a:lnSpc>
-                          <a:spcPct val="100000"/>
-                        </a:lnSpc>
-                        <a:spcBef>
-                          <a:spcPts val="0"/>
-                        </a:spcBef>
-                        <a:spcAft>
-                          <a:spcPts val="0"/>
-                        </a:spcAft>
-                        <a:buClr>
-                          <a:schemeClr val="lt1"/>
-                        </a:buClr>
-                        <a:buSzPts val="1100"/>
-                        <a:buFont typeface="Consolas"/>
-                        <a:buNone/>
-                      </a:pPr>
-                      <a:r>
-                        <a:rPr lang="en" sz="1100" u="none" strike="noStrike" cap="none">
-                          <a:solidFill>
-                            <a:schemeClr val="lt1"/>
-                          </a:solidFill>
-                          <a:latin typeface="Consolas"/>
-                          <a:ea typeface="Consolas"/>
-                          <a:cs typeface="Consolas"/>
-                          <a:sym typeface="Consolas"/>
-                        </a:rPr>
-                        <a:t>Add int to str</a:t>
-                      </a:r>
-                      <a:endParaRPr sz="1100" u="none" strike="noStrike" cap="none">
-                        <a:solidFill>
-                          <a:schemeClr val="lt1"/>
-                        </a:solidFill>
-                        <a:latin typeface="Consolas"/>
-                        <a:ea typeface="Consolas"/>
-                        <a:cs typeface="Consolas"/>
-                        <a:sym typeface="Consolas"/>
-                      </a:endParaRPr>
-                    </a:p>
-                  </a:txBody>
-                  <a:tcPr marL="91425" marR="91425" marT="91425" marB="91425">
-                    <a:lnL w="9525" cap="flat" cmpd="sng">
-                      <a:solidFill>
-                        <a:srgbClr val="000000"/>
-                      </a:solidFill>
-                      <a:prstDash val="solid"/>
-                      <a:round/>
-                      <a:headEnd type="none" w="sm" len="sm"/>
-                      <a:tailEnd type="none" w="sm" len="sm"/>
-                    </a:lnL>
-                    <a:lnR w="9525" cap="flat" cmpd="sng">
-                      <a:solidFill>
-                        <a:srgbClr val="000000"/>
-                      </a:solidFill>
-                      <a:prstDash val="solid"/>
-                      <a:round/>
-                      <a:headEnd type="none" w="sm" len="sm"/>
-                      <a:tailEnd type="none" w="sm" len="sm"/>
-                    </a:lnR>
-                    <a:lnT w="9525" cap="flat" cmpd="sng">
-                      <a:solidFill>
-                        <a:srgbClr val="000000"/>
-                      </a:solidFill>
-                      <a:prstDash val="solid"/>
-                      <a:round/>
-                      <a:headEnd type="none" w="sm" len="sm"/>
-                      <a:tailEnd type="none" w="sm" len="sm"/>
-                    </a:lnT>
-                    <a:lnB w="9525" cap="flat" cmpd="sng">
-                      <a:solidFill>
-                        <a:srgbClr val="000000"/>
-                      </a:solidFill>
-                      <a:prstDash val="solid"/>
-                      <a:round/>
-                      <a:headEnd type="none" w="sm" len="sm"/>
-                      <a:tailEnd type="none" w="sm" len="sm"/>
-                    </a:lnB>
-                  </a:tcPr>
-                </a:tc>
-                <a:extLst>
-                  <a:ext uri="{0D108BD9-81ED-4DB2-BD59-A6C34878D82A}">
-                    <a16:rowId xmlns:a16="http://schemas.microsoft.com/office/drawing/2014/main" val="10003"/>
-                  </a:ext>
-                </a:extLst>
-              </a:tr>
-              <a:tr h="328325">
-                <a:tc>
-                  <a:txBody>
-                    <a:bodyPr/>
-                    <a:lstStyle/>
-                    <a:p>
-                      <a:pPr marL="0" marR="0" lvl="0" indent="0" algn="l" rtl="0">
-                        <a:lnSpc>
-                          <a:spcPct val="100000"/>
-                        </a:lnSpc>
-                        <a:spcBef>
-                          <a:spcPts val="0"/>
-                        </a:spcBef>
-                        <a:spcAft>
-                          <a:spcPts val="0"/>
-                        </a:spcAft>
-                        <a:buClr>
-                          <a:schemeClr val="lt1"/>
-                        </a:buClr>
-                        <a:buSzPts val="1100"/>
-                        <a:buFont typeface="Consolas"/>
-                        <a:buNone/>
-                      </a:pPr>
-                      <a:r>
-                        <a:rPr lang="en" sz="1100" b="1" u="none" strike="noStrike" cap="none">
-                          <a:solidFill>
-                            <a:schemeClr val="lt1"/>
-                          </a:solidFill>
-                          <a:latin typeface="Consolas"/>
-                          <a:ea typeface="Consolas"/>
-                          <a:cs typeface="Consolas"/>
-                          <a:sym typeface="Consolas"/>
-                        </a:rPr>
-                        <a:t>ValueError</a:t>
-                      </a:r>
-                      <a:endParaRPr sz="1100" b="1" u="none" strike="noStrike" cap="none">
-                        <a:solidFill>
-                          <a:schemeClr val="lt1"/>
-                        </a:solidFill>
-                        <a:latin typeface="Consolas"/>
-                        <a:ea typeface="Consolas"/>
-                        <a:cs typeface="Consolas"/>
-                        <a:sym typeface="Consolas"/>
-                      </a:endParaRPr>
-                    </a:p>
-                  </a:txBody>
-                  <a:tcPr marL="91425" marR="91425" marT="91425" marB="91425">
-                    <a:lnL w="9525" cap="flat" cmpd="sng">
-                      <a:solidFill>
-                        <a:srgbClr val="000000"/>
-                      </a:solidFill>
-                      <a:prstDash val="solid"/>
-                      <a:round/>
-                      <a:headEnd type="none" w="sm" len="sm"/>
-                      <a:tailEnd type="none" w="sm" len="sm"/>
-                    </a:lnL>
-                    <a:lnR w="9525" cap="flat" cmpd="sng">
-                      <a:solidFill>
-                        <a:srgbClr val="000000"/>
-                      </a:solidFill>
-                      <a:prstDash val="solid"/>
-                      <a:round/>
-                      <a:headEnd type="none" w="sm" len="sm"/>
-                      <a:tailEnd type="none" w="sm" len="sm"/>
-                    </a:lnR>
-                    <a:lnT w="9525" cap="flat" cmpd="sng">
-                      <a:solidFill>
-                        <a:srgbClr val="000000"/>
-                      </a:solidFill>
-                      <a:prstDash val="solid"/>
-                      <a:round/>
-                      <a:headEnd type="none" w="sm" len="sm"/>
-                      <a:tailEnd type="none" w="sm" len="sm"/>
-                    </a:lnT>
-                    <a:lnB w="9525" cap="flat" cmpd="sng">
-                      <a:solidFill>
-                        <a:srgbClr val="000000"/>
-                      </a:solidFill>
-                      <a:prstDash val="solid"/>
-                      <a:round/>
-                      <a:headEnd type="none" w="sm" len="sm"/>
-                      <a:tailEnd type="none" w="sm" len="sm"/>
-                    </a:lnB>
-                  </a:tcPr>
-                </a:tc>
-                <a:tc>
-                  <a:txBody>
-                    <a:bodyPr/>
-                    <a:lstStyle/>
-                    <a:p>
-                      <a:pPr marL="0" marR="0" lvl="0" indent="0" algn="l" rtl="0">
-                        <a:lnSpc>
-                          <a:spcPct val="100000"/>
-                        </a:lnSpc>
-                        <a:spcBef>
-                          <a:spcPts val="0"/>
-                        </a:spcBef>
-                        <a:spcAft>
-                          <a:spcPts val="0"/>
-                        </a:spcAft>
-                        <a:buClr>
-                          <a:schemeClr val="lt1"/>
-                        </a:buClr>
-                        <a:buSzPts val="1100"/>
-                        <a:buFont typeface="Consolas"/>
-                        <a:buNone/>
-                      </a:pPr>
-                      <a:r>
-                        <a:rPr lang="en" sz="1100" u="none" strike="noStrike" cap="none">
-                          <a:solidFill>
-                            <a:schemeClr val="lt1"/>
-                          </a:solidFill>
-                          <a:latin typeface="Consolas"/>
-                          <a:ea typeface="Consolas"/>
-                          <a:cs typeface="Consolas"/>
-                          <a:sym typeface="Consolas"/>
-                        </a:rPr>
-                        <a:t>Right type, wrong value</a:t>
-                      </a:r>
-                      <a:endParaRPr sz="1100" u="none" strike="noStrike" cap="none">
-                        <a:solidFill>
-                          <a:schemeClr val="lt1"/>
-                        </a:solidFill>
-                        <a:latin typeface="Consolas"/>
-                        <a:ea typeface="Consolas"/>
-                        <a:cs typeface="Consolas"/>
-                        <a:sym typeface="Consolas"/>
-                      </a:endParaRPr>
-                    </a:p>
-                  </a:txBody>
-                  <a:tcPr marL="91425" marR="91425" marT="91425" marB="91425">
-                    <a:lnL w="9525" cap="flat" cmpd="sng">
-                      <a:solidFill>
-                        <a:srgbClr val="000000"/>
-                      </a:solidFill>
-                      <a:prstDash val="solid"/>
-                      <a:round/>
-                      <a:headEnd type="none" w="sm" len="sm"/>
-                      <a:tailEnd type="none" w="sm" len="sm"/>
-                    </a:lnL>
-                    <a:lnR w="9525" cap="flat" cmpd="sng">
-                      <a:solidFill>
-                        <a:srgbClr val="000000"/>
-                      </a:solidFill>
-                      <a:prstDash val="solid"/>
-                      <a:round/>
-                      <a:headEnd type="none" w="sm" len="sm"/>
-                      <a:tailEnd type="none" w="sm" len="sm"/>
-                    </a:lnR>
-                    <a:lnT w="9525" cap="flat" cmpd="sng">
-                      <a:solidFill>
-                        <a:srgbClr val="000000"/>
-                      </a:solidFill>
-                      <a:prstDash val="solid"/>
-                      <a:round/>
-                      <a:headEnd type="none" w="sm" len="sm"/>
-                      <a:tailEnd type="none" w="sm" len="sm"/>
-                    </a:lnT>
-                    <a:lnB w="9525" cap="flat" cmpd="sng">
-                      <a:solidFill>
-                        <a:srgbClr val="000000"/>
-                      </a:solidFill>
-                      <a:prstDash val="solid"/>
-                      <a:round/>
-                      <a:headEnd type="none" w="sm" len="sm"/>
-                      <a:tailEnd type="none" w="sm" len="sm"/>
-                    </a:lnB>
-                  </a:tcPr>
-                </a:tc>
-                <a:tc>
-                  <a:txBody>
-                    <a:bodyPr/>
-                    <a:lstStyle/>
-                    <a:p>
-                      <a:pPr marL="0" marR="0" lvl="0" indent="0" algn="l" rtl="0">
-                        <a:lnSpc>
-                          <a:spcPct val="100000"/>
-                        </a:lnSpc>
-                        <a:spcBef>
-                          <a:spcPts val="0"/>
-                        </a:spcBef>
-                        <a:spcAft>
-                          <a:spcPts val="0"/>
-                        </a:spcAft>
-                        <a:buClr>
-                          <a:schemeClr val="lt1"/>
-                        </a:buClr>
-                        <a:buSzPts val="1100"/>
-                        <a:buFont typeface="Consolas"/>
-                        <a:buNone/>
-                      </a:pPr>
-                      <a:r>
-                        <a:rPr lang="en" sz="1100" u="none" strike="noStrike" cap="none">
-                          <a:solidFill>
-                            <a:schemeClr val="lt1"/>
-                          </a:solidFill>
-                          <a:latin typeface="Consolas"/>
-                          <a:ea typeface="Consolas"/>
-                          <a:cs typeface="Consolas"/>
-                          <a:sym typeface="Consolas"/>
-                        </a:rPr>
-                        <a:t>int("abc")</a:t>
-                      </a:r>
-                      <a:endParaRPr sz="1100" u="none" strike="noStrike" cap="none">
-                        <a:solidFill>
-                          <a:schemeClr val="lt1"/>
-                        </a:solidFill>
-                        <a:latin typeface="Consolas"/>
-                        <a:ea typeface="Consolas"/>
-                        <a:cs typeface="Consolas"/>
-                        <a:sym typeface="Consolas"/>
-                      </a:endParaRPr>
-                    </a:p>
-                  </a:txBody>
-                  <a:tcPr marL="91425" marR="91425" marT="91425" marB="91425">
-                    <a:lnL w="9525" cap="flat" cmpd="sng">
-                      <a:solidFill>
-                        <a:srgbClr val="000000"/>
-                      </a:solidFill>
-                      <a:prstDash val="solid"/>
-                      <a:round/>
-                      <a:headEnd type="none" w="sm" len="sm"/>
-                      <a:tailEnd type="none" w="sm" len="sm"/>
-                    </a:lnL>
-                    <a:lnR w="9525" cap="flat" cmpd="sng">
-                      <a:solidFill>
-                        <a:srgbClr val="000000"/>
-                      </a:solidFill>
-                      <a:prstDash val="solid"/>
-                      <a:round/>
-                      <a:headEnd type="none" w="sm" len="sm"/>
-                      <a:tailEnd type="none" w="sm" len="sm"/>
-                    </a:lnR>
-                    <a:lnT w="9525" cap="flat" cmpd="sng">
-                      <a:solidFill>
-                        <a:srgbClr val="000000"/>
-                      </a:solidFill>
-                      <a:prstDash val="solid"/>
-                      <a:round/>
-                      <a:headEnd type="none" w="sm" len="sm"/>
-                      <a:tailEnd type="none" w="sm" len="sm"/>
-                    </a:lnT>
-                    <a:lnB w="9525" cap="flat" cmpd="sng">
-                      <a:solidFill>
-                        <a:srgbClr val="000000"/>
-                      </a:solidFill>
-                      <a:prstDash val="solid"/>
-                      <a:round/>
-                      <a:headEnd type="none" w="sm" len="sm"/>
-                      <a:tailEnd type="none" w="sm" len="sm"/>
-                    </a:lnB>
-                  </a:tcPr>
-                </a:tc>
-                <a:extLst>
-                  <a:ext uri="{0D108BD9-81ED-4DB2-BD59-A6C34878D82A}">
-                    <a16:rowId xmlns:a16="http://schemas.microsoft.com/office/drawing/2014/main" val="10004"/>
-                  </a:ext>
-                </a:extLst>
-              </a:tr>
-              <a:tr h="328325">
-                <a:tc>
-                  <a:txBody>
-                    <a:bodyPr/>
-                    <a:lstStyle/>
-                    <a:p>
-                      <a:pPr marL="0" marR="0" lvl="0" indent="0" algn="l" rtl="0">
-                        <a:lnSpc>
-                          <a:spcPct val="100000"/>
-                        </a:lnSpc>
-                        <a:spcBef>
-                          <a:spcPts val="0"/>
-                        </a:spcBef>
-                        <a:spcAft>
-                          <a:spcPts val="0"/>
-                        </a:spcAft>
-                        <a:buClr>
-                          <a:schemeClr val="lt1"/>
-                        </a:buClr>
-                        <a:buSzPts val="1100"/>
-                        <a:buFont typeface="Consolas"/>
-                        <a:buNone/>
-                      </a:pPr>
-                      <a:r>
-                        <a:rPr lang="en" sz="1100" b="1" u="none" strike="noStrike" cap="none">
-                          <a:solidFill>
-                            <a:schemeClr val="lt1"/>
-                          </a:solidFill>
-                          <a:latin typeface="Consolas"/>
-                          <a:ea typeface="Consolas"/>
-                          <a:cs typeface="Consolas"/>
-                          <a:sym typeface="Consolas"/>
-                        </a:rPr>
-                        <a:t>ZeroDivisionError</a:t>
-                      </a:r>
-                      <a:endParaRPr sz="1100" b="1" u="none" strike="noStrike" cap="none">
-                        <a:solidFill>
-                          <a:schemeClr val="lt1"/>
-                        </a:solidFill>
-                        <a:latin typeface="Consolas"/>
-                        <a:ea typeface="Consolas"/>
-                        <a:cs typeface="Consolas"/>
-                        <a:sym typeface="Consolas"/>
-                      </a:endParaRPr>
-                    </a:p>
-                  </a:txBody>
-                  <a:tcPr marL="91425" marR="91425" marT="91425" marB="91425">
-                    <a:lnL w="9525" cap="flat" cmpd="sng">
-                      <a:solidFill>
-                        <a:srgbClr val="000000"/>
-                      </a:solidFill>
-                      <a:prstDash val="solid"/>
-                      <a:round/>
-                      <a:headEnd type="none" w="sm" len="sm"/>
-                      <a:tailEnd type="none" w="sm" len="sm"/>
-                    </a:lnL>
-                    <a:lnR w="9525" cap="flat" cmpd="sng">
-                      <a:solidFill>
-                        <a:srgbClr val="000000"/>
-                      </a:solidFill>
-                      <a:prstDash val="solid"/>
-                      <a:round/>
-                      <a:headEnd type="none" w="sm" len="sm"/>
-                      <a:tailEnd type="none" w="sm" len="sm"/>
-                    </a:lnR>
-                    <a:lnT w="9525" cap="flat" cmpd="sng">
-                      <a:solidFill>
-                        <a:srgbClr val="000000"/>
-                      </a:solidFill>
-                      <a:prstDash val="solid"/>
-                      <a:round/>
-                      <a:headEnd type="none" w="sm" len="sm"/>
-                      <a:tailEnd type="none" w="sm" len="sm"/>
-                    </a:lnT>
-                    <a:lnB w="9525" cap="flat" cmpd="sng">
-                      <a:solidFill>
-                        <a:srgbClr val="000000"/>
-                      </a:solidFill>
-                      <a:prstDash val="solid"/>
-                      <a:round/>
-                      <a:headEnd type="none" w="sm" len="sm"/>
-                      <a:tailEnd type="none" w="sm" len="sm"/>
-                    </a:lnB>
-                  </a:tcPr>
-                </a:tc>
-                <a:tc>
-                  <a:txBody>
-                    <a:bodyPr/>
-                    <a:lstStyle/>
-                    <a:p>
-                      <a:pPr marL="0" marR="0" lvl="0" indent="0" algn="l" rtl="0">
-                        <a:lnSpc>
-                          <a:spcPct val="100000"/>
-                        </a:lnSpc>
-                        <a:spcBef>
-                          <a:spcPts val="0"/>
-                        </a:spcBef>
-                        <a:spcAft>
-                          <a:spcPts val="0"/>
-                        </a:spcAft>
-                        <a:buClr>
-                          <a:schemeClr val="lt1"/>
-                        </a:buClr>
-                        <a:buSzPts val="1100"/>
-                        <a:buFont typeface="Consolas"/>
-                        <a:buNone/>
-                      </a:pPr>
-                      <a:r>
-                        <a:rPr lang="en" sz="1100" u="none" strike="noStrike" cap="none">
-                          <a:solidFill>
-                            <a:schemeClr val="lt1"/>
-                          </a:solidFill>
-                          <a:latin typeface="Consolas"/>
-                          <a:ea typeface="Consolas"/>
-                          <a:cs typeface="Consolas"/>
-                          <a:sym typeface="Consolas"/>
-                        </a:rPr>
-                        <a:t>Dividing by zero</a:t>
-                      </a:r>
-                      <a:endParaRPr sz="1100" u="none" strike="noStrike" cap="none">
-                        <a:solidFill>
-                          <a:schemeClr val="lt1"/>
-                        </a:solidFill>
-                        <a:latin typeface="Consolas"/>
-                        <a:ea typeface="Consolas"/>
-                        <a:cs typeface="Consolas"/>
-                        <a:sym typeface="Consolas"/>
-                      </a:endParaRPr>
-                    </a:p>
-                  </a:txBody>
-                  <a:tcPr marL="91425" marR="91425" marT="91425" marB="91425">
-                    <a:lnL w="9525" cap="flat" cmpd="sng">
-                      <a:solidFill>
-                        <a:srgbClr val="000000"/>
-                      </a:solidFill>
-                      <a:prstDash val="solid"/>
-                      <a:round/>
-                      <a:headEnd type="none" w="sm" len="sm"/>
-                      <a:tailEnd type="none" w="sm" len="sm"/>
-                    </a:lnL>
-                    <a:lnR w="9525" cap="flat" cmpd="sng">
-                      <a:solidFill>
-                        <a:srgbClr val="000000"/>
-                      </a:solidFill>
-                      <a:prstDash val="solid"/>
-                      <a:round/>
-                      <a:headEnd type="none" w="sm" len="sm"/>
-                      <a:tailEnd type="none" w="sm" len="sm"/>
-                    </a:lnR>
-                    <a:lnT w="9525" cap="flat" cmpd="sng">
-                      <a:solidFill>
-                        <a:srgbClr val="000000"/>
-                      </a:solidFill>
-                      <a:prstDash val="solid"/>
-                      <a:round/>
-                      <a:headEnd type="none" w="sm" len="sm"/>
-                      <a:tailEnd type="none" w="sm" len="sm"/>
-                    </a:lnT>
-                    <a:lnB w="9525" cap="flat" cmpd="sng">
-                      <a:solidFill>
-                        <a:srgbClr val="000000"/>
-                      </a:solidFill>
-                      <a:prstDash val="solid"/>
-                      <a:round/>
-                      <a:headEnd type="none" w="sm" len="sm"/>
-                      <a:tailEnd type="none" w="sm" len="sm"/>
-                    </a:lnB>
-                  </a:tcPr>
-                </a:tc>
-                <a:tc>
-                  <a:txBody>
-                    <a:bodyPr/>
-                    <a:lstStyle/>
-                    <a:p>
-                      <a:pPr marL="0" marR="0" lvl="0" indent="0" algn="l" rtl="0">
-                        <a:lnSpc>
-                          <a:spcPct val="100000"/>
-                        </a:lnSpc>
-                        <a:spcBef>
-                          <a:spcPts val="0"/>
-                        </a:spcBef>
-                        <a:spcAft>
-                          <a:spcPts val="0"/>
-                        </a:spcAft>
-                        <a:buClr>
-                          <a:schemeClr val="lt1"/>
-                        </a:buClr>
-                        <a:buSzPts val="1100"/>
-                        <a:buFont typeface="Consolas"/>
-                        <a:buNone/>
-                      </a:pPr>
-                      <a:r>
-                        <a:rPr lang="en" sz="1100" u="none" strike="noStrike" cap="none">
-                          <a:solidFill>
-                            <a:schemeClr val="lt1"/>
-                          </a:solidFill>
-                          <a:latin typeface="Consolas"/>
-                          <a:ea typeface="Consolas"/>
-                          <a:cs typeface="Consolas"/>
-                          <a:sym typeface="Consolas"/>
-                        </a:rPr>
-                        <a:t>5 / 0</a:t>
-                      </a:r>
-                      <a:endParaRPr sz="1100" u="none" strike="noStrike" cap="none">
-                        <a:solidFill>
-                          <a:schemeClr val="lt1"/>
-                        </a:solidFill>
-                        <a:latin typeface="Consolas"/>
-                        <a:ea typeface="Consolas"/>
-                        <a:cs typeface="Consolas"/>
-                        <a:sym typeface="Consolas"/>
-                      </a:endParaRPr>
-                    </a:p>
-                  </a:txBody>
-                  <a:tcPr marL="91425" marR="91425" marT="91425" marB="91425">
-                    <a:lnL w="9525" cap="flat" cmpd="sng">
-                      <a:solidFill>
-                        <a:srgbClr val="000000"/>
-                      </a:solidFill>
-                      <a:prstDash val="solid"/>
-                      <a:round/>
-                      <a:headEnd type="none" w="sm" len="sm"/>
-                      <a:tailEnd type="none" w="sm" len="sm"/>
-                    </a:lnL>
-                    <a:lnR w="9525" cap="flat" cmpd="sng">
-                      <a:solidFill>
-                        <a:srgbClr val="000000"/>
-                      </a:solidFill>
-                      <a:prstDash val="solid"/>
-                      <a:round/>
-                      <a:headEnd type="none" w="sm" len="sm"/>
-                      <a:tailEnd type="none" w="sm" len="sm"/>
-                    </a:lnR>
-                    <a:lnT w="9525" cap="flat" cmpd="sng">
-                      <a:solidFill>
-                        <a:srgbClr val="000000"/>
-                      </a:solidFill>
-                      <a:prstDash val="solid"/>
-                      <a:round/>
-                      <a:headEnd type="none" w="sm" len="sm"/>
-                      <a:tailEnd type="none" w="sm" len="sm"/>
-                    </a:lnT>
-                    <a:lnB w="9525" cap="flat" cmpd="sng">
-                      <a:solidFill>
-                        <a:srgbClr val="000000"/>
-                      </a:solidFill>
-                      <a:prstDash val="solid"/>
-                      <a:round/>
-                      <a:headEnd type="none" w="sm" len="sm"/>
-                      <a:tailEnd type="none" w="sm" len="sm"/>
-                    </a:lnB>
-                  </a:tcPr>
-                </a:tc>
-                <a:extLst>
-                  <a:ext uri="{0D108BD9-81ED-4DB2-BD59-A6C34878D82A}">
-                    <a16:rowId xmlns:a16="http://schemas.microsoft.com/office/drawing/2014/main" val="10005"/>
-                  </a:ext>
-                </a:extLst>
-              </a:tr>
-              <a:tr h="328325">
-                <a:tc>
-                  <a:txBody>
-                    <a:bodyPr/>
-                    <a:lstStyle/>
-                    <a:p>
-                      <a:pPr marL="0" marR="0" lvl="0" indent="0" algn="l" rtl="0">
-                        <a:lnSpc>
-                          <a:spcPct val="100000"/>
-                        </a:lnSpc>
-                        <a:spcBef>
-                          <a:spcPts val="0"/>
-                        </a:spcBef>
-                        <a:spcAft>
-                          <a:spcPts val="0"/>
-                        </a:spcAft>
-                        <a:buClr>
-                          <a:schemeClr val="lt1"/>
-                        </a:buClr>
-                        <a:buSzPts val="1100"/>
-                        <a:buFont typeface="Consolas"/>
-                        <a:buNone/>
-                      </a:pPr>
-                      <a:r>
-                        <a:rPr lang="en" sz="1100" b="1" u="none" strike="noStrike" cap="none">
-                          <a:solidFill>
-                            <a:schemeClr val="lt1"/>
-                          </a:solidFill>
-                          <a:latin typeface="Consolas"/>
-                          <a:ea typeface="Consolas"/>
-                          <a:cs typeface="Consolas"/>
-                          <a:sym typeface="Consolas"/>
-                        </a:rPr>
-                        <a:t>IndexError</a:t>
-                      </a:r>
-                      <a:endParaRPr sz="1100" b="1" u="none" strike="noStrike" cap="none">
-                        <a:solidFill>
-                          <a:schemeClr val="lt1"/>
-                        </a:solidFill>
-                        <a:latin typeface="Consolas"/>
-                        <a:ea typeface="Consolas"/>
-                        <a:cs typeface="Consolas"/>
-                        <a:sym typeface="Consolas"/>
-                      </a:endParaRPr>
-                    </a:p>
-                  </a:txBody>
-                  <a:tcPr marL="91425" marR="91425" marT="91425" marB="91425">
-                    <a:lnL w="9525" cap="flat" cmpd="sng">
-                      <a:solidFill>
-                        <a:srgbClr val="000000"/>
-                      </a:solidFill>
-                      <a:prstDash val="solid"/>
-                      <a:round/>
-                      <a:headEnd type="none" w="sm" len="sm"/>
-                      <a:tailEnd type="none" w="sm" len="sm"/>
-                    </a:lnL>
-                    <a:lnR w="9525" cap="flat" cmpd="sng">
-                      <a:solidFill>
-                        <a:srgbClr val="000000"/>
-                      </a:solidFill>
-                      <a:prstDash val="solid"/>
-                      <a:round/>
-                      <a:headEnd type="none" w="sm" len="sm"/>
-                      <a:tailEnd type="none" w="sm" len="sm"/>
-                    </a:lnR>
-                    <a:lnT w="9525" cap="flat" cmpd="sng">
-                      <a:solidFill>
-                        <a:srgbClr val="000000"/>
-                      </a:solidFill>
-                      <a:prstDash val="solid"/>
-                      <a:round/>
-                      <a:headEnd type="none" w="sm" len="sm"/>
-                      <a:tailEnd type="none" w="sm" len="sm"/>
-                    </a:lnT>
-                    <a:lnB w="9525" cap="flat" cmpd="sng">
-                      <a:solidFill>
-                        <a:srgbClr val="000000"/>
-                      </a:solidFill>
-                      <a:prstDash val="solid"/>
-                      <a:round/>
-                      <a:headEnd type="none" w="sm" len="sm"/>
-                      <a:tailEnd type="none" w="sm" len="sm"/>
-                    </a:lnB>
-                  </a:tcPr>
-                </a:tc>
-                <a:tc>
-                  <a:txBody>
-                    <a:bodyPr/>
-                    <a:lstStyle/>
-                    <a:p>
-                      <a:pPr marL="0" marR="0" lvl="0" indent="0" algn="l" rtl="0">
-                        <a:lnSpc>
-                          <a:spcPct val="100000"/>
-                        </a:lnSpc>
-                        <a:spcBef>
-                          <a:spcPts val="0"/>
-                        </a:spcBef>
-                        <a:spcAft>
-                          <a:spcPts val="0"/>
-                        </a:spcAft>
-                        <a:buClr>
-                          <a:schemeClr val="lt1"/>
-                        </a:buClr>
-                        <a:buSzPts val="1100"/>
-                        <a:buFont typeface="Consolas"/>
-                        <a:buNone/>
-                      </a:pPr>
-                      <a:r>
-                        <a:rPr lang="en" sz="1100" u="none" strike="noStrike" cap="none">
-                          <a:solidFill>
-                            <a:schemeClr val="lt1"/>
-                          </a:solidFill>
-                          <a:latin typeface="Consolas"/>
-                          <a:ea typeface="Consolas"/>
-                          <a:cs typeface="Consolas"/>
-                          <a:sym typeface="Consolas"/>
-                        </a:rPr>
-                        <a:t>Index out of range in a sequence</a:t>
-                      </a:r>
-                      <a:endParaRPr sz="1100" u="none" strike="noStrike" cap="none">
-                        <a:solidFill>
-                          <a:schemeClr val="lt1"/>
-                        </a:solidFill>
-                        <a:latin typeface="Consolas"/>
-                        <a:ea typeface="Consolas"/>
-                        <a:cs typeface="Consolas"/>
-                        <a:sym typeface="Consolas"/>
-                      </a:endParaRPr>
-                    </a:p>
-                  </a:txBody>
-                  <a:tcPr marL="91425" marR="91425" marT="91425" marB="91425">
-                    <a:lnL w="9525" cap="flat" cmpd="sng">
-                      <a:solidFill>
-                        <a:srgbClr val="000000"/>
-                      </a:solidFill>
-                      <a:prstDash val="solid"/>
-                      <a:round/>
-                      <a:headEnd type="none" w="sm" len="sm"/>
-                      <a:tailEnd type="none" w="sm" len="sm"/>
-                    </a:lnL>
-                    <a:lnR w="9525" cap="flat" cmpd="sng">
-                      <a:solidFill>
-                        <a:srgbClr val="000000"/>
-                      </a:solidFill>
-                      <a:prstDash val="solid"/>
-                      <a:round/>
-                      <a:headEnd type="none" w="sm" len="sm"/>
-                      <a:tailEnd type="none" w="sm" len="sm"/>
-                    </a:lnR>
-                    <a:lnT w="9525" cap="flat" cmpd="sng">
-                      <a:solidFill>
-                        <a:srgbClr val="000000"/>
-                      </a:solidFill>
-                      <a:prstDash val="solid"/>
-                      <a:round/>
-                      <a:headEnd type="none" w="sm" len="sm"/>
-                      <a:tailEnd type="none" w="sm" len="sm"/>
-                    </a:lnT>
-                    <a:lnB w="9525" cap="flat" cmpd="sng">
-                      <a:solidFill>
-                        <a:srgbClr val="000000"/>
-                      </a:solidFill>
-                      <a:prstDash val="solid"/>
-                      <a:round/>
-                      <a:headEnd type="none" w="sm" len="sm"/>
-                      <a:tailEnd type="none" w="sm" len="sm"/>
-                    </a:lnB>
-                  </a:tcPr>
-                </a:tc>
-                <a:tc>
-                  <a:txBody>
-                    <a:bodyPr/>
-                    <a:lstStyle/>
-                    <a:p>
-                      <a:pPr marL="0" marR="0" lvl="0" indent="0" algn="l" rtl="0">
-                        <a:lnSpc>
-                          <a:spcPct val="100000"/>
-                        </a:lnSpc>
-                        <a:spcBef>
-                          <a:spcPts val="0"/>
-                        </a:spcBef>
-                        <a:spcAft>
-                          <a:spcPts val="0"/>
-                        </a:spcAft>
-                        <a:buClr>
-                          <a:schemeClr val="lt1"/>
-                        </a:buClr>
-                        <a:buSzPts val="1100"/>
-                        <a:buFont typeface="Consolas"/>
-                        <a:buNone/>
-                      </a:pPr>
-                      <a:r>
-                        <a:rPr lang="en" sz="1100" u="none" strike="noStrike" cap="none">
-                          <a:solidFill>
-                            <a:schemeClr val="lt1"/>
-                          </a:solidFill>
-                          <a:latin typeface="Consolas"/>
-                          <a:ea typeface="Consolas"/>
-                          <a:cs typeface="Consolas"/>
-                          <a:sym typeface="Consolas"/>
-                        </a:rPr>
-                        <a:t>list[5] with 3 items</a:t>
-                      </a:r>
-                      <a:endParaRPr sz="1100" u="none" strike="noStrike" cap="none">
-                        <a:solidFill>
-                          <a:schemeClr val="lt1"/>
-                        </a:solidFill>
-                        <a:latin typeface="Consolas"/>
-                        <a:ea typeface="Consolas"/>
-                        <a:cs typeface="Consolas"/>
-                        <a:sym typeface="Consolas"/>
-                      </a:endParaRPr>
-                    </a:p>
-                  </a:txBody>
-                  <a:tcPr marL="91425" marR="91425" marT="91425" marB="91425">
-                    <a:lnL w="9525" cap="flat" cmpd="sng">
-                      <a:solidFill>
-                        <a:srgbClr val="000000"/>
-                      </a:solidFill>
-                      <a:prstDash val="solid"/>
-                      <a:round/>
-                      <a:headEnd type="none" w="sm" len="sm"/>
-                      <a:tailEnd type="none" w="sm" len="sm"/>
-                    </a:lnL>
-                    <a:lnR w="9525" cap="flat" cmpd="sng">
-                      <a:solidFill>
-                        <a:srgbClr val="000000"/>
-                      </a:solidFill>
-                      <a:prstDash val="solid"/>
-                      <a:round/>
-                      <a:headEnd type="none" w="sm" len="sm"/>
-                      <a:tailEnd type="none" w="sm" len="sm"/>
-                    </a:lnR>
-                    <a:lnT w="9525" cap="flat" cmpd="sng">
-                      <a:solidFill>
-                        <a:srgbClr val="000000"/>
-                      </a:solidFill>
-                      <a:prstDash val="solid"/>
-                      <a:round/>
-                      <a:headEnd type="none" w="sm" len="sm"/>
-                      <a:tailEnd type="none" w="sm" len="sm"/>
-                    </a:lnT>
-                    <a:lnB w="9525" cap="flat" cmpd="sng">
-                      <a:solidFill>
-                        <a:srgbClr val="000000"/>
-                      </a:solidFill>
-                      <a:prstDash val="solid"/>
-                      <a:round/>
-                      <a:headEnd type="none" w="sm" len="sm"/>
-                      <a:tailEnd type="none" w="sm" len="sm"/>
-                    </a:lnB>
-                  </a:tcPr>
-                </a:tc>
-                <a:extLst>
-                  <a:ext uri="{0D108BD9-81ED-4DB2-BD59-A6C34878D82A}">
-                    <a16:rowId xmlns:a16="http://schemas.microsoft.com/office/drawing/2014/main" val="10006"/>
-                  </a:ext>
-                </a:extLst>
-              </a:tr>
-              <a:tr h="328325">
-                <a:tc>
-                  <a:txBody>
-                    <a:bodyPr/>
-                    <a:lstStyle/>
-                    <a:p>
-                      <a:pPr marL="0" marR="0" lvl="0" indent="0" algn="l" rtl="0">
-                        <a:lnSpc>
-                          <a:spcPct val="100000"/>
-                        </a:lnSpc>
-                        <a:spcBef>
-                          <a:spcPts val="0"/>
-                        </a:spcBef>
-                        <a:spcAft>
-                          <a:spcPts val="0"/>
-                        </a:spcAft>
-                        <a:buClr>
-                          <a:schemeClr val="lt1"/>
-                        </a:buClr>
-                        <a:buSzPts val="1100"/>
-                        <a:buFont typeface="Consolas"/>
-                        <a:buNone/>
-                      </a:pPr>
-                      <a:r>
-                        <a:rPr lang="en" sz="1100" b="1" u="none" strike="noStrike" cap="none">
-                          <a:solidFill>
-                            <a:schemeClr val="lt1"/>
-                          </a:solidFill>
-                          <a:latin typeface="Consolas"/>
-                          <a:ea typeface="Consolas"/>
-                          <a:cs typeface="Consolas"/>
-                          <a:sym typeface="Consolas"/>
-                        </a:rPr>
-                        <a:t>KeyError</a:t>
-                      </a:r>
-                      <a:endParaRPr sz="1100" b="1" u="none" strike="noStrike" cap="none">
-                        <a:solidFill>
-                          <a:schemeClr val="lt1"/>
-                        </a:solidFill>
-                        <a:latin typeface="Consolas"/>
-                        <a:ea typeface="Consolas"/>
-                        <a:cs typeface="Consolas"/>
-                        <a:sym typeface="Consolas"/>
-                      </a:endParaRPr>
-                    </a:p>
-                  </a:txBody>
-                  <a:tcPr marL="91425" marR="91425" marT="91425" marB="91425">
-                    <a:lnL w="9525" cap="flat" cmpd="sng">
-                      <a:solidFill>
-                        <a:srgbClr val="000000"/>
-                      </a:solidFill>
-                      <a:prstDash val="solid"/>
-                      <a:round/>
-                      <a:headEnd type="none" w="sm" len="sm"/>
-                      <a:tailEnd type="none" w="sm" len="sm"/>
-                    </a:lnL>
-                    <a:lnR w="9525" cap="flat" cmpd="sng">
-                      <a:solidFill>
-                        <a:srgbClr val="000000"/>
-                      </a:solidFill>
-                      <a:prstDash val="solid"/>
-                      <a:round/>
-                      <a:headEnd type="none" w="sm" len="sm"/>
-                      <a:tailEnd type="none" w="sm" len="sm"/>
-                    </a:lnR>
-                    <a:lnT w="9525" cap="flat" cmpd="sng">
-                      <a:solidFill>
-                        <a:srgbClr val="000000"/>
-                      </a:solidFill>
-                      <a:prstDash val="solid"/>
-                      <a:round/>
-                      <a:headEnd type="none" w="sm" len="sm"/>
-                      <a:tailEnd type="none" w="sm" len="sm"/>
-                    </a:lnT>
-                    <a:lnB w="9525" cap="flat" cmpd="sng">
-                      <a:solidFill>
-                        <a:srgbClr val="000000"/>
-                      </a:solidFill>
-                      <a:prstDash val="solid"/>
-                      <a:round/>
-                      <a:headEnd type="none" w="sm" len="sm"/>
-                      <a:tailEnd type="none" w="sm" len="sm"/>
-                    </a:lnB>
-                  </a:tcPr>
-                </a:tc>
-                <a:tc>
-                  <a:txBody>
-                    <a:bodyPr/>
-                    <a:lstStyle/>
-                    <a:p>
-                      <a:pPr marL="0" marR="0" lvl="0" indent="0" algn="l" rtl="0">
-                        <a:lnSpc>
-                          <a:spcPct val="100000"/>
-                        </a:lnSpc>
-                        <a:spcBef>
-                          <a:spcPts val="0"/>
-                        </a:spcBef>
-                        <a:spcAft>
-                          <a:spcPts val="0"/>
-                        </a:spcAft>
-                        <a:buClr>
-                          <a:schemeClr val="lt1"/>
-                        </a:buClr>
-                        <a:buSzPts val="1100"/>
-                        <a:buFont typeface="Consolas"/>
-                        <a:buNone/>
-                      </a:pPr>
-                      <a:r>
-                        <a:rPr lang="en" sz="1100" u="none" strike="noStrike" cap="none">
-                          <a:solidFill>
-                            <a:schemeClr val="lt1"/>
-                          </a:solidFill>
-                          <a:latin typeface="Consolas"/>
-                          <a:ea typeface="Consolas"/>
-                          <a:cs typeface="Consolas"/>
-                          <a:sym typeface="Consolas"/>
-                        </a:rPr>
-                        <a:t>Missing key in a dictionary</a:t>
-                      </a:r>
-                      <a:endParaRPr sz="1100" u="none" strike="noStrike" cap="none">
-                        <a:solidFill>
-                          <a:schemeClr val="lt1"/>
-                        </a:solidFill>
-                        <a:latin typeface="Consolas"/>
-                        <a:ea typeface="Consolas"/>
-                        <a:cs typeface="Consolas"/>
-                        <a:sym typeface="Consolas"/>
-                      </a:endParaRPr>
-                    </a:p>
-                  </a:txBody>
-                  <a:tcPr marL="91425" marR="91425" marT="91425" marB="91425">
-                    <a:lnL w="9525" cap="flat" cmpd="sng">
-                      <a:solidFill>
-                        <a:srgbClr val="000000"/>
-                      </a:solidFill>
-                      <a:prstDash val="solid"/>
-                      <a:round/>
-                      <a:headEnd type="none" w="sm" len="sm"/>
-                      <a:tailEnd type="none" w="sm" len="sm"/>
-                    </a:lnL>
-                    <a:lnR w="9525" cap="flat" cmpd="sng">
-                      <a:solidFill>
-                        <a:srgbClr val="000000"/>
-                      </a:solidFill>
-                      <a:prstDash val="solid"/>
-                      <a:round/>
-                      <a:headEnd type="none" w="sm" len="sm"/>
-                      <a:tailEnd type="none" w="sm" len="sm"/>
-                    </a:lnR>
-                    <a:lnT w="9525" cap="flat" cmpd="sng">
-                      <a:solidFill>
-                        <a:srgbClr val="000000"/>
-                      </a:solidFill>
-                      <a:prstDash val="solid"/>
-                      <a:round/>
-                      <a:headEnd type="none" w="sm" len="sm"/>
-                      <a:tailEnd type="none" w="sm" len="sm"/>
-                    </a:lnT>
-                    <a:lnB w="9525" cap="flat" cmpd="sng">
-                      <a:solidFill>
-                        <a:srgbClr val="000000"/>
-                      </a:solidFill>
-                      <a:prstDash val="solid"/>
-                      <a:round/>
-                      <a:headEnd type="none" w="sm" len="sm"/>
-                      <a:tailEnd type="none" w="sm" len="sm"/>
-                    </a:lnB>
-                  </a:tcPr>
-                </a:tc>
-                <a:tc>
-                  <a:txBody>
-                    <a:bodyPr/>
-                    <a:lstStyle/>
-                    <a:p>
-                      <a:pPr marL="0" marR="0" lvl="0" indent="0" algn="l" rtl="0">
-                        <a:lnSpc>
-                          <a:spcPct val="100000"/>
-                        </a:lnSpc>
-                        <a:spcBef>
-                          <a:spcPts val="0"/>
-                        </a:spcBef>
-                        <a:spcAft>
-                          <a:spcPts val="0"/>
-                        </a:spcAft>
-                        <a:buClr>
-                          <a:schemeClr val="lt1"/>
-                        </a:buClr>
-                        <a:buSzPts val="1100"/>
-                        <a:buFont typeface="Consolas"/>
-                        <a:buNone/>
-                      </a:pPr>
-                      <a:r>
-                        <a:rPr lang="en" sz="1100" u="none" strike="noStrike" cap="none">
-                          <a:solidFill>
-                            <a:schemeClr val="lt1"/>
-                          </a:solidFill>
-                          <a:latin typeface="Consolas"/>
-                          <a:ea typeface="Consolas"/>
-                          <a:cs typeface="Consolas"/>
-                          <a:sym typeface="Consolas"/>
-                        </a:rPr>
-                        <a:t>dict["missing"]</a:t>
-                      </a:r>
-                      <a:endParaRPr sz="1100" u="none" strike="noStrike" cap="none">
-                        <a:solidFill>
-                          <a:schemeClr val="lt1"/>
-                        </a:solidFill>
-                        <a:latin typeface="Consolas"/>
-                        <a:ea typeface="Consolas"/>
-                        <a:cs typeface="Consolas"/>
-                        <a:sym typeface="Consolas"/>
-                      </a:endParaRPr>
-                    </a:p>
-                  </a:txBody>
-                  <a:tcPr marL="91425" marR="91425" marT="91425" marB="91425">
-                    <a:lnL w="9525" cap="flat" cmpd="sng">
-                      <a:solidFill>
-                        <a:srgbClr val="000000"/>
-                      </a:solidFill>
-                      <a:prstDash val="solid"/>
-                      <a:round/>
-                      <a:headEnd type="none" w="sm" len="sm"/>
-                      <a:tailEnd type="none" w="sm" len="sm"/>
-                    </a:lnL>
-                    <a:lnR w="9525" cap="flat" cmpd="sng">
-                      <a:solidFill>
-                        <a:srgbClr val="000000"/>
-                      </a:solidFill>
-                      <a:prstDash val="solid"/>
-                      <a:round/>
-                      <a:headEnd type="none" w="sm" len="sm"/>
-                      <a:tailEnd type="none" w="sm" len="sm"/>
-                    </a:lnR>
-                    <a:lnT w="9525" cap="flat" cmpd="sng">
-                      <a:solidFill>
-                        <a:srgbClr val="000000"/>
-                      </a:solidFill>
-                      <a:prstDash val="solid"/>
-                      <a:round/>
-                      <a:headEnd type="none" w="sm" len="sm"/>
-                      <a:tailEnd type="none" w="sm" len="sm"/>
-                    </a:lnT>
-                    <a:lnB w="9525" cap="flat" cmpd="sng">
-                      <a:solidFill>
-                        <a:srgbClr val="000000"/>
-                      </a:solidFill>
-                      <a:prstDash val="solid"/>
-                      <a:round/>
-                      <a:headEnd type="none" w="sm" len="sm"/>
-                      <a:tailEnd type="none" w="sm" len="sm"/>
-                    </a:lnB>
-                  </a:tcPr>
-                </a:tc>
-                <a:extLst>
-                  <a:ext uri="{0D108BD9-81ED-4DB2-BD59-A6C34878D82A}">
-                    <a16:rowId xmlns:a16="http://schemas.microsoft.com/office/drawing/2014/main" val="10007"/>
-                  </a:ext>
-                </a:extLst>
-              </a:tr>
-              <a:tr h="328325">
-                <a:tc>
-                  <a:txBody>
-                    <a:bodyPr/>
-                    <a:lstStyle/>
-                    <a:p>
-                      <a:pPr marL="0" marR="0" lvl="0" indent="0" algn="l" rtl="0">
-                        <a:lnSpc>
-                          <a:spcPct val="100000"/>
-                        </a:lnSpc>
-                        <a:spcBef>
-                          <a:spcPts val="0"/>
-                        </a:spcBef>
-                        <a:spcAft>
-                          <a:spcPts val="0"/>
-                        </a:spcAft>
-                        <a:buClr>
-                          <a:schemeClr val="lt1"/>
-                        </a:buClr>
-                        <a:buSzPts val="1100"/>
-                        <a:buFont typeface="Consolas"/>
-                        <a:buNone/>
-                      </a:pPr>
-                      <a:r>
-                        <a:rPr lang="en" sz="1100" b="1" u="none" strike="noStrike" cap="none">
-                          <a:solidFill>
-                            <a:schemeClr val="lt1"/>
-                          </a:solidFill>
-                          <a:latin typeface="Consolas"/>
-                          <a:ea typeface="Consolas"/>
-                          <a:cs typeface="Consolas"/>
-                          <a:sym typeface="Consolas"/>
-                        </a:rPr>
-                        <a:t>AttributeError</a:t>
-                      </a:r>
-                      <a:endParaRPr sz="1100" b="1" u="none" strike="noStrike" cap="none">
-                        <a:solidFill>
-                          <a:schemeClr val="lt1"/>
-                        </a:solidFill>
-                        <a:latin typeface="Consolas"/>
-                        <a:ea typeface="Consolas"/>
-                        <a:cs typeface="Consolas"/>
-                        <a:sym typeface="Consolas"/>
-                      </a:endParaRPr>
-                    </a:p>
-                  </a:txBody>
-                  <a:tcPr marL="91425" marR="91425" marT="91425" marB="91425">
-                    <a:lnL w="9525" cap="flat" cmpd="sng">
-                      <a:solidFill>
-                        <a:srgbClr val="000000"/>
-                      </a:solidFill>
-                      <a:prstDash val="solid"/>
-                      <a:round/>
-                      <a:headEnd type="none" w="sm" len="sm"/>
-                      <a:tailEnd type="none" w="sm" len="sm"/>
-                    </a:lnL>
-                    <a:lnR w="9525" cap="flat" cmpd="sng">
-                      <a:solidFill>
-                        <a:srgbClr val="000000"/>
-                      </a:solidFill>
-                      <a:prstDash val="solid"/>
-                      <a:round/>
-                      <a:headEnd type="none" w="sm" len="sm"/>
-                      <a:tailEnd type="none" w="sm" len="sm"/>
-                    </a:lnR>
-                    <a:lnT w="9525" cap="flat" cmpd="sng">
-                      <a:solidFill>
-                        <a:srgbClr val="000000"/>
-                      </a:solidFill>
-                      <a:prstDash val="solid"/>
-                      <a:round/>
-                      <a:headEnd type="none" w="sm" len="sm"/>
-                      <a:tailEnd type="none" w="sm" len="sm"/>
-                    </a:lnT>
-                    <a:lnB w="9525" cap="flat" cmpd="sng">
-                      <a:solidFill>
-                        <a:srgbClr val="000000"/>
-                      </a:solidFill>
-                      <a:prstDash val="solid"/>
-                      <a:round/>
-                      <a:headEnd type="none" w="sm" len="sm"/>
-                      <a:tailEnd type="none" w="sm" len="sm"/>
-                    </a:lnB>
-                  </a:tcPr>
-                </a:tc>
-                <a:tc>
-                  <a:txBody>
-                    <a:bodyPr/>
-                    <a:lstStyle/>
-                    <a:p>
-                      <a:pPr marL="0" marR="0" lvl="0" indent="0" algn="l" rtl="0">
-                        <a:lnSpc>
-                          <a:spcPct val="100000"/>
-                        </a:lnSpc>
-                        <a:spcBef>
-                          <a:spcPts val="0"/>
-                        </a:spcBef>
-                        <a:spcAft>
-                          <a:spcPts val="0"/>
-                        </a:spcAft>
-                        <a:buClr>
-                          <a:schemeClr val="lt1"/>
-                        </a:buClr>
-                        <a:buSzPts val="1100"/>
-                        <a:buFont typeface="Consolas"/>
-                        <a:buNone/>
-                      </a:pPr>
-                      <a:r>
-                        <a:rPr lang="en" sz="1100" u="none" strike="noStrike" cap="none">
-                          <a:solidFill>
-                            <a:schemeClr val="lt1"/>
-                          </a:solidFill>
-                          <a:latin typeface="Consolas"/>
-                          <a:ea typeface="Consolas"/>
-                          <a:cs typeface="Consolas"/>
-                          <a:sym typeface="Consolas"/>
-                        </a:rPr>
-                        <a:t>Attribute doesn’t exist</a:t>
-                      </a:r>
-                      <a:endParaRPr sz="1100" u="none" strike="noStrike" cap="none">
-                        <a:solidFill>
-                          <a:schemeClr val="lt1"/>
-                        </a:solidFill>
-                        <a:latin typeface="Consolas"/>
-                        <a:ea typeface="Consolas"/>
-                        <a:cs typeface="Consolas"/>
-                        <a:sym typeface="Consolas"/>
-                      </a:endParaRPr>
-                    </a:p>
-                  </a:txBody>
-                  <a:tcPr marL="91425" marR="91425" marT="91425" marB="91425">
-                    <a:lnL w="9525" cap="flat" cmpd="sng">
-                      <a:solidFill>
-                        <a:srgbClr val="000000"/>
-                      </a:solidFill>
-                      <a:prstDash val="solid"/>
-                      <a:round/>
-                      <a:headEnd type="none" w="sm" len="sm"/>
-                      <a:tailEnd type="none" w="sm" len="sm"/>
-                    </a:lnL>
-                    <a:lnR w="9525" cap="flat" cmpd="sng">
-                      <a:solidFill>
-                        <a:srgbClr val="000000"/>
-                      </a:solidFill>
-                      <a:prstDash val="solid"/>
-                      <a:round/>
-                      <a:headEnd type="none" w="sm" len="sm"/>
-                      <a:tailEnd type="none" w="sm" len="sm"/>
-                    </a:lnR>
-                    <a:lnT w="9525" cap="flat" cmpd="sng">
-                      <a:solidFill>
-                        <a:srgbClr val="000000"/>
-                      </a:solidFill>
-                      <a:prstDash val="solid"/>
-                      <a:round/>
-                      <a:headEnd type="none" w="sm" len="sm"/>
-                      <a:tailEnd type="none" w="sm" len="sm"/>
-                    </a:lnT>
-                    <a:lnB w="9525" cap="flat" cmpd="sng">
-                      <a:solidFill>
-                        <a:srgbClr val="000000"/>
-                      </a:solidFill>
-                      <a:prstDash val="solid"/>
-                      <a:round/>
-                      <a:headEnd type="none" w="sm" len="sm"/>
-                      <a:tailEnd type="none" w="sm" len="sm"/>
-                    </a:lnB>
-                  </a:tcPr>
-                </a:tc>
-                <a:tc>
-                  <a:txBody>
-                    <a:bodyPr/>
-                    <a:lstStyle/>
-                    <a:p>
-                      <a:pPr marL="0" marR="0" lvl="0" indent="0" algn="l" rtl="0">
-                        <a:lnSpc>
-                          <a:spcPct val="100000"/>
-                        </a:lnSpc>
-                        <a:spcBef>
-                          <a:spcPts val="0"/>
-                        </a:spcBef>
-                        <a:spcAft>
-                          <a:spcPts val="0"/>
-                        </a:spcAft>
-                        <a:buClr>
-                          <a:schemeClr val="lt1"/>
-                        </a:buClr>
-                        <a:buSzPts val="1100"/>
-                        <a:buFont typeface="Consolas"/>
-                        <a:buNone/>
-                      </a:pPr>
-                      <a:r>
-                        <a:rPr lang="en" sz="1100" u="none" strike="noStrike" cap="none">
-                          <a:solidFill>
-                            <a:schemeClr val="lt1"/>
-                          </a:solidFill>
-                          <a:latin typeface="Consolas"/>
-                          <a:ea typeface="Consolas"/>
-                          <a:cs typeface="Consolas"/>
-                          <a:sym typeface="Consolas"/>
-                        </a:rPr>
-                        <a:t>int.append()</a:t>
-                      </a:r>
-                      <a:endParaRPr sz="1100" u="none" strike="noStrike" cap="none">
-                        <a:solidFill>
-                          <a:schemeClr val="lt1"/>
-                        </a:solidFill>
-                        <a:latin typeface="Consolas"/>
-                        <a:ea typeface="Consolas"/>
-                        <a:cs typeface="Consolas"/>
-                        <a:sym typeface="Consolas"/>
-                      </a:endParaRPr>
-                    </a:p>
-                  </a:txBody>
-                  <a:tcPr marL="91425" marR="91425" marT="91425" marB="91425">
-                    <a:lnL w="9525" cap="flat" cmpd="sng">
-                      <a:solidFill>
-                        <a:srgbClr val="000000"/>
-                      </a:solidFill>
-                      <a:prstDash val="solid"/>
-                      <a:round/>
-                      <a:headEnd type="none" w="sm" len="sm"/>
-                      <a:tailEnd type="none" w="sm" len="sm"/>
-                    </a:lnL>
-                    <a:lnR w="9525" cap="flat" cmpd="sng">
-                      <a:solidFill>
-                        <a:srgbClr val="000000"/>
-                      </a:solidFill>
-                      <a:prstDash val="solid"/>
-                      <a:round/>
-                      <a:headEnd type="none" w="sm" len="sm"/>
-                      <a:tailEnd type="none" w="sm" len="sm"/>
-                    </a:lnR>
-                    <a:lnT w="9525" cap="flat" cmpd="sng">
-                      <a:solidFill>
-                        <a:srgbClr val="000000"/>
-                      </a:solidFill>
-                      <a:prstDash val="solid"/>
-                      <a:round/>
-                      <a:headEnd type="none" w="sm" len="sm"/>
-                      <a:tailEnd type="none" w="sm" len="sm"/>
-                    </a:lnT>
-                    <a:lnB w="9525" cap="flat" cmpd="sng">
-                      <a:solidFill>
-                        <a:srgbClr val="000000"/>
-                      </a:solidFill>
-                      <a:prstDash val="solid"/>
-                      <a:round/>
-                      <a:headEnd type="none" w="sm" len="sm"/>
-                      <a:tailEnd type="none" w="sm" len="sm"/>
-                    </a:lnB>
-                  </a:tcPr>
-                </a:tc>
-                <a:extLst>
-                  <a:ext uri="{0D108BD9-81ED-4DB2-BD59-A6C34878D82A}">
-                    <a16:rowId xmlns:a16="http://schemas.microsoft.com/office/drawing/2014/main" val="10008"/>
-                  </a:ext>
-                </a:extLst>
-              </a:tr>
-              <a:tr h="328325">
-                <a:tc>
-                  <a:txBody>
-                    <a:bodyPr/>
-                    <a:lstStyle/>
-                    <a:p>
-                      <a:pPr marL="0" marR="0" lvl="0" indent="0" algn="l" rtl="0">
-                        <a:lnSpc>
-                          <a:spcPct val="100000"/>
-                        </a:lnSpc>
-                        <a:spcBef>
-                          <a:spcPts val="0"/>
-                        </a:spcBef>
-                        <a:spcAft>
-                          <a:spcPts val="0"/>
-                        </a:spcAft>
-                        <a:buClr>
-                          <a:schemeClr val="lt1"/>
-                        </a:buClr>
-                        <a:buSzPts val="1100"/>
-                        <a:buFont typeface="Consolas"/>
-                        <a:buNone/>
-                      </a:pPr>
-                      <a:r>
-                        <a:rPr lang="en" sz="1100" b="1" u="none" strike="noStrike" cap="none">
-                          <a:solidFill>
-                            <a:schemeClr val="lt1"/>
-                          </a:solidFill>
-                          <a:latin typeface="Consolas"/>
-                          <a:ea typeface="Consolas"/>
-                          <a:cs typeface="Consolas"/>
-                          <a:sym typeface="Consolas"/>
-                        </a:rPr>
-                        <a:t>FileNotFoundError</a:t>
-                      </a:r>
-                      <a:endParaRPr sz="1100" b="1" u="none" strike="noStrike" cap="none">
-                        <a:solidFill>
-                          <a:schemeClr val="lt1"/>
-                        </a:solidFill>
-                        <a:latin typeface="Consolas"/>
-                        <a:ea typeface="Consolas"/>
-                        <a:cs typeface="Consolas"/>
-                        <a:sym typeface="Consolas"/>
-                      </a:endParaRPr>
-                    </a:p>
-                  </a:txBody>
-                  <a:tcPr marL="91425" marR="91425" marT="91425" marB="91425">
-                    <a:lnL w="9525" cap="flat" cmpd="sng">
-                      <a:solidFill>
-                        <a:srgbClr val="000000"/>
-                      </a:solidFill>
-                      <a:prstDash val="solid"/>
-                      <a:round/>
-                      <a:headEnd type="none" w="sm" len="sm"/>
-                      <a:tailEnd type="none" w="sm" len="sm"/>
-                    </a:lnL>
-                    <a:lnR w="9525" cap="flat" cmpd="sng">
-                      <a:solidFill>
-                        <a:srgbClr val="000000"/>
-                      </a:solidFill>
-                      <a:prstDash val="solid"/>
-                      <a:round/>
-                      <a:headEnd type="none" w="sm" len="sm"/>
-                      <a:tailEnd type="none" w="sm" len="sm"/>
-                    </a:lnR>
-                    <a:lnT w="9525" cap="flat" cmpd="sng">
-                      <a:solidFill>
-                        <a:srgbClr val="000000"/>
-                      </a:solidFill>
-                      <a:prstDash val="solid"/>
-                      <a:round/>
-                      <a:headEnd type="none" w="sm" len="sm"/>
-                      <a:tailEnd type="none" w="sm" len="sm"/>
-                    </a:lnT>
-                    <a:lnB w="9525" cap="flat" cmpd="sng">
-                      <a:solidFill>
-                        <a:srgbClr val="000000"/>
-                      </a:solidFill>
-                      <a:prstDash val="solid"/>
-                      <a:round/>
-                      <a:headEnd type="none" w="sm" len="sm"/>
-                      <a:tailEnd type="none" w="sm" len="sm"/>
-                    </a:lnB>
-                  </a:tcPr>
-                </a:tc>
-                <a:tc>
-                  <a:txBody>
-                    <a:bodyPr/>
-                    <a:lstStyle/>
-                    <a:p>
-                      <a:pPr marL="0" marR="0" lvl="0" indent="0" algn="l" rtl="0">
-                        <a:lnSpc>
-                          <a:spcPct val="100000"/>
-                        </a:lnSpc>
-                        <a:spcBef>
-                          <a:spcPts val="0"/>
-                        </a:spcBef>
-                        <a:spcAft>
-                          <a:spcPts val="0"/>
-                        </a:spcAft>
-                        <a:buClr>
-                          <a:schemeClr val="lt1"/>
-                        </a:buClr>
-                        <a:buSzPts val="1100"/>
-                        <a:buFont typeface="Consolas"/>
-                        <a:buNone/>
-                      </a:pPr>
-                      <a:r>
-                        <a:rPr lang="en" sz="1100" u="none" strike="noStrike" cap="none">
-                          <a:solidFill>
-                            <a:schemeClr val="lt1"/>
-                          </a:solidFill>
-                          <a:latin typeface="Consolas"/>
-                          <a:ea typeface="Consolas"/>
-                          <a:cs typeface="Consolas"/>
-                          <a:sym typeface="Consolas"/>
-                        </a:rPr>
-                        <a:t>File does not exist</a:t>
-                      </a:r>
-                      <a:endParaRPr sz="1100" u="none" strike="noStrike" cap="none">
-                        <a:solidFill>
-                          <a:schemeClr val="lt1"/>
-                        </a:solidFill>
-                        <a:latin typeface="Consolas"/>
-                        <a:ea typeface="Consolas"/>
-                        <a:cs typeface="Consolas"/>
-                        <a:sym typeface="Consolas"/>
-                      </a:endParaRPr>
-                    </a:p>
-                  </a:txBody>
-                  <a:tcPr marL="91425" marR="91425" marT="91425" marB="91425">
-                    <a:lnL w="9525" cap="flat" cmpd="sng">
-                      <a:solidFill>
-                        <a:srgbClr val="000000"/>
-                      </a:solidFill>
-                      <a:prstDash val="solid"/>
-                      <a:round/>
-                      <a:headEnd type="none" w="sm" len="sm"/>
-                      <a:tailEnd type="none" w="sm" len="sm"/>
-                    </a:lnL>
-                    <a:lnR w="9525" cap="flat" cmpd="sng">
-                      <a:solidFill>
-                        <a:srgbClr val="000000"/>
-                      </a:solidFill>
-                      <a:prstDash val="solid"/>
-                      <a:round/>
-                      <a:headEnd type="none" w="sm" len="sm"/>
-                      <a:tailEnd type="none" w="sm" len="sm"/>
-                    </a:lnR>
-                    <a:lnT w="9525" cap="flat" cmpd="sng">
-                      <a:solidFill>
-                        <a:srgbClr val="000000"/>
-                      </a:solidFill>
-                      <a:prstDash val="solid"/>
-                      <a:round/>
-                      <a:headEnd type="none" w="sm" len="sm"/>
-                      <a:tailEnd type="none" w="sm" len="sm"/>
-                    </a:lnT>
-                    <a:lnB w="9525" cap="flat" cmpd="sng">
-                      <a:solidFill>
-                        <a:srgbClr val="000000"/>
-                      </a:solidFill>
-                      <a:prstDash val="solid"/>
-                      <a:round/>
-                      <a:headEnd type="none" w="sm" len="sm"/>
-                      <a:tailEnd type="none" w="sm" len="sm"/>
-                    </a:lnB>
-                  </a:tcPr>
-                </a:tc>
-                <a:tc>
-                  <a:txBody>
-                    <a:bodyPr/>
-                    <a:lstStyle/>
-                    <a:p>
-                      <a:pPr marL="0" marR="0" lvl="0" indent="0" algn="l" rtl="0">
-                        <a:lnSpc>
-                          <a:spcPct val="100000"/>
-                        </a:lnSpc>
-                        <a:spcBef>
-                          <a:spcPts val="0"/>
-                        </a:spcBef>
-                        <a:spcAft>
-                          <a:spcPts val="0"/>
-                        </a:spcAft>
-                        <a:buClr>
-                          <a:schemeClr val="lt1"/>
-                        </a:buClr>
-                        <a:buSzPts val="1100"/>
-                        <a:buFont typeface="Consolas"/>
-                        <a:buNone/>
-                      </a:pPr>
-                      <a:r>
-                        <a:rPr lang="en" sz="1100" u="none" strike="noStrike" cap="none">
-                          <a:solidFill>
-                            <a:schemeClr val="lt1"/>
-                          </a:solidFill>
-                          <a:latin typeface="Consolas"/>
-                          <a:ea typeface="Consolas"/>
-                          <a:cs typeface="Consolas"/>
-                          <a:sym typeface="Consolas"/>
-                        </a:rPr>
-                        <a:t>Open missing file</a:t>
-                      </a:r>
-                      <a:endParaRPr sz="1100" u="none" strike="noStrike" cap="none">
-                        <a:solidFill>
-                          <a:schemeClr val="lt1"/>
-                        </a:solidFill>
-                        <a:latin typeface="Consolas"/>
-                        <a:ea typeface="Consolas"/>
-                        <a:cs typeface="Consolas"/>
-                        <a:sym typeface="Consolas"/>
-                      </a:endParaRPr>
-                    </a:p>
-                  </a:txBody>
-                  <a:tcPr marL="91425" marR="91425" marT="91425" marB="91425">
-                    <a:lnL w="9525" cap="flat" cmpd="sng">
-                      <a:solidFill>
-                        <a:srgbClr val="000000"/>
-                      </a:solidFill>
-                      <a:prstDash val="solid"/>
-                      <a:round/>
-                      <a:headEnd type="none" w="sm" len="sm"/>
-                      <a:tailEnd type="none" w="sm" len="sm"/>
-                    </a:lnL>
-                    <a:lnR w="9525" cap="flat" cmpd="sng">
-                      <a:solidFill>
-                        <a:srgbClr val="000000"/>
-                      </a:solidFill>
-                      <a:prstDash val="solid"/>
-                      <a:round/>
-                      <a:headEnd type="none" w="sm" len="sm"/>
-                      <a:tailEnd type="none" w="sm" len="sm"/>
-                    </a:lnR>
-                    <a:lnT w="9525" cap="flat" cmpd="sng">
-                      <a:solidFill>
-                        <a:srgbClr val="000000"/>
-                      </a:solidFill>
-                      <a:prstDash val="solid"/>
-                      <a:round/>
-                      <a:headEnd type="none" w="sm" len="sm"/>
-                      <a:tailEnd type="none" w="sm" len="sm"/>
-                    </a:lnT>
-                    <a:lnB w="9525" cap="flat" cmpd="sng">
-                      <a:solidFill>
-                        <a:srgbClr val="000000"/>
-                      </a:solidFill>
-                      <a:prstDash val="solid"/>
-                      <a:round/>
-                      <a:headEnd type="none" w="sm" len="sm"/>
-                      <a:tailEnd type="none" w="sm" len="sm"/>
-                    </a:lnB>
-                  </a:tcPr>
-                </a:tc>
-                <a:extLst>
-                  <a:ext uri="{0D108BD9-81ED-4DB2-BD59-A6C34878D82A}">
-                    <a16:rowId xmlns:a16="http://schemas.microsoft.com/office/drawing/2014/main" val="10009"/>
-                  </a:ext>
-                </a:extLst>
-              </a:tr>
-              <a:tr h="328325">
-                <a:tc>
-                  <a:txBody>
-                    <a:bodyPr/>
-                    <a:lstStyle/>
-                    <a:p>
-                      <a:pPr marL="0" marR="0" lvl="0" indent="0" algn="l" rtl="0">
-                        <a:lnSpc>
-                          <a:spcPct val="100000"/>
-                        </a:lnSpc>
-                        <a:spcBef>
-                          <a:spcPts val="0"/>
-                        </a:spcBef>
-                        <a:spcAft>
-                          <a:spcPts val="0"/>
-                        </a:spcAft>
-                        <a:buClr>
-                          <a:schemeClr val="lt1"/>
-                        </a:buClr>
-                        <a:buSzPts val="1100"/>
-                        <a:buFont typeface="Consolas"/>
-                        <a:buNone/>
-                      </a:pPr>
-                      <a:r>
-                        <a:rPr lang="en" sz="1100" b="1" u="none" strike="noStrike" cap="none">
-                          <a:solidFill>
-                            <a:schemeClr val="lt1"/>
-                          </a:solidFill>
-                          <a:latin typeface="Consolas"/>
-                          <a:ea typeface="Consolas"/>
-                          <a:cs typeface="Consolas"/>
-                          <a:sym typeface="Consolas"/>
-                        </a:rPr>
-                        <a:t>ImportError</a:t>
-                      </a:r>
-                      <a:endParaRPr sz="1100" b="1" u="none" strike="noStrike" cap="none">
-                        <a:solidFill>
-                          <a:schemeClr val="lt1"/>
-                        </a:solidFill>
-                        <a:latin typeface="Consolas"/>
-                        <a:ea typeface="Consolas"/>
-                        <a:cs typeface="Consolas"/>
-                        <a:sym typeface="Consolas"/>
-                      </a:endParaRPr>
-                    </a:p>
-                  </a:txBody>
-                  <a:tcPr marL="91425" marR="91425" marT="91425" marB="91425">
-                    <a:lnL w="9525" cap="flat" cmpd="sng">
-                      <a:solidFill>
-                        <a:srgbClr val="000000"/>
-                      </a:solidFill>
-                      <a:prstDash val="solid"/>
-                      <a:round/>
-                      <a:headEnd type="none" w="sm" len="sm"/>
-                      <a:tailEnd type="none" w="sm" len="sm"/>
-                    </a:lnL>
-                    <a:lnR w="9525" cap="flat" cmpd="sng">
-                      <a:solidFill>
-                        <a:srgbClr val="000000"/>
-                      </a:solidFill>
-                      <a:prstDash val="solid"/>
-                      <a:round/>
-                      <a:headEnd type="none" w="sm" len="sm"/>
-                      <a:tailEnd type="none" w="sm" len="sm"/>
-                    </a:lnR>
-                    <a:lnT w="9525" cap="flat" cmpd="sng">
-                      <a:solidFill>
-                        <a:srgbClr val="000000"/>
-                      </a:solidFill>
-                      <a:prstDash val="solid"/>
-                      <a:round/>
-                      <a:headEnd type="none" w="sm" len="sm"/>
-                      <a:tailEnd type="none" w="sm" len="sm"/>
-                    </a:lnT>
-                    <a:lnB w="9525" cap="flat" cmpd="sng">
-                      <a:solidFill>
-                        <a:srgbClr val="000000"/>
-                      </a:solidFill>
-                      <a:prstDash val="solid"/>
-                      <a:round/>
-                      <a:headEnd type="none" w="sm" len="sm"/>
-                      <a:tailEnd type="none" w="sm" len="sm"/>
-                    </a:lnB>
-                  </a:tcPr>
-                </a:tc>
-                <a:tc>
-                  <a:txBody>
-                    <a:bodyPr/>
-                    <a:lstStyle/>
-                    <a:p>
-                      <a:pPr marL="0" marR="0" lvl="0" indent="0" algn="l" rtl="0">
-                        <a:lnSpc>
-                          <a:spcPct val="100000"/>
-                        </a:lnSpc>
-                        <a:spcBef>
-                          <a:spcPts val="0"/>
-                        </a:spcBef>
-                        <a:spcAft>
-                          <a:spcPts val="0"/>
-                        </a:spcAft>
-                        <a:buClr>
-                          <a:schemeClr val="lt1"/>
-                        </a:buClr>
-                        <a:buSzPts val="1100"/>
-                        <a:buFont typeface="Consolas"/>
-                        <a:buNone/>
-                      </a:pPr>
-                      <a:r>
-                        <a:rPr lang="en" sz="1100" u="none" strike="noStrike" cap="none">
-                          <a:solidFill>
-                            <a:schemeClr val="lt1"/>
-                          </a:solidFill>
-                          <a:latin typeface="Consolas"/>
-                          <a:ea typeface="Consolas"/>
-                          <a:cs typeface="Consolas"/>
-                          <a:sym typeface="Consolas"/>
-                        </a:rPr>
-                        <a:t>Cannot import a module</a:t>
-                      </a:r>
-                      <a:endParaRPr sz="1100" u="none" strike="noStrike" cap="none">
-                        <a:solidFill>
-                          <a:schemeClr val="lt1"/>
-                        </a:solidFill>
-                        <a:latin typeface="Consolas"/>
-                        <a:ea typeface="Consolas"/>
-                        <a:cs typeface="Consolas"/>
-                        <a:sym typeface="Consolas"/>
-                      </a:endParaRPr>
-                    </a:p>
-                  </a:txBody>
-                  <a:tcPr marL="91425" marR="91425" marT="91425" marB="91425">
-                    <a:lnL w="9525" cap="flat" cmpd="sng">
-                      <a:solidFill>
-                        <a:srgbClr val="000000"/>
-                      </a:solidFill>
-                      <a:prstDash val="solid"/>
-                      <a:round/>
-                      <a:headEnd type="none" w="sm" len="sm"/>
-                      <a:tailEnd type="none" w="sm" len="sm"/>
-                    </a:lnL>
-                    <a:lnR w="9525" cap="flat" cmpd="sng">
-                      <a:solidFill>
-                        <a:srgbClr val="000000"/>
-                      </a:solidFill>
-                      <a:prstDash val="solid"/>
-                      <a:round/>
-                      <a:headEnd type="none" w="sm" len="sm"/>
-                      <a:tailEnd type="none" w="sm" len="sm"/>
-                    </a:lnR>
-                    <a:lnT w="9525" cap="flat" cmpd="sng">
-                      <a:solidFill>
-                        <a:srgbClr val="000000"/>
-                      </a:solidFill>
-                      <a:prstDash val="solid"/>
-                      <a:round/>
-                      <a:headEnd type="none" w="sm" len="sm"/>
-                      <a:tailEnd type="none" w="sm" len="sm"/>
-                    </a:lnT>
-                    <a:lnB w="9525" cap="flat" cmpd="sng">
-                      <a:solidFill>
-                        <a:srgbClr val="000000"/>
-                      </a:solidFill>
-                      <a:prstDash val="solid"/>
-                      <a:round/>
-                      <a:headEnd type="none" w="sm" len="sm"/>
-                      <a:tailEnd type="none" w="sm" len="sm"/>
-                    </a:lnB>
-                  </a:tcPr>
-                </a:tc>
-                <a:tc>
-                  <a:txBody>
-                    <a:bodyPr/>
-                    <a:lstStyle/>
-                    <a:p>
-                      <a:pPr marL="0" marR="0" lvl="0" indent="0" algn="l" rtl="0">
-                        <a:lnSpc>
-                          <a:spcPct val="100000"/>
-                        </a:lnSpc>
-                        <a:spcBef>
-                          <a:spcPts val="0"/>
-                        </a:spcBef>
-                        <a:spcAft>
-                          <a:spcPts val="0"/>
-                        </a:spcAft>
-                        <a:buClr>
-                          <a:schemeClr val="lt1"/>
-                        </a:buClr>
-                        <a:buSzPts val="1100"/>
-                        <a:buFont typeface="Consolas"/>
-                        <a:buNone/>
-                      </a:pPr>
-                      <a:r>
-                        <a:rPr lang="en" sz="1100" u="none" strike="noStrike" cap="none">
-                          <a:solidFill>
-                            <a:schemeClr val="lt1"/>
-                          </a:solidFill>
-                          <a:latin typeface="Consolas"/>
-                          <a:ea typeface="Consolas"/>
-                          <a:cs typeface="Consolas"/>
-                          <a:sym typeface="Consolas"/>
-                        </a:rPr>
-                        <a:t>Wrong module name</a:t>
-                      </a:r>
-                      <a:endParaRPr sz="1100" u="none" strike="noStrike" cap="none">
-                        <a:solidFill>
-                          <a:schemeClr val="lt1"/>
-                        </a:solidFill>
-                        <a:latin typeface="Consolas"/>
-                        <a:ea typeface="Consolas"/>
-                        <a:cs typeface="Consolas"/>
-                        <a:sym typeface="Consolas"/>
-                      </a:endParaRPr>
-                    </a:p>
-                  </a:txBody>
-                  <a:tcPr marL="91425" marR="91425" marT="91425" marB="91425">
-                    <a:lnL w="9525" cap="flat" cmpd="sng">
-                      <a:solidFill>
-                        <a:srgbClr val="000000"/>
-                      </a:solidFill>
-                      <a:prstDash val="solid"/>
-                      <a:round/>
-                      <a:headEnd type="none" w="sm" len="sm"/>
-                      <a:tailEnd type="none" w="sm" len="sm"/>
-                    </a:lnL>
-                    <a:lnR w="9525" cap="flat" cmpd="sng">
-                      <a:solidFill>
-                        <a:srgbClr val="000000"/>
-                      </a:solidFill>
-                      <a:prstDash val="solid"/>
-                      <a:round/>
-                      <a:headEnd type="none" w="sm" len="sm"/>
-                      <a:tailEnd type="none" w="sm" len="sm"/>
-                    </a:lnR>
-                    <a:lnT w="9525" cap="flat" cmpd="sng">
-                      <a:solidFill>
-                        <a:srgbClr val="000000"/>
-                      </a:solidFill>
-                      <a:prstDash val="solid"/>
-                      <a:round/>
-                      <a:headEnd type="none" w="sm" len="sm"/>
-                      <a:tailEnd type="none" w="sm" len="sm"/>
-                    </a:lnT>
-                    <a:lnB w="9525" cap="flat" cmpd="sng">
-                      <a:solidFill>
-                        <a:srgbClr val="000000"/>
-                      </a:solidFill>
-                      <a:prstDash val="solid"/>
-                      <a:round/>
-                      <a:headEnd type="none" w="sm" len="sm"/>
-                      <a:tailEnd type="none" w="sm" len="sm"/>
-                    </a:lnB>
-                  </a:tcPr>
-                </a:tc>
-                <a:extLst>
-                  <a:ext uri="{0D108BD9-81ED-4DB2-BD59-A6C34878D82A}">
-                    <a16:rowId xmlns:a16="http://schemas.microsoft.com/office/drawing/2014/main" val="10010"/>
-                  </a:ext>
-                </a:extLst>
-              </a:tr>
-            </a:tbl>
-          </a:graphicData>
-        </a:graphic>
-      </p:graphicFrame>
-      <p:sp>
-        <p:nvSpPr>
           <p:cNvPr id="2" name="Title 1">
             <a:extLst>
               <a:ext uri="{FF2B5EF4-FFF2-40B4-BE49-F238E27FC236}">
-                <a16:creationId xmlns:a16="http://schemas.microsoft.com/office/drawing/2014/main" id="{927E4AC0-01EA-B511-D859-5692044DD619}"/>
+                <a16:creationId xmlns:a16="http://schemas.microsoft.com/office/drawing/2014/main" id="{18368909-47B5-28B6-28B7-54290D26D49F}"/>
               </a:ext>
             </a:extLst>
           </p:cNvPr>
@@ -52945,7 +47596,11 @@
           <a:bodyPr/>
           <a:lstStyle/>
           <a:p>
-            <a:endParaRPr lang="en-US"/>
+            <a:r>
+              <a:rPr lang="en-US"/>
+              <a:t>Questions?</a:t>
+            </a:r>
+            <a:endParaRPr lang="en-US" dirty="0"/>
           </a:p>
         </p:txBody>
       </p:sp>
@@ -52954,7 +47609,7 @@
           <p:cNvPr id="3" name="Text Placeholder 2">
             <a:extLst>
               <a:ext uri="{FF2B5EF4-FFF2-40B4-BE49-F238E27FC236}">
-                <a16:creationId xmlns:a16="http://schemas.microsoft.com/office/drawing/2014/main" id="{6D6B3114-E828-3C64-0B4A-5DA874EBE967}"/>
+                <a16:creationId xmlns:a16="http://schemas.microsoft.com/office/drawing/2014/main" id="{04030480-65E1-58E0-B1B4-5FF9DAE4EBDE}"/>
               </a:ext>
             </a:extLst>
           </p:cNvPr>
@@ -52975,1199 +47630,11 @@
         </p:txBody>
       </p:sp>
     </p:spTree>
-  </p:cSld>
-  <p:clrMapOvr>
-    <a:masterClrMapping/>
-  </p:clrMapOvr>
-</p:sld>
-</file>
-
-<file path=ppt/slides/slide24.xml><?xml version="1.0" encoding="utf-8"?>
-<p:sld xmlns:a="http://schemas.openxmlformats.org/drawingml/2006/main" xmlns:r="http://schemas.openxmlformats.org/officeDocument/2006/relationships" xmlns:p="http://schemas.openxmlformats.org/presentationml/2006/main">
-  <p:cSld>
-    <p:spTree>
-      <p:nvGrpSpPr>
-        <p:cNvPr id="1" name="Shape 487"/>
-        <p:cNvGrpSpPr/>
-        <p:nvPr/>
-      </p:nvGrpSpPr>
-      <p:grpSpPr>
-        <a:xfrm>
-          <a:off x="0" y="0"/>
-          <a:ext cx="0" cy="0"/>
-          <a:chOff x="0" y="0"/>
-          <a:chExt cx="0" cy="0"/>
-        </a:xfrm>
-      </p:grpSpPr>
-      <p:sp>
-        <p:nvSpPr>
-          <p:cNvPr id="488" name="Google Shape;488;p58"/>
-          <p:cNvSpPr txBox="1">
-            <a:spLocks noGrp="1"/>
-          </p:cNvSpPr>
-          <p:nvPr>
-            <p:ph type="title"/>
-          </p:nvPr>
-        </p:nvSpPr>
-        <p:spPr>
-          <a:xfrm>
-            <a:off x="411480" y="308611"/>
-            <a:ext cx="6173470" cy="891778"/>
-          </a:xfrm>
-          <a:noFill/>
-          <a:ln>
-            <a:noFill/>
-          </a:ln>
-        </p:spPr>
-        <p:txBody>
-          <a:bodyPr spcFirstLastPara="1" wrap="square" lIns="91425" tIns="91425" rIns="91425" bIns="91425" anchor="t" anchorCtr="0">
-            <a:normAutofit/>
-          </a:bodyPr>
-          <a:lstStyle/>
-          <a:p>
-            <a:pPr lvl="0"/>
-            <a:r>
-              <a:rPr lang="en-US"/>
-              <a:t>ERROR HANDLING</a:t>
-            </a:r>
-          </a:p>
-        </p:txBody>
-      </p:sp>
-      <p:sp>
-        <p:nvSpPr>
-          <p:cNvPr id="3" name="Text Placeholder 2">
-            <a:extLst>
-              <a:ext uri="{FF2B5EF4-FFF2-40B4-BE49-F238E27FC236}">
-                <a16:creationId xmlns:a16="http://schemas.microsoft.com/office/drawing/2014/main" id="{A3236906-DDF6-4444-8642-3AB19FD9C9D7}"/>
-              </a:ext>
-            </a:extLst>
-          </p:cNvPr>
-          <p:cNvSpPr>
-            <a:spLocks noGrp="1"/>
-          </p:cNvSpPr>
-          <p:nvPr>
-            <p:ph type="body" idx="1"/>
-          </p:nvPr>
-        </p:nvSpPr>
-        <p:spPr/>
-        <p:txBody>
-          <a:bodyPr/>
-          <a:lstStyle/>
-          <a:p>
-            <a:endParaRPr lang="en-US"/>
-          </a:p>
-        </p:txBody>
-      </p:sp>
-      <p:sp>
-        <p:nvSpPr>
-          <p:cNvPr id="489" name="Google Shape;489;p58"/>
-          <p:cNvSpPr txBox="1"/>
-          <p:nvPr/>
-        </p:nvSpPr>
-        <p:spPr>
-          <a:xfrm>
-            <a:off x="606210" y="1570610"/>
-            <a:ext cx="7647000" cy="3241500"/>
-          </a:xfrm>
-          <a:prstGeom prst="rect">
-            <a:avLst/>
-          </a:prstGeom>
-          <a:noFill/>
-          <a:ln>
-            <a:noFill/>
-          </a:ln>
-        </p:spPr>
-        <p:txBody>
-          <a:bodyPr spcFirstLastPara="1" wrap="square" lIns="91425" tIns="91425" rIns="91425" bIns="91425" anchor="t" anchorCtr="0">
-            <a:noAutofit/>
-          </a:bodyPr>
-          <a:lstStyle/>
-          <a:p>
-            <a:pPr marL="457200" marR="0" lvl="0" indent="-342900" algn="l" rtl="0">
-              <a:lnSpc>
-                <a:spcPct val="100000"/>
-              </a:lnSpc>
-              <a:spcBef>
-                <a:spcPts val="0"/>
-              </a:spcBef>
-              <a:spcAft>
-                <a:spcPts val="0"/>
-              </a:spcAft>
-              <a:buClr>
-                <a:srgbClr val="FFFFFF"/>
-              </a:buClr>
-              <a:buSzPts val="1800"/>
-              <a:buFont typeface="Arial"/>
-              <a:buChar char="•"/>
-            </a:pPr>
-            <a:r>
-              <a:rPr lang="en" sz="1800" b="0" i="0" u="none" strike="noStrike" cap="none">
-                <a:solidFill>
-                  <a:schemeClr val="lt1"/>
-                </a:solidFill>
-                <a:latin typeface="Roboto"/>
-                <a:ea typeface="Roboto"/>
-                <a:cs typeface="Roboto"/>
-                <a:sym typeface="Roboto"/>
-              </a:rPr>
-              <a:t>Why Handle Errors?</a:t>
-            </a:r>
-            <a:endParaRPr sz="1800" b="0" i="0" u="none" strike="noStrike" cap="none">
-              <a:solidFill>
-                <a:schemeClr val="lt1"/>
-              </a:solidFill>
-              <a:latin typeface="Roboto"/>
-              <a:ea typeface="Roboto"/>
-              <a:cs typeface="Roboto"/>
-              <a:sym typeface="Roboto"/>
-            </a:endParaRPr>
-          </a:p>
-          <a:p>
-            <a:pPr marL="914400" marR="0" lvl="1" indent="-342900" algn="l" rtl="0">
-              <a:lnSpc>
-                <a:spcPct val="100000"/>
-              </a:lnSpc>
-              <a:spcBef>
-                <a:spcPts val="0"/>
-              </a:spcBef>
-              <a:spcAft>
-                <a:spcPts val="0"/>
-              </a:spcAft>
-              <a:buClr>
-                <a:srgbClr val="FFFFFF"/>
-              </a:buClr>
-              <a:buSzPts val="1800"/>
-              <a:buFont typeface="Arial"/>
-              <a:buChar char="•"/>
-            </a:pPr>
-            <a:r>
-              <a:rPr lang="en" sz="1800" b="0" i="0" u="none" strike="noStrike" cap="none">
-                <a:solidFill>
-                  <a:schemeClr val="lt1"/>
-                </a:solidFill>
-                <a:latin typeface="Roboto"/>
-                <a:ea typeface="Roboto"/>
-                <a:cs typeface="Roboto"/>
-                <a:sym typeface="Roboto"/>
-              </a:rPr>
-              <a:t>Prevent your program from crashing</a:t>
-            </a:r>
-            <a:endParaRPr sz="1800" b="0" i="0" u="none" strike="noStrike" cap="none">
-              <a:solidFill>
-                <a:schemeClr val="lt1"/>
-              </a:solidFill>
-              <a:latin typeface="Roboto"/>
-              <a:ea typeface="Roboto"/>
-              <a:cs typeface="Roboto"/>
-              <a:sym typeface="Roboto"/>
-            </a:endParaRPr>
-          </a:p>
-          <a:p>
-            <a:pPr marL="914400" marR="0" lvl="1" indent="-342900" algn="l" rtl="0">
-              <a:lnSpc>
-                <a:spcPct val="100000"/>
-              </a:lnSpc>
-              <a:spcBef>
-                <a:spcPts val="0"/>
-              </a:spcBef>
-              <a:spcAft>
-                <a:spcPts val="0"/>
-              </a:spcAft>
-              <a:buClr>
-                <a:srgbClr val="FFFFFF"/>
-              </a:buClr>
-              <a:buSzPts val="1800"/>
-              <a:buFont typeface="Arial"/>
-              <a:buChar char="•"/>
-            </a:pPr>
-            <a:r>
-              <a:rPr lang="en" sz="1800" b="0" i="0" u="none" strike="noStrike" cap="none">
-                <a:solidFill>
-                  <a:schemeClr val="lt1"/>
-                </a:solidFill>
-                <a:latin typeface="Roboto"/>
-                <a:ea typeface="Roboto"/>
-                <a:cs typeface="Roboto"/>
-                <a:sym typeface="Roboto"/>
-              </a:rPr>
-              <a:t>Provide helpful messages to users</a:t>
-            </a:r>
-            <a:endParaRPr sz="1800" b="0" i="0" u="none" strike="noStrike" cap="none">
-              <a:solidFill>
-                <a:schemeClr val="lt1"/>
-              </a:solidFill>
-              <a:latin typeface="Roboto"/>
-              <a:ea typeface="Roboto"/>
-              <a:cs typeface="Roboto"/>
-              <a:sym typeface="Roboto"/>
-            </a:endParaRPr>
-          </a:p>
-          <a:p>
-            <a:pPr marL="914400" marR="0" lvl="1" indent="-342900" algn="l" rtl="0">
-              <a:lnSpc>
-                <a:spcPct val="100000"/>
-              </a:lnSpc>
-              <a:spcBef>
-                <a:spcPts val="0"/>
-              </a:spcBef>
-              <a:spcAft>
-                <a:spcPts val="0"/>
-              </a:spcAft>
-              <a:buClr>
-                <a:srgbClr val="FFFFFF"/>
-              </a:buClr>
-              <a:buSzPts val="1800"/>
-              <a:buFont typeface="Arial"/>
-              <a:buChar char="•"/>
-            </a:pPr>
-            <a:r>
-              <a:rPr lang="en" sz="1800" b="0" i="0" u="none" strike="noStrike" cap="none">
-                <a:solidFill>
-                  <a:schemeClr val="lt1"/>
-                </a:solidFill>
-                <a:latin typeface="Roboto"/>
-                <a:ea typeface="Roboto"/>
-                <a:cs typeface="Roboto"/>
-                <a:sym typeface="Roboto"/>
-              </a:rPr>
-              <a:t>Let your code recover from unexpected situations</a:t>
-            </a:r>
-            <a:endParaRPr sz="1800" b="0" i="0" u="none" strike="noStrike" cap="none">
-              <a:solidFill>
-                <a:schemeClr val="lt1"/>
-              </a:solidFill>
-              <a:latin typeface="Roboto"/>
-              <a:ea typeface="Roboto"/>
-              <a:cs typeface="Roboto"/>
-              <a:sym typeface="Roboto"/>
-            </a:endParaRPr>
-          </a:p>
-        </p:txBody>
-      </p:sp>
-    </p:spTree>
-  </p:cSld>
-  <p:clrMapOvr>
-    <a:masterClrMapping/>
-  </p:clrMapOvr>
-</p:sld>
-</file>
-
-<file path=ppt/slides/slide25.xml><?xml version="1.0" encoding="utf-8"?>
-<p:sld xmlns:a="http://schemas.openxmlformats.org/drawingml/2006/main" xmlns:r="http://schemas.openxmlformats.org/officeDocument/2006/relationships" xmlns:p="http://schemas.openxmlformats.org/presentationml/2006/main">
-  <p:cSld>
-    <p:spTree>
-      <p:nvGrpSpPr>
-        <p:cNvPr id="1" name="Shape 493"/>
-        <p:cNvGrpSpPr/>
-        <p:nvPr/>
-      </p:nvGrpSpPr>
-      <p:grpSpPr>
-        <a:xfrm>
-          <a:off x="0" y="0"/>
-          <a:ext cx="0" cy="0"/>
-          <a:chOff x="0" y="0"/>
-          <a:chExt cx="0" cy="0"/>
-        </a:xfrm>
-      </p:grpSpPr>
-      <p:sp>
-        <p:nvSpPr>
-          <p:cNvPr id="494" name="Google Shape;494;p59"/>
-          <p:cNvSpPr txBox="1">
-            <a:spLocks noGrp="1"/>
-          </p:cNvSpPr>
-          <p:nvPr>
-            <p:ph type="title"/>
-          </p:nvPr>
-        </p:nvSpPr>
-        <p:spPr>
-          <a:xfrm>
-            <a:off x="411480" y="308611"/>
-            <a:ext cx="6173470" cy="891778"/>
-          </a:xfrm>
-          <a:noFill/>
-          <a:ln>
-            <a:noFill/>
-          </a:ln>
-        </p:spPr>
-        <p:txBody>
-          <a:bodyPr spcFirstLastPara="1" wrap="square" lIns="91425" tIns="91425" rIns="91425" bIns="91425" anchor="t" anchorCtr="0">
-            <a:normAutofit/>
-          </a:bodyPr>
-          <a:lstStyle/>
-          <a:p>
-            <a:pPr lvl="0"/>
-            <a:r>
-              <a:rPr lang="en-US"/>
-              <a:t>TRY - EXCEPT</a:t>
-            </a:r>
-          </a:p>
-        </p:txBody>
-      </p:sp>
-      <p:sp>
-        <p:nvSpPr>
-          <p:cNvPr id="495" name="Google Shape;495;p59"/>
-          <p:cNvSpPr txBox="1">
-            <a:spLocks noGrp="1"/>
-          </p:cNvSpPr>
-          <p:nvPr>
-            <p:ph type="body" idx="1"/>
-          </p:nvPr>
-        </p:nvSpPr>
-        <p:spPr>
-          <a:xfrm>
-            <a:off x="411480" y="1611630"/>
-            <a:ext cx="5096351" cy="3017520"/>
-          </a:xfrm>
-          <a:noFill/>
-          <a:ln>
-            <a:noFill/>
-          </a:ln>
-        </p:spPr>
-        <p:txBody>
-          <a:bodyPr spcFirstLastPara="1" wrap="square" lIns="91425" tIns="91425" rIns="91425" bIns="91425" anchor="t" anchorCtr="0">
-            <a:normAutofit/>
-          </a:bodyPr>
-          <a:lstStyle/>
-          <a:p>
-            <a:pPr lvl="0"/>
-            <a:r>
-              <a:rPr lang="en-US"/>
-              <a:t>Tries a block a code and if an error is raised, can handle that error neatly</a:t>
-            </a:r>
-          </a:p>
-          <a:p>
-            <a:pPr lvl="0"/>
-            <a:r>
-              <a:rPr lang="en-US"/>
-              <a:t>Example:</a:t>
-            </a:r>
-          </a:p>
-          <a:p>
-            <a:pPr lvl="0"/>
-            <a:endParaRPr lang="en-US">
-              <a:sym typeface="Consolas"/>
-            </a:endParaRPr>
-          </a:p>
-          <a:p>
-            <a:pPr lvl="0"/>
-            <a:r>
-              <a:rPr lang="en-US">
-                <a:sym typeface="Consolas"/>
-              </a:rPr>
-              <a:t>try:</a:t>
-            </a:r>
-          </a:p>
-          <a:p>
-            <a:pPr lvl="0"/>
-            <a:r>
-              <a:rPr lang="en-US">
-                <a:sym typeface="Consolas"/>
-              </a:rPr>
-              <a:t>     # code that might cause an error</a:t>
-            </a:r>
-          </a:p>
-          <a:p>
-            <a:pPr lvl="0"/>
-            <a:r>
-              <a:rPr lang="en-US">
-                <a:sym typeface="Consolas"/>
-              </a:rPr>
-              <a:t>     number = int("abc")</a:t>
-            </a:r>
-            <a:endParaRPr lang="en-US"/>
-          </a:p>
-          <a:p>
-            <a:pPr lvl="0"/>
-            <a:r>
-              <a:rPr lang="en-US">
-                <a:sym typeface="Consolas"/>
-              </a:rPr>
-              <a:t> except ValueError:</a:t>
-            </a:r>
-          </a:p>
-          <a:p>
-            <a:pPr lvl="0"/>
-            <a:r>
-              <a:rPr lang="en-US">
-                <a:sym typeface="Consolas"/>
-              </a:rPr>
-              <a:t>     print("Oops! That wasn't a number.")</a:t>
-            </a:r>
-          </a:p>
-          <a:p>
-            <a:pPr lvl="0"/>
-            <a:endParaRPr lang="en-US"/>
-          </a:p>
-        </p:txBody>
-      </p:sp>
-    </p:spTree>
-  </p:cSld>
-  <p:clrMapOvr>
-    <a:masterClrMapping/>
-  </p:clrMapOvr>
-</p:sld>
-</file>
-
-<file path=ppt/slides/slide26.xml><?xml version="1.0" encoding="utf-8"?>
-<p:sld xmlns:a="http://schemas.openxmlformats.org/drawingml/2006/main" xmlns:r="http://schemas.openxmlformats.org/officeDocument/2006/relationships" xmlns:p="http://schemas.openxmlformats.org/presentationml/2006/main">
-  <p:cSld>
-    <p:spTree>
-      <p:nvGrpSpPr>
-        <p:cNvPr id="1" name="Shape 499"/>
-        <p:cNvGrpSpPr/>
-        <p:nvPr/>
-      </p:nvGrpSpPr>
-      <p:grpSpPr>
-        <a:xfrm>
-          <a:off x="0" y="0"/>
-          <a:ext cx="0" cy="0"/>
-          <a:chOff x="0" y="0"/>
-          <a:chExt cx="0" cy="0"/>
-        </a:xfrm>
-      </p:grpSpPr>
-      <p:sp>
-        <p:nvSpPr>
-          <p:cNvPr id="500" name="Google Shape;500;p60"/>
-          <p:cNvSpPr txBox="1">
-            <a:spLocks noGrp="1"/>
-          </p:cNvSpPr>
-          <p:nvPr>
-            <p:ph type="title"/>
-          </p:nvPr>
-        </p:nvSpPr>
-        <p:spPr>
-          <a:xfrm>
-            <a:off x="411480" y="308611"/>
-            <a:ext cx="6173470" cy="891778"/>
-          </a:xfrm>
-          <a:noFill/>
-          <a:ln>
-            <a:noFill/>
-          </a:ln>
-        </p:spPr>
-        <p:txBody>
-          <a:bodyPr spcFirstLastPara="1" wrap="square" lIns="91425" tIns="91425" rIns="91425" bIns="91425" anchor="t" anchorCtr="0">
-            <a:normAutofit/>
-          </a:bodyPr>
-          <a:lstStyle/>
-          <a:p>
-            <a:pPr lvl="0"/>
-            <a:r>
-              <a:rPr lang="en-US"/>
-              <a:t>TRY - EXCEPT CONTINUED</a:t>
-            </a:r>
-          </a:p>
-        </p:txBody>
-      </p:sp>
-      <p:sp>
-        <p:nvSpPr>
-          <p:cNvPr id="501" name="Google Shape;501;p60"/>
-          <p:cNvSpPr txBox="1">
-            <a:spLocks noGrp="1"/>
-          </p:cNvSpPr>
-          <p:nvPr>
-            <p:ph type="body" idx="1"/>
-          </p:nvPr>
-        </p:nvSpPr>
-        <p:spPr>
-          <a:xfrm>
-            <a:off x="411480" y="1611630"/>
-            <a:ext cx="5096351" cy="3017520"/>
-          </a:xfrm>
-          <a:noFill/>
-          <a:ln>
-            <a:noFill/>
-          </a:ln>
-        </p:spPr>
-        <p:txBody>
-          <a:bodyPr spcFirstLastPara="1" wrap="square" lIns="91425" tIns="91425" rIns="91425" bIns="91425" anchor="t" anchorCtr="0">
-            <a:normAutofit fontScale="85000" lnSpcReduction="20000"/>
-          </a:bodyPr>
-          <a:lstStyle/>
-          <a:p>
-            <a:pPr lvl="0"/>
-            <a:r>
-              <a:rPr lang="en-US"/>
-              <a:t>Optional</a:t>
-            </a:r>
-          </a:p>
-          <a:p>
-            <a:pPr lvl="1"/>
-            <a:r>
-              <a:rPr lang="en-US">
-                <a:sym typeface="Consolas"/>
-              </a:rPr>
-              <a:t>else</a:t>
-            </a:r>
-            <a:r>
-              <a:rPr lang="en-US"/>
-              <a:t>: Runs if no error occurs</a:t>
-            </a:r>
-          </a:p>
-          <a:p>
-            <a:pPr lvl="1"/>
-            <a:r>
-              <a:rPr lang="en-US">
-                <a:sym typeface="Consolas"/>
-              </a:rPr>
-              <a:t>finally</a:t>
-            </a:r>
-            <a:r>
-              <a:rPr lang="en-US"/>
-              <a:t>: always runs</a:t>
-            </a:r>
-          </a:p>
-          <a:p>
-            <a:pPr lvl="1"/>
-            <a:endParaRPr lang="en-US"/>
-          </a:p>
-          <a:p>
-            <a:pPr lvl="0"/>
-            <a:r>
-              <a:rPr lang="en-US"/>
-              <a:t>Example</a:t>
-            </a:r>
-          </a:p>
-          <a:p>
-            <a:pPr lvl="0"/>
-            <a:r>
-              <a:rPr lang="en-US">
-                <a:sym typeface="Consolas"/>
-              </a:rPr>
-              <a:t>try:</a:t>
-            </a:r>
-          </a:p>
-          <a:p>
-            <a:pPr lvl="0"/>
-            <a:r>
-              <a:rPr lang="en-US">
-                <a:sym typeface="Consolas"/>
-              </a:rPr>
-              <a:t>    result = 10 / 2</a:t>
-            </a:r>
-          </a:p>
-          <a:p>
-            <a:pPr lvl="0"/>
-            <a:r>
-              <a:rPr lang="en-US">
-                <a:sym typeface="Consolas"/>
-              </a:rPr>
-              <a:t>except ZeroDivisionError:</a:t>
-            </a:r>
-          </a:p>
-          <a:p>
-            <a:pPr lvl="0"/>
-            <a:r>
-              <a:rPr lang="en-US">
-                <a:sym typeface="Consolas"/>
-              </a:rPr>
-              <a:t>    print("Cannot divide by zero.")</a:t>
-            </a:r>
-          </a:p>
-          <a:p>
-            <a:pPr lvl="0"/>
-            <a:r>
-              <a:rPr lang="en-US">
-                <a:sym typeface="Consolas"/>
-              </a:rPr>
-              <a:t>else:</a:t>
-            </a:r>
-          </a:p>
-          <a:p>
-            <a:pPr lvl="0"/>
-            <a:r>
-              <a:rPr lang="en-US">
-                <a:sym typeface="Consolas"/>
-              </a:rPr>
-              <a:t>    print("Division successful.")</a:t>
-            </a:r>
-          </a:p>
-          <a:p>
-            <a:pPr lvl="0"/>
-            <a:r>
-              <a:rPr lang="en-US">
-                <a:sym typeface="Consolas"/>
-              </a:rPr>
-              <a:t>finally:</a:t>
-            </a:r>
-          </a:p>
-          <a:p>
-            <a:pPr lvl="0"/>
-            <a:r>
-              <a:rPr lang="en-US">
-                <a:sym typeface="Consolas"/>
-              </a:rPr>
-              <a:t>    print("Done.")</a:t>
-            </a:r>
-          </a:p>
-          <a:p>
-            <a:pPr lvl="0"/>
-            <a:endParaRPr lang="en-US">
-              <a:sym typeface="Consolas"/>
-            </a:endParaRPr>
-          </a:p>
-          <a:p>
-            <a:pPr lvl="0"/>
-            <a:endParaRPr lang="en-US"/>
-          </a:p>
-          <a:p>
-            <a:pPr lvl="0"/>
-            <a:endParaRPr lang="en-US"/>
-          </a:p>
-        </p:txBody>
-      </p:sp>
-    </p:spTree>
-  </p:cSld>
-  <p:clrMapOvr>
-    <a:masterClrMapping/>
-  </p:clrMapOvr>
-</p:sld>
-</file>
-
-<file path=ppt/slides/slide27.xml><?xml version="1.0" encoding="utf-8"?>
-<p:sld xmlns:a="http://schemas.openxmlformats.org/drawingml/2006/main" xmlns:r="http://schemas.openxmlformats.org/officeDocument/2006/relationships" xmlns:p="http://schemas.openxmlformats.org/presentationml/2006/main">
-  <p:cSld>
-    <p:spTree>
-      <p:nvGrpSpPr>
-        <p:cNvPr id="1" name="Shape 505"/>
-        <p:cNvGrpSpPr/>
-        <p:nvPr/>
-      </p:nvGrpSpPr>
-      <p:grpSpPr>
-        <a:xfrm>
-          <a:off x="0" y="0"/>
-          <a:ext cx="0" cy="0"/>
-          <a:chOff x="0" y="0"/>
-          <a:chExt cx="0" cy="0"/>
-        </a:xfrm>
-      </p:grpSpPr>
-      <p:sp>
-        <p:nvSpPr>
-          <p:cNvPr id="506" name="Google Shape;506;p61"/>
-          <p:cNvSpPr txBox="1">
-            <a:spLocks noGrp="1"/>
-          </p:cNvSpPr>
-          <p:nvPr>
-            <p:ph type="title"/>
-          </p:nvPr>
-        </p:nvSpPr>
-        <p:spPr>
-          <a:xfrm>
-            <a:off x="411480" y="308611"/>
-            <a:ext cx="6173470" cy="891778"/>
-          </a:xfrm>
-          <a:noFill/>
-          <a:ln>
-            <a:noFill/>
-          </a:ln>
-        </p:spPr>
-        <p:txBody>
-          <a:bodyPr spcFirstLastPara="1" wrap="square" lIns="91425" tIns="91425" rIns="91425" bIns="91425" anchor="t" anchorCtr="0">
-            <a:normAutofit/>
-          </a:bodyPr>
-          <a:lstStyle/>
-          <a:p>
-            <a:pPr lvl="0"/>
-            <a:r>
-              <a:rPr lang="en-US"/>
-              <a:t>RAISE</a:t>
-            </a:r>
-          </a:p>
-        </p:txBody>
-      </p:sp>
-      <p:sp>
-        <p:nvSpPr>
-          <p:cNvPr id="507" name="Google Shape;507;p61"/>
-          <p:cNvSpPr txBox="1">
-            <a:spLocks noGrp="1"/>
-          </p:cNvSpPr>
-          <p:nvPr>
-            <p:ph type="body" idx="1"/>
-          </p:nvPr>
-        </p:nvSpPr>
-        <p:spPr>
-          <a:xfrm>
-            <a:off x="411480" y="1611630"/>
-            <a:ext cx="5096351" cy="3017520"/>
-          </a:xfrm>
-          <a:noFill/>
-          <a:ln>
-            <a:noFill/>
-          </a:ln>
-        </p:spPr>
-        <p:txBody>
-          <a:bodyPr spcFirstLastPara="1" wrap="square" lIns="91425" tIns="91425" rIns="91425" bIns="91425" anchor="t" anchorCtr="0">
-            <a:normAutofit fontScale="62500" lnSpcReduction="20000"/>
-          </a:bodyPr>
-          <a:lstStyle/>
-          <a:p>
-            <a:pPr lvl="0"/>
-            <a:r>
-              <a:rPr lang="en-US"/>
-              <a:t>“raise” is used to intentionally trigger an error</a:t>
-            </a:r>
-          </a:p>
-          <a:p>
-            <a:pPr lvl="0"/>
-            <a:r>
-              <a:rPr lang="en-US"/>
-              <a:t>Helps enforce rules and catch problems early</a:t>
-            </a:r>
-          </a:p>
-          <a:p>
-            <a:pPr lvl="0"/>
-            <a:r>
-              <a:rPr lang="en-US"/>
-              <a:t>Make your code more predictable and safe</a:t>
-            </a:r>
-          </a:p>
-          <a:p>
-            <a:pPr lvl="0"/>
-            <a:r>
-              <a:rPr lang="en-US"/>
-              <a:t>Useful for custom error messages or defining your own exceptions</a:t>
-            </a:r>
-          </a:p>
-          <a:p>
-            <a:pPr lvl="0"/>
-            <a:endParaRPr lang="en-US"/>
-          </a:p>
-          <a:p>
-            <a:pPr lvl="0"/>
-            <a:r>
-              <a:rPr lang="en-US"/>
-              <a:t>Syntax</a:t>
-            </a:r>
-          </a:p>
-          <a:p>
-            <a:pPr lvl="0"/>
-            <a:endParaRPr lang="en-US">
-              <a:sym typeface="Consolas"/>
-            </a:endParaRPr>
-          </a:p>
-          <a:p>
-            <a:pPr lvl="0"/>
-            <a:r>
-              <a:rPr lang="en-US">
-                <a:sym typeface="Consolas"/>
-              </a:rPr>
-              <a:t>if age &lt; 0:</a:t>
-            </a:r>
-          </a:p>
-          <a:p>
-            <a:pPr lvl="0"/>
-            <a:r>
-              <a:rPr lang="en-US">
-                <a:sym typeface="Consolas"/>
-              </a:rPr>
-              <a:t>raise ValueError("Age cannot be negative.")</a:t>
-            </a:r>
-          </a:p>
-          <a:p>
-            <a:pPr lvl="0"/>
-            <a:endParaRPr lang="en-US">
-              <a:sym typeface="Consolas"/>
-            </a:endParaRPr>
-          </a:p>
-          <a:p>
-            <a:pPr lvl="0"/>
-            <a:r>
-              <a:rPr lang="en-US"/>
-              <a:t>Built-in Exceptions</a:t>
-            </a:r>
-          </a:p>
-          <a:p>
-            <a:pPr lvl="0"/>
-            <a:r>
-              <a:rPr lang="en-US">
-                <a:sym typeface="Consolas"/>
-              </a:rPr>
-              <a:t>raise TypeError("This function only accepts strings.")</a:t>
-            </a:r>
-          </a:p>
-          <a:p>
-            <a:pPr lvl="0"/>
-            <a:r>
-              <a:rPr lang="en-US">
-                <a:sym typeface="Consolas"/>
-              </a:rPr>
-              <a:t>raise ZeroDivisionError("Cannot divide by zero.")</a:t>
-            </a:r>
-          </a:p>
-          <a:p>
-            <a:pPr lvl="0"/>
-            <a:endParaRPr lang="en-US">
-              <a:sym typeface="Consolas"/>
-            </a:endParaRPr>
-          </a:p>
-          <a:p>
-            <a:pPr lvl="0"/>
-            <a:endParaRPr lang="en-US"/>
-          </a:p>
-          <a:p>
-            <a:pPr lvl="0"/>
-            <a:r>
-              <a:rPr lang="en-US"/>
-              <a:t>Raised errors can be caught and handled with try / except</a:t>
-            </a:r>
-          </a:p>
-          <a:p>
-            <a:pPr lvl="0"/>
-            <a:r>
-              <a:rPr lang="en-US"/>
-              <a:t>If not caught, they will be passed to the output and stop the program</a:t>
-            </a:r>
-          </a:p>
-          <a:p>
-            <a:pPr lvl="0"/>
-            <a:endParaRPr lang="en-US"/>
-          </a:p>
-          <a:p>
-            <a:pPr lvl="0"/>
-            <a:endParaRPr lang="en-US"/>
-          </a:p>
-          <a:p>
-            <a:pPr lvl="0"/>
-            <a:endParaRPr lang="en-US"/>
-          </a:p>
-        </p:txBody>
-      </p:sp>
-    </p:spTree>
-  </p:cSld>
-  <p:clrMapOvr>
-    <a:masterClrMapping/>
-  </p:clrMapOvr>
-</p:sld>
-</file>
-
-<file path=ppt/slides/slide28.xml><?xml version="1.0" encoding="utf-8"?>
-<p:sld xmlns:a="http://schemas.openxmlformats.org/drawingml/2006/main" xmlns:r="http://schemas.openxmlformats.org/officeDocument/2006/relationships" xmlns:p="http://schemas.openxmlformats.org/presentationml/2006/main" show="0">
-  <p:cSld>
-    <p:spTree>
-      <p:nvGrpSpPr>
-        <p:cNvPr id="1" name="Shape 511"/>
-        <p:cNvGrpSpPr/>
-        <p:nvPr/>
-      </p:nvGrpSpPr>
-      <p:grpSpPr>
-        <a:xfrm>
-          <a:off x="0" y="0"/>
-          <a:ext cx="0" cy="0"/>
-          <a:chOff x="0" y="0"/>
-          <a:chExt cx="0" cy="0"/>
-        </a:xfrm>
-      </p:grpSpPr>
-      <p:sp>
-        <p:nvSpPr>
-          <p:cNvPr id="512" name="Google Shape;512;p62"/>
-          <p:cNvSpPr txBox="1">
-            <a:spLocks noGrp="1"/>
-          </p:cNvSpPr>
-          <p:nvPr>
-            <p:ph type="title"/>
-          </p:nvPr>
-        </p:nvSpPr>
-        <p:spPr>
-          <a:xfrm>
-            <a:off x="411480" y="308611"/>
-            <a:ext cx="6173470" cy="891778"/>
-          </a:xfrm>
-          <a:noFill/>
-          <a:ln>
-            <a:noFill/>
-          </a:ln>
-        </p:spPr>
-        <p:txBody>
-          <a:bodyPr spcFirstLastPara="1" wrap="square" lIns="91425" tIns="91425" rIns="91425" bIns="91425" anchor="t" anchorCtr="0">
-            <a:normAutofit/>
-          </a:bodyPr>
-          <a:lstStyle/>
-          <a:p>
-            <a:pPr lvl="0"/>
-            <a:r>
-              <a:rPr lang="en-US"/>
-              <a:t>FINAL CODING EXERCISE</a:t>
-            </a:r>
-          </a:p>
-        </p:txBody>
-      </p:sp>
-      <p:sp>
-        <p:nvSpPr>
-          <p:cNvPr id="513" name="Google Shape;513;p62"/>
-          <p:cNvSpPr txBox="1">
-            <a:spLocks noGrp="1"/>
-          </p:cNvSpPr>
-          <p:nvPr>
-            <p:ph type="body" idx="1"/>
-          </p:nvPr>
-        </p:nvSpPr>
-        <p:spPr>
-          <a:xfrm>
-            <a:off x="411480" y="1611630"/>
-            <a:ext cx="5096351" cy="3017520"/>
-          </a:xfrm>
-          <a:noFill/>
-          <a:ln>
-            <a:noFill/>
-          </a:ln>
-        </p:spPr>
-        <p:txBody>
-          <a:bodyPr spcFirstLastPara="1" wrap="square" lIns="91425" tIns="91425" rIns="91425" bIns="91425" anchor="t" anchorCtr="0">
-            <a:normAutofit fontScale="85000" lnSpcReduction="10000"/>
-          </a:bodyPr>
-          <a:lstStyle/>
-          <a:p>
-            <a:pPr lvl="0"/>
-            <a:r>
-              <a:rPr lang="en-US"/>
-              <a:t>20 min </a:t>
-            </a:r>
-          </a:p>
-          <a:p>
-            <a:pPr lvl="0"/>
-            <a:endParaRPr lang="en-US"/>
-          </a:p>
-          <a:p>
-            <a:pPr lvl="0"/>
-            <a:r>
-              <a:rPr lang="en-US"/>
-              <a:t>Write a block of code that takes in user input until they guess the random number</a:t>
-            </a:r>
-          </a:p>
-          <a:p>
-            <a:pPr lvl="0"/>
-            <a:r>
-              <a:rPr lang="en-US"/>
-              <a:t>Prompt the user to help them with their guess</a:t>
-            </a:r>
-          </a:p>
-          <a:p>
-            <a:pPr lvl="0"/>
-            <a:r>
-              <a:rPr lang="en-US"/>
-              <a:t>Handle the following situations</a:t>
-            </a:r>
-          </a:p>
-          <a:p>
-            <a:pPr lvl="0"/>
-            <a:r>
-              <a:rPr lang="en-US"/>
-              <a:t>User does not input the right python data type</a:t>
-            </a:r>
-          </a:p>
-          <a:p>
-            <a:pPr lvl="0"/>
-            <a:r>
-              <a:rPr lang="en-US"/>
-              <a:t>User inputs a negative number</a:t>
-            </a:r>
-          </a:p>
-          <a:p>
-            <a:pPr lvl="0"/>
-            <a:r>
-              <a:rPr lang="en-US"/>
-              <a:t>User inputs a number outside the guess range</a:t>
-            </a:r>
-          </a:p>
-          <a:p>
-            <a:pPr lvl="0"/>
-            <a:r>
-              <a:rPr lang="en-US"/>
-              <a:t>Hint: use random.randomint() to generate a random number</a:t>
-            </a:r>
-          </a:p>
-        </p:txBody>
-      </p:sp>
-    </p:spTree>
-  </p:cSld>
-  <p:clrMapOvr>
-    <a:masterClrMapping/>
-  </p:clrMapOvr>
-</p:sld>
-</file>
-
-<file path=ppt/slides/slide29.xml><?xml version="1.0" encoding="utf-8"?>
-<p:sld xmlns:a="http://schemas.openxmlformats.org/drawingml/2006/main" xmlns:r="http://schemas.openxmlformats.org/officeDocument/2006/relationships" xmlns:p="http://schemas.openxmlformats.org/presentationml/2006/main">
-  <p:cSld>
-    <p:spTree>
-      <p:nvGrpSpPr>
-        <p:cNvPr id="1" name="Shape 517"/>
-        <p:cNvGrpSpPr/>
-        <p:nvPr/>
-      </p:nvGrpSpPr>
-      <p:grpSpPr>
-        <a:xfrm>
-          <a:off x="0" y="0"/>
-          <a:ext cx="0" cy="0"/>
-          <a:chOff x="0" y="0"/>
-          <a:chExt cx="0" cy="0"/>
-        </a:xfrm>
-      </p:grpSpPr>
-      <p:sp>
-        <p:nvSpPr>
-          <p:cNvPr id="518" name="Google Shape;518;p63"/>
-          <p:cNvSpPr txBox="1">
-            <a:spLocks noGrp="1"/>
-          </p:cNvSpPr>
-          <p:nvPr>
-            <p:ph type="title"/>
-          </p:nvPr>
-        </p:nvSpPr>
-        <p:spPr>
-          <a:xfrm>
-            <a:off x="411480" y="308611"/>
-            <a:ext cx="6173470" cy="891778"/>
-          </a:xfrm>
-          <a:noFill/>
-          <a:ln>
-            <a:noFill/>
-          </a:ln>
-        </p:spPr>
-        <p:txBody>
-          <a:bodyPr spcFirstLastPara="1" wrap="square" lIns="91425" tIns="91425" rIns="91425" bIns="91425" anchor="t" anchorCtr="0">
-            <a:normAutofit/>
-          </a:bodyPr>
-          <a:lstStyle/>
-          <a:p>
-            <a:pPr lvl="0"/>
-            <a:r>
-              <a:rPr lang="en-US"/>
-              <a:t>FINAL CODING EXERCISE</a:t>
-            </a:r>
-          </a:p>
-        </p:txBody>
-      </p:sp>
-      <p:sp>
-        <p:nvSpPr>
-          <p:cNvPr id="519" name="Google Shape;519;p63"/>
-          <p:cNvSpPr txBox="1">
-            <a:spLocks noGrp="1"/>
-          </p:cNvSpPr>
-          <p:nvPr>
-            <p:ph type="body" idx="1"/>
-          </p:nvPr>
-        </p:nvSpPr>
-        <p:spPr>
-          <a:xfrm>
-            <a:off x="411480" y="1611630"/>
-            <a:ext cx="5096351" cy="3017520"/>
-          </a:xfrm>
-          <a:noFill/>
-          <a:ln>
-            <a:noFill/>
-          </a:ln>
-        </p:spPr>
-        <p:txBody>
-          <a:bodyPr spcFirstLastPara="1" wrap="square" lIns="91425" tIns="91425" rIns="91425" bIns="91425" anchor="t" anchorCtr="0">
-            <a:normAutofit fontScale="77500" lnSpcReduction="20000"/>
-          </a:bodyPr>
-          <a:lstStyle/>
-          <a:p>
-            <a:pPr lvl="0"/>
-            <a:r>
-              <a:rPr lang="en-US"/>
-              <a:t>20 min </a:t>
-            </a:r>
-          </a:p>
-          <a:p>
-            <a:pPr lvl="0"/>
-            <a:r>
-              <a:rPr lang="en-US"/>
-              <a:t>Given a list of numbers, write a program that:</a:t>
-            </a:r>
-          </a:p>
-          <a:p>
-            <a:pPr lvl="0"/>
-            <a:r>
-              <a:rPr lang="en-US"/>
-              <a:t>Loops through the list</a:t>
-            </a:r>
-          </a:p>
-          <a:p>
-            <a:pPr lvl="0"/>
-            <a:r>
-              <a:rPr lang="en-US"/>
-              <a:t>Skips any None values or non-integer types with an error message using try/except</a:t>
-            </a:r>
-          </a:p>
-          <a:p>
-            <a:pPr lvl="0"/>
-            <a:r>
-              <a:rPr lang="en-US"/>
-              <a:t>Raises a ValueError if it finds a negative number (stops the program)</a:t>
-            </a:r>
-          </a:p>
-          <a:p>
-            <a:pPr lvl="0"/>
-            <a:r>
-              <a:rPr lang="en-US"/>
-              <a:t>Collects all valid positive integers into a new list</a:t>
-            </a:r>
-          </a:p>
-          <a:p>
-            <a:pPr lvl="0"/>
-            <a:r>
-              <a:rPr lang="en-US"/>
-              <a:t>Prints the new list and the sum of its numbers</a:t>
-            </a:r>
-          </a:p>
-          <a:p>
-            <a:pPr lvl="0"/>
-            <a:r>
-              <a:rPr lang="en-US"/>
-              <a:t>List: </a:t>
-            </a:r>
-            <a:r>
-              <a:rPr lang="en-US">
-                <a:sym typeface="Consolas"/>
-              </a:rPr>
-              <a:t>[10, -5, 20, ‘hello’, 5.2, 15, None, 30]</a:t>
-            </a:r>
-          </a:p>
-          <a:p>
-            <a:pPr lvl="0"/>
-            <a:r>
-              <a:rPr lang="en-US"/>
-              <a:t>Once you have a solution, remove -5 from the list and run it again.</a:t>
-            </a:r>
-          </a:p>
-          <a:p>
-            <a:pPr lvl="0"/>
-            <a:r>
-              <a:rPr lang="en-US"/>
-              <a:t>Hints:  </a:t>
-            </a:r>
-          </a:p>
-          <a:p>
-            <a:pPr lvl="0"/>
-            <a:r>
-              <a:rPr lang="en-US"/>
-              <a:t>Use </a:t>
-            </a:r>
-            <a:r>
-              <a:rPr lang="en-US">
-                <a:sym typeface="Consolas"/>
-              </a:rPr>
-              <a:t>isinstance(item, int) </a:t>
-            </a:r>
-            <a:r>
-              <a:rPr lang="en-US"/>
-              <a:t>to check types</a:t>
-            </a:r>
-          </a:p>
-          <a:p>
-            <a:pPr lvl="0"/>
-            <a:r>
-              <a:rPr lang="en-US"/>
-              <a:t>Build the valid list as you go</a:t>
-            </a:r>
-            <a:endParaRPr lang="en-US">
-              <a:sym typeface="Consolas"/>
-            </a:endParaRPr>
-          </a:p>
-        </p:txBody>
-      </p:sp>
-    </p:spTree>
+    <p:extLst>
+      <p:ext uri="{BB962C8B-B14F-4D97-AF65-F5344CB8AC3E}">
+        <p14:creationId xmlns:p14="http://schemas.microsoft.com/office/powerpoint/2010/main" val="3901216339"/>
+      </p:ext>
+    </p:extLst>
   </p:cSld>
   <p:clrMapOvr>
     <a:masterClrMapping/>
